--- a/GreenTech_MiniProject_Infrastructure_updated.pptx
+++ b/GreenTech_MiniProject_Infrastructure_updated.pptx
@@ -12,19 +12,20 @@
     <p:sldId id="260" r:id="rId6"/>
     <p:sldId id="261" r:id="rId7"/>
     <p:sldId id="270" r:id="rId8"/>
-    <p:sldId id="271" r:id="rId9"/>
-    <p:sldId id="262" r:id="rId10"/>
-    <p:sldId id="263" r:id="rId11"/>
-    <p:sldId id="272" r:id="rId12"/>
-    <p:sldId id="274" r:id="rId13"/>
-    <p:sldId id="273" r:id="rId14"/>
-    <p:sldId id="275" r:id="rId15"/>
-    <p:sldId id="264" r:id="rId16"/>
-    <p:sldId id="265" r:id="rId17"/>
-    <p:sldId id="266" r:id="rId18"/>
-    <p:sldId id="268" r:id="rId19"/>
-    <p:sldId id="269" r:id="rId20"/>
-    <p:sldId id="267" r:id="rId21"/>
+    <p:sldId id="276" r:id="rId9"/>
+    <p:sldId id="271" r:id="rId10"/>
+    <p:sldId id="262" r:id="rId11"/>
+    <p:sldId id="263" r:id="rId12"/>
+    <p:sldId id="272" r:id="rId13"/>
+    <p:sldId id="274" r:id="rId14"/>
+    <p:sldId id="273" r:id="rId15"/>
+    <p:sldId id="275" r:id="rId16"/>
+    <p:sldId id="264" r:id="rId17"/>
+    <p:sldId id="265" r:id="rId18"/>
+    <p:sldId id="266" r:id="rId19"/>
+    <p:sldId id="268" r:id="rId20"/>
+    <p:sldId id="269" r:id="rId21"/>
+    <p:sldId id="267" r:id="rId22"/>
   </p:sldIdLst>
   <p:sldSz cx="12192000" cy="6858000"/>
   <p:notesSz cx="6858000" cy="9144000"/>
@@ -3791,13 +3792,13 @@
   <p:clrMapOvr>
     <a:masterClrMapping/>
   </p:clrMapOvr>
-  <mc:AlternateContent xmlns:mc="http://schemas.openxmlformats.org/markup-compatibility/2006">
-    <mc:Choice xmlns:p15="http://schemas.microsoft.com/office/powerpoint/2012/main" Requires="p15">
+  <mc:AlternateContent xmlns:mc="http://schemas.openxmlformats.org/markup-compatibility/2006" xmlns:p15="http://schemas.microsoft.com/office/powerpoint/2012/main">
+    <mc:Choice Requires="p15">
       <p:transition xmlns:p14="http://schemas.microsoft.com/office/powerpoint/2010/main" spd="slow" p14:dur="1250">
         <p15:prstTrans prst="airplane"/>
       </p:transition>
     </mc:Choice>
-    <mc:Fallback>
+    <mc:Fallback xmlns="">
       <p:transition spd="slow">
         <p:fade/>
       </p:transition>
@@ -3860,6 +3861,1037 @@
                 </a:solidFill>
                 <a:latin typeface="Aptos"/>
               </a:rPr>
+              <a:t>6. Audit &amp; kiểm soát rủi ro</a:t>
+            </a:r>
+          </a:p>
+        </p:txBody>
+      </p:sp>
+      <p:sp>
+        <p:nvSpPr>
+          <p:cNvPr id="3" name="Rectangle 2"/>
+          <p:cNvSpPr/>
+          <p:nvPr/>
+        </p:nvSpPr>
+        <p:spPr>
+          <a:xfrm>
+            <a:off x="612648" y="960120"/>
+            <a:ext cx="822960" cy="54864"/>
+          </a:xfrm>
+          <a:prstGeom prst="rect">
+            <a:avLst/>
+          </a:prstGeom>
+          <a:solidFill>
+            <a:srgbClr val="27AE60"/>
+          </a:solidFill>
+          <a:ln>
+            <a:noFill/>
+          </a:ln>
+        </p:spPr>
+        <p:style>
+          <a:lnRef idx="1">
+            <a:schemeClr val="accent1"/>
+          </a:lnRef>
+          <a:fillRef idx="3">
+            <a:schemeClr val="accent1"/>
+          </a:fillRef>
+          <a:effectRef idx="2">
+            <a:schemeClr val="accent1"/>
+          </a:effectRef>
+          <a:fontRef idx="minor">
+            <a:schemeClr val="lt1"/>
+          </a:fontRef>
+        </p:style>
+        <p:txBody>
+          <a:bodyPr rtlCol="0" anchor="ctr"/>
+          <a:lstStyle/>
+          <a:p>
+            <a:pPr algn="ctr"/>
+            <a:endParaRPr/>
+          </a:p>
+        </p:txBody>
+      </p:sp>
+      <p:sp>
+        <p:nvSpPr>
+          <p:cNvPr id="4" name="TextBox 3"/>
+          <p:cNvSpPr txBox="1"/>
+          <p:nvPr/>
+        </p:nvSpPr>
+        <p:spPr>
+          <a:xfrm>
+            <a:off x="9601200" y="411480"/>
+            <a:ext cx="1920240" cy="274320"/>
+          </a:xfrm>
+          <a:prstGeom prst="rect">
+            <a:avLst/>
+          </a:prstGeom>
+          <a:noFill/>
+        </p:spPr>
+        <p:txBody>
+          <a:bodyPr wrap="square" lIns="54864" tIns="54864" rIns="54864" bIns="54864" anchor="t">
+            <a:spAutoFit/>
+          </a:bodyPr>
+          <a:lstStyle/>
+          <a:p>
+            <a:pPr algn="r"/>
+            <a:r>
+              <a:rPr sz="1000" b="1">
+                <a:solidFill>
+                  <a:srgbClr val="27AE60"/>
+                </a:solidFill>
+                <a:latin typeface="Aptos"/>
+              </a:rPr>
+              <a:t>AN TOÀN</a:t>
+            </a:r>
+          </a:p>
+        </p:txBody>
+      </p:sp>
+      <p:sp>
+        <p:nvSpPr>
+          <p:cNvPr id="5" name="TextBox 4"/>
+          <p:cNvSpPr txBox="1"/>
+          <p:nvPr/>
+        </p:nvSpPr>
+        <p:spPr>
+          <a:xfrm>
+            <a:off x="731520" y="1234440"/>
+            <a:ext cx="10515600" cy="411480"/>
+          </a:xfrm>
+          <a:prstGeom prst="rect">
+            <a:avLst/>
+          </a:prstGeom>
+          <a:noFill/>
+        </p:spPr>
+        <p:txBody>
+          <a:bodyPr wrap="square" lIns="54864" tIns="54864" rIns="54864" bIns="54864" anchor="t">
+            <a:spAutoFit/>
+          </a:bodyPr>
+          <a:lstStyle/>
+          <a:p>
+            <a:r>
+              <a:rPr sz="1700" b="0">
+                <a:solidFill>
+                  <a:srgbClr val="2F3E46"/>
+                </a:solidFill>
+                <a:latin typeface="Aptos"/>
+              </a:rPr>
+              <a:t>Trước khi chạy script, thực hiện checklist thẩm định (Audit):</a:t>
+            </a:r>
+          </a:p>
+        </p:txBody>
+      </p:sp>
+      <p:sp>
+        <p:nvSpPr>
+          <p:cNvPr id="6" name="Oval 5"/>
+          <p:cNvSpPr/>
+          <p:nvPr/>
+        </p:nvSpPr>
+        <p:spPr>
+          <a:xfrm>
+            <a:off x="822960" y="1828800"/>
+            <a:ext cx="438912" cy="438912"/>
+          </a:xfrm>
+          <a:prstGeom prst="ellipse">
+            <a:avLst/>
+          </a:prstGeom>
+          <a:solidFill>
+            <a:srgbClr val="27AE60"/>
+          </a:solidFill>
+          <a:ln>
+            <a:noFill/>
+          </a:ln>
+        </p:spPr>
+        <p:style>
+          <a:lnRef idx="1">
+            <a:schemeClr val="accent1"/>
+          </a:lnRef>
+          <a:fillRef idx="3">
+            <a:schemeClr val="accent1"/>
+          </a:fillRef>
+          <a:effectRef idx="2">
+            <a:schemeClr val="accent1"/>
+          </a:effectRef>
+          <a:fontRef idx="minor">
+            <a:schemeClr val="lt1"/>
+          </a:fontRef>
+        </p:style>
+        <p:txBody>
+          <a:bodyPr rtlCol="0" anchor="ctr"/>
+          <a:lstStyle/>
+          <a:p>
+            <a:pPr algn="ctr"/>
+            <a:endParaRPr/>
+          </a:p>
+        </p:txBody>
+      </p:sp>
+      <p:sp>
+        <p:nvSpPr>
+          <p:cNvPr id="7" name="TextBox 6"/>
+          <p:cNvSpPr txBox="1"/>
+          <p:nvPr/>
+        </p:nvSpPr>
+        <p:spPr>
+          <a:xfrm>
+            <a:off x="822960" y="1911095"/>
+            <a:ext cx="438912" cy="182880"/>
+          </a:xfrm>
+          <a:prstGeom prst="rect">
+            <a:avLst/>
+          </a:prstGeom>
+          <a:noFill/>
+        </p:spPr>
+        <p:txBody>
+          <a:bodyPr wrap="square" lIns="54864" tIns="54864" rIns="54864" bIns="54864" anchor="t">
+            <a:spAutoFit/>
+          </a:bodyPr>
+          <a:lstStyle/>
+          <a:p>
+            <a:pPr algn="ctr"/>
+            <a:r>
+              <a:rPr sz="1100" b="1">
+                <a:solidFill>
+                  <a:srgbClr val="FFFFFF"/>
+                </a:solidFill>
+                <a:latin typeface="Aptos"/>
+              </a:rPr>
+              <a:t>01</a:t>
+            </a:r>
+          </a:p>
+        </p:txBody>
+      </p:sp>
+      <p:sp>
+        <p:nvSpPr>
+          <p:cNvPr id="8" name="TextBox 7"/>
+          <p:cNvSpPr txBox="1"/>
+          <p:nvPr/>
+        </p:nvSpPr>
+        <p:spPr>
+          <a:xfrm>
+            <a:off x="1508760" y="1828800"/>
+            <a:ext cx="2194560" cy="292608"/>
+          </a:xfrm>
+          <a:prstGeom prst="rect">
+            <a:avLst/>
+          </a:prstGeom>
+          <a:noFill/>
+        </p:spPr>
+        <p:txBody>
+          <a:bodyPr wrap="square" lIns="54864" tIns="54864" rIns="54864" bIns="54864" anchor="t">
+            <a:spAutoFit/>
+          </a:bodyPr>
+          <a:lstStyle/>
+          <a:p>
+            <a:r>
+              <a:rPr sz="1500" b="1">
+                <a:solidFill>
+                  <a:srgbClr val="12273A"/>
+                </a:solidFill>
+                <a:latin typeface="Aptos"/>
+              </a:rPr>
+              <a:t>Đường dẫn</a:t>
+            </a:r>
+          </a:p>
+        </p:txBody>
+      </p:sp>
+      <p:sp>
+        <p:nvSpPr>
+          <p:cNvPr id="9" name="TextBox 8"/>
+          <p:cNvSpPr txBox="1"/>
+          <p:nvPr/>
+        </p:nvSpPr>
+        <p:spPr>
+          <a:xfrm>
+            <a:off x="3657600" y="1828800"/>
+            <a:ext cx="7315200" cy="384048"/>
+          </a:xfrm>
+          <a:prstGeom prst="rect">
+            <a:avLst/>
+          </a:prstGeom>
+          <a:noFill/>
+        </p:spPr>
+        <p:txBody>
+          <a:bodyPr wrap="square" lIns="54864" tIns="54864" rIns="54864" bIns="54864" anchor="t">
+            <a:spAutoFit/>
+          </a:bodyPr>
+          <a:lstStyle/>
+          <a:p>
+            <a:r>
+              <a:rPr sz="1400" b="0">
+                <a:solidFill>
+                  <a:srgbClr val="2F3E46"/>
+                </a:solidFill>
+                <a:latin typeface="Aptos"/>
+              </a:rPr>
+              <a:t>Xác nhận đúng thư mục dự án và file log nguồn.</a:t>
+            </a:r>
+          </a:p>
+        </p:txBody>
+      </p:sp>
+      <p:sp>
+        <p:nvSpPr>
+          <p:cNvPr id="10" name="Oval 9"/>
+          <p:cNvSpPr/>
+          <p:nvPr/>
+        </p:nvSpPr>
+        <p:spPr>
+          <a:xfrm>
+            <a:off x="822960" y="2578608"/>
+            <a:ext cx="438912" cy="438912"/>
+          </a:xfrm>
+          <a:prstGeom prst="ellipse">
+            <a:avLst/>
+          </a:prstGeom>
+          <a:solidFill>
+            <a:srgbClr val="27AE60"/>
+          </a:solidFill>
+          <a:ln>
+            <a:noFill/>
+          </a:ln>
+        </p:spPr>
+        <p:style>
+          <a:lnRef idx="1">
+            <a:schemeClr val="accent1"/>
+          </a:lnRef>
+          <a:fillRef idx="3">
+            <a:schemeClr val="accent1"/>
+          </a:fillRef>
+          <a:effectRef idx="2">
+            <a:schemeClr val="accent1"/>
+          </a:effectRef>
+          <a:fontRef idx="minor">
+            <a:schemeClr val="lt1"/>
+          </a:fontRef>
+        </p:style>
+        <p:txBody>
+          <a:bodyPr rtlCol="0" anchor="ctr"/>
+          <a:lstStyle/>
+          <a:p>
+            <a:pPr algn="ctr"/>
+            <a:endParaRPr/>
+          </a:p>
+        </p:txBody>
+      </p:sp>
+      <p:sp>
+        <p:nvSpPr>
+          <p:cNvPr id="11" name="TextBox 10"/>
+          <p:cNvSpPr txBox="1"/>
+          <p:nvPr/>
+        </p:nvSpPr>
+        <p:spPr>
+          <a:xfrm>
+            <a:off x="822960" y="2660903"/>
+            <a:ext cx="438912" cy="182880"/>
+          </a:xfrm>
+          <a:prstGeom prst="rect">
+            <a:avLst/>
+          </a:prstGeom>
+          <a:noFill/>
+        </p:spPr>
+        <p:txBody>
+          <a:bodyPr wrap="square" lIns="54864" tIns="54864" rIns="54864" bIns="54864" anchor="t">
+            <a:spAutoFit/>
+          </a:bodyPr>
+          <a:lstStyle/>
+          <a:p>
+            <a:pPr algn="ctr"/>
+            <a:r>
+              <a:rPr sz="1100" b="1">
+                <a:solidFill>
+                  <a:srgbClr val="FFFFFF"/>
+                </a:solidFill>
+                <a:latin typeface="Aptos"/>
+              </a:rPr>
+              <a:t>02</a:t>
+            </a:r>
+          </a:p>
+        </p:txBody>
+      </p:sp>
+      <p:sp>
+        <p:nvSpPr>
+          <p:cNvPr id="12" name="TextBox 11"/>
+          <p:cNvSpPr txBox="1"/>
+          <p:nvPr/>
+        </p:nvSpPr>
+        <p:spPr>
+          <a:xfrm>
+            <a:off x="1508760" y="2578608"/>
+            <a:ext cx="2194560" cy="292608"/>
+          </a:xfrm>
+          <a:prstGeom prst="rect">
+            <a:avLst/>
+          </a:prstGeom>
+          <a:noFill/>
+        </p:spPr>
+        <p:txBody>
+          <a:bodyPr wrap="square" lIns="54864" tIns="54864" rIns="54864" bIns="54864" anchor="t">
+            <a:spAutoFit/>
+          </a:bodyPr>
+          <a:lstStyle/>
+          <a:p>
+            <a:r>
+              <a:rPr sz="1500" b="1">
+                <a:solidFill>
+                  <a:srgbClr val="12273A"/>
+                </a:solidFill>
+                <a:latin typeface="Aptos"/>
+              </a:rPr>
+              <a:t>Kiểm tra đầu vào</a:t>
+            </a:r>
+          </a:p>
+        </p:txBody>
+      </p:sp>
+      <p:sp>
+        <p:nvSpPr>
+          <p:cNvPr id="13" name="TextBox 12"/>
+          <p:cNvSpPr txBox="1"/>
+          <p:nvPr/>
+        </p:nvSpPr>
+        <p:spPr>
+          <a:xfrm>
+            <a:off x="3657600" y="2578608"/>
+            <a:ext cx="7315200" cy="384048"/>
+          </a:xfrm>
+          <a:prstGeom prst="rect">
+            <a:avLst/>
+          </a:prstGeom>
+          <a:noFill/>
+        </p:spPr>
+        <p:txBody>
+          <a:bodyPr wrap="square" lIns="54864" tIns="54864" rIns="54864" bIns="54864" anchor="t">
+            <a:spAutoFit/>
+          </a:bodyPr>
+          <a:lstStyle/>
+          <a:p>
+            <a:r>
+              <a:rPr sz="1400" b="0">
+                <a:solidFill>
+                  <a:srgbClr val="2F3E46"/>
+                </a:solidFill>
+                <a:latin typeface="Aptos"/>
+              </a:rPr>
+              <a:t>Dùng if not exist để dừng nếu thiếu log.</a:t>
+            </a:r>
+          </a:p>
+        </p:txBody>
+      </p:sp>
+      <p:sp>
+        <p:nvSpPr>
+          <p:cNvPr id="14" name="Oval 13"/>
+          <p:cNvSpPr/>
+          <p:nvPr/>
+        </p:nvSpPr>
+        <p:spPr>
+          <a:xfrm>
+            <a:off x="822960" y="3328415"/>
+            <a:ext cx="438912" cy="438912"/>
+          </a:xfrm>
+          <a:prstGeom prst="ellipse">
+            <a:avLst/>
+          </a:prstGeom>
+          <a:solidFill>
+            <a:srgbClr val="27AE60"/>
+          </a:solidFill>
+          <a:ln>
+            <a:noFill/>
+          </a:ln>
+        </p:spPr>
+        <p:style>
+          <a:lnRef idx="1">
+            <a:schemeClr val="accent1"/>
+          </a:lnRef>
+          <a:fillRef idx="3">
+            <a:schemeClr val="accent1"/>
+          </a:fillRef>
+          <a:effectRef idx="2">
+            <a:schemeClr val="accent1"/>
+          </a:effectRef>
+          <a:fontRef idx="minor">
+            <a:schemeClr val="lt1"/>
+          </a:fontRef>
+        </p:style>
+        <p:txBody>
+          <a:bodyPr rtlCol="0" anchor="ctr"/>
+          <a:lstStyle/>
+          <a:p>
+            <a:pPr algn="ctr"/>
+            <a:endParaRPr/>
+          </a:p>
+        </p:txBody>
+      </p:sp>
+      <p:sp>
+        <p:nvSpPr>
+          <p:cNvPr id="15" name="TextBox 14"/>
+          <p:cNvSpPr txBox="1"/>
+          <p:nvPr/>
+        </p:nvSpPr>
+        <p:spPr>
+          <a:xfrm>
+            <a:off x="822960" y="3410711"/>
+            <a:ext cx="438912" cy="182880"/>
+          </a:xfrm>
+          <a:prstGeom prst="rect">
+            <a:avLst/>
+          </a:prstGeom>
+          <a:noFill/>
+        </p:spPr>
+        <p:txBody>
+          <a:bodyPr wrap="square" lIns="54864" tIns="54864" rIns="54864" bIns="54864" anchor="t">
+            <a:spAutoFit/>
+          </a:bodyPr>
+          <a:lstStyle/>
+          <a:p>
+            <a:pPr algn="ctr"/>
+            <a:r>
+              <a:rPr sz="1100" b="1">
+                <a:solidFill>
+                  <a:srgbClr val="FFFFFF"/>
+                </a:solidFill>
+                <a:latin typeface="Aptos"/>
+              </a:rPr>
+              <a:t>03</a:t>
+            </a:r>
+          </a:p>
+        </p:txBody>
+      </p:sp>
+      <p:sp>
+        <p:nvSpPr>
+          <p:cNvPr id="16" name="TextBox 15"/>
+          <p:cNvSpPr txBox="1"/>
+          <p:nvPr/>
+        </p:nvSpPr>
+        <p:spPr>
+          <a:xfrm>
+            <a:off x="1508760" y="3328415"/>
+            <a:ext cx="2194560" cy="292608"/>
+          </a:xfrm>
+          <a:prstGeom prst="rect">
+            <a:avLst/>
+          </a:prstGeom>
+          <a:noFill/>
+        </p:spPr>
+        <p:txBody>
+          <a:bodyPr wrap="square" lIns="54864" tIns="54864" rIns="54864" bIns="54864" anchor="t">
+            <a:spAutoFit/>
+          </a:bodyPr>
+          <a:lstStyle/>
+          <a:p>
+            <a:r>
+              <a:rPr sz="1500" b="1">
+                <a:solidFill>
+                  <a:srgbClr val="12273A"/>
+                </a:solidFill>
+                <a:latin typeface="Aptos"/>
+              </a:rPr>
+              <a:t>Phạm vi tác động</a:t>
+            </a:r>
+          </a:p>
+        </p:txBody>
+      </p:sp>
+      <p:sp>
+        <p:nvSpPr>
+          <p:cNvPr id="17" name="TextBox 16"/>
+          <p:cNvSpPr txBox="1"/>
+          <p:nvPr/>
+        </p:nvSpPr>
+        <p:spPr>
+          <a:xfrm>
+            <a:off x="3657600" y="3328415"/>
+            <a:ext cx="7315200" cy="384048"/>
+          </a:xfrm>
+          <a:prstGeom prst="rect">
+            <a:avLst/>
+          </a:prstGeom>
+          <a:noFill/>
+        </p:spPr>
+        <p:txBody>
+          <a:bodyPr wrap="square" lIns="54864" tIns="54864" rIns="54864" bIns="54864" anchor="t">
+            <a:spAutoFit/>
+          </a:bodyPr>
+          <a:lstStyle/>
+          <a:p>
+            <a:r>
+              <a:rPr sz="1400" b="0">
+                <a:solidFill>
+                  <a:srgbClr val="2F3E46"/>
+                </a:solidFill>
+                <a:latin typeface="Aptos"/>
+              </a:rPr>
+              <a:t>Chỉ ghi vào backup/; không xóa dữ liệu nguồn.</a:t>
+            </a:r>
+          </a:p>
+        </p:txBody>
+      </p:sp>
+      <p:sp>
+        <p:nvSpPr>
+          <p:cNvPr id="18" name="Oval 17"/>
+          <p:cNvSpPr/>
+          <p:nvPr/>
+        </p:nvSpPr>
+        <p:spPr>
+          <a:xfrm>
+            <a:off x="822960" y="4078224"/>
+            <a:ext cx="438912" cy="438912"/>
+          </a:xfrm>
+          <a:prstGeom prst="ellipse">
+            <a:avLst/>
+          </a:prstGeom>
+          <a:solidFill>
+            <a:srgbClr val="27AE60"/>
+          </a:solidFill>
+          <a:ln>
+            <a:noFill/>
+          </a:ln>
+        </p:spPr>
+        <p:style>
+          <a:lnRef idx="1">
+            <a:schemeClr val="accent1"/>
+          </a:lnRef>
+          <a:fillRef idx="3">
+            <a:schemeClr val="accent1"/>
+          </a:fillRef>
+          <a:effectRef idx="2">
+            <a:schemeClr val="accent1"/>
+          </a:effectRef>
+          <a:fontRef idx="minor">
+            <a:schemeClr val="lt1"/>
+          </a:fontRef>
+        </p:style>
+        <p:txBody>
+          <a:bodyPr rtlCol="0" anchor="ctr"/>
+          <a:lstStyle/>
+          <a:p>
+            <a:pPr algn="ctr"/>
+            <a:endParaRPr/>
+          </a:p>
+        </p:txBody>
+      </p:sp>
+      <p:sp>
+        <p:nvSpPr>
+          <p:cNvPr id="19" name="TextBox 18"/>
+          <p:cNvSpPr txBox="1"/>
+          <p:nvPr/>
+        </p:nvSpPr>
+        <p:spPr>
+          <a:xfrm>
+            <a:off x="822960" y="4160520"/>
+            <a:ext cx="438912" cy="182880"/>
+          </a:xfrm>
+          <a:prstGeom prst="rect">
+            <a:avLst/>
+          </a:prstGeom>
+          <a:noFill/>
+        </p:spPr>
+        <p:txBody>
+          <a:bodyPr wrap="square" lIns="54864" tIns="54864" rIns="54864" bIns="54864" anchor="t">
+            <a:spAutoFit/>
+          </a:bodyPr>
+          <a:lstStyle/>
+          <a:p>
+            <a:pPr algn="ctr"/>
+            <a:r>
+              <a:rPr sz="1100" b="1">
+                <a:solidFill>
+                  <a:srgbClr val="FFFFFF"/>
+                </a:solidFill>
+                <a:latin typeface="Aptos"/>
+              </a:rPr>
+              <a:t>04</a:t>
+            </a:r>
+          </a:p>
+        </p:txBody>
+      </p:sp>
+      <p:sp>
+        <p:nvSpPr>
+          <p:cNvPr id="20" name="TextBox 19"/>
+          <p:cNvSpPr txBox="1"/>
+          <p:nvPr/>
+        </p:nvSpPr>
+        <p:spPr>
+          <a:xfrm>
+            <a:off x="1508760" y="4078224"/>
+            <a:ext cx="2194560" cy="292608"/>
+          </a:xfrm>
+          <a:prstGeom prst="rect">
+            <a:avLst/>
+          </a:prstGeom>
+          <a:noFill/>
+        </p:spPr>
+        <p:txBody>
+          <a:bodyPr wrap="square" lIns="54864" tIns="54864" rIns="54864" bIns="54864" anchor="t">
+            <a:spAutoFit/>
+          </a:bodyPr>
+          <a:lstStyle/>
+          <a:p>
+            <a:r>
+              <a:rPr sz="1500" b="1">
+                <a:solidFill>
+                  <a:srgbClr val="12273A"/>
+                </a:solidFill>
+                <a:latin typeface="Aptos"/>
+              </a:rPr>
+              <a:t>Bảo vệ bí mật</a:t>
+            </a:r>
+          </a:p>
+        </p:txBody>
+      </p:sp>
+      <p:sp>
+        <p:nvSpPr>
+          <p:cNvPr id="21" name="TextBox 20"/>
+          <p:cNvSpPr txBox="1"/>
+          <p:nvPr/>
+        </p:nvSpPr>
+        <p:spPr>
+          <a:xfrm>
+            <a:off x="3657600" y="4078224"/>
+            <a:ext cx="7315200" cy="384048"/>
+          </a:xfrm>
+          <a:prstGeom prst="rect">
+            <a:avLst/>
+          </a:prstGeom>
+          <a:noFill/>
+        </p:spPr>
+        <p:txBody>
+          <a:bodyPr wrap="square" lIns="54864" tIns="54864" rIns="54864" bIns="54864" anchor="t">
+            <a:spAutoFit/>
+          </a:bodyPr>
+          <a:lstStyle/>
+          <a:p>
+            <a:r>
+              <a:rPr sz="1400" b="0">
+                <a:solidFill>
+                  <a:srgbClr val="2F3E46"/>
+                </a:solidFill>
+                <a:latin typeface="Aptos"/>
+              </a:rPr>
+              <a:t>Không commit .env hoặc thông tin xác thực.</a:t>
+            </a:r>
+          </a:p>
+        </p:txBody>
+      </p:sp>
+      <p:sp>
+        <p:nvSpPr>
+          <p:cNvPr id="22" name="Oval 21"/>
+          <p:cNvSpPr/>
+          <p:nvPr/>
+        </p:nvSpPr>
+        <p:spPr>
+          <a:xfrm>
+            <a:off x="822960" y="4828031"/>
+            <a:ext cx="438912" cy="438912"/>
+          </a:xfrm>
+          <a:prstGeom prst="ellipse">
+            <a:avLst/>
+          </a:prstGeom>
+          <a:solidFill>
+            <a:srgbClr val="27AE60"/>
+          </a:solidFill>
+          <a:ln>
+            <a:noFill/>
+          </a:ln>
+        </p:spPr>
+        <p:style>
+          <a:lnRef idx="1">
+            <a:schemeClr val="accent1"/>
+          </a:lnRef>
+          <a:fillRef idx="3">
+            <a:schemeClr val="accent1"/>
+          </a:fillRef>
+          <a:effectRef idx="2">
+            <a:schemeClr val="accent1"/>
+          </a:effectRef>
+          <a:fontRef idx="minor">
+            <a:schemeClr val="lt1"/>
+          </a:fontRef>
+        </p:style>
+        <p:txBody>
+          <a:bodyPr rtlCol="0" anchor="ctr"/>
+          <a:lstStyle/>
+          <a:p>
+            <a:pPr algn="ctr"/>
+            <a:endParaRPr/>
+          </a:p>
+        </p:txBody>
+      </p:sp>
+      <p:sp>
+        <p:nvSpPr>
+          <p:cNvPr id="23" name="TextBox 22"/>
+          <p:cNvSpPr txBox="1"/>
+          <p:nvPr/>
+        </p:nvSpPr>
+        <p:spPr>
+          <a:xfrm>
+            <a:off x="822960" y="4910327"/>
+            <a:ext cx="438912" cy="182880"/>
+          </a:xfrm>
+          <a:prstGeom prst="rect">
+            <a:avLst/>
+          </a:prstGeom>
+          <a:noFill/>
+        </p:spPr>
+        <p:txBody>
+          <a:bodyPr wrap="square" lIns="54864" tIns="54864" rIns="54864" bIns="54864" anchor="t">
+            <a:spAutoFit/>
+          </a:bodyPr>
+          <a:lstStyle/>
+          <a:p>
+            <a:pPr algn="ctr"/>
+            <a:r>
+              <a:rPr sz="1100" b="1">
+                <a:solidFill>
+                  <a:srgbClr val="FFFFFF"/>
+                </a:solidFill>
+                <a:latin typeface="Aptos"/>
+              </a:rPr>
+              <a:t>05</a:t>
+            </a:r>
+          </a:p>
+        </p:txBody>
+      </p:sp>
+      <p:sp>
+        <p:nvSpPr>
+          <p:cNvPr id="24" name="TextBox 23"/>
+          <p:cNvSpPr txBox="1"/>
+          <p:nvPr/>
+        </p:nvSpPr>
+        <p:spPr>
+          <a:xfrm>
+            <a:off x="1508760" y="4828031"/>
+            <a:ext cx="2194560" cy="292608"/>
+          </a:xfrm>
+          <a:prstGeom prst="rect">
+            <a:avLst/>
+          </a:prstGeom>
+          <a:noFill/>
+        </p:spPr>
+        <p:txBody>
+          <a:bodyPr wrap="square" lIns="54864" tIns="54864" rIns="54864" bIns="54864" anchor="t">
+            <a:spAutoFit/>
+          </a:bodyPr>
+          <a:lstStyle/>
+          <a:p>
+            <a:r>
+              <a:rPr sz="1500" b="1">
+                <a:solidFill>
+                  <a:srgbClr val="12273A"/>
+                </a:solidFill>
+                <a:latin typeface="Aptos"/>
+              </a:rPr>
+              <a:t>Kiểm thử</a:t>
+            </a:r>
+          </a:p>
+        </p:txBody>
+      </p:sp>
+      <p:sp>
+        <p:nvSpPr>
+          <p:cNvPr id="25" name="TextBox 24"/>
+          <p:cNvSpPr txBox="1"/>
+          <p:nvPr/>
+        </p:nvSpPr>
+        <p:spPr>
+          <a:xfrm>
+            <a:off x="3657600" y="4828031"/>
+            <a:ext cx="7315200" cy="384048"/>
+          </a:xfrm>
+          <a:prstGeom prst="rect">
+            <a:avLst/>
+          </a:prstGeom>
+          <a:noFill/>
+        </p:spPr>
+        <p:txBody>
+          <a:bodyPr wrap="square" lIns="54864" tIns="54864" rIns="54864" bIns="54864" anchor="t">
+            <a:spAutoFit/>
+          </a:bodyPr>
+          <a:lstStyle/>
+          <a:p>
+            <a:r>
+              <a:rPr sz="1400" b="0">
+                <a:solidFill>
+                  <a:srgbClr val="2F3E46"/>
+                </a:solidFill>
+                <a:latin typeface="Aptos"/>
+              </a:rPr>
+              <a:t>Chạy thử với log mẫu trước khi dùng log 500 MB.</a:t>
+            </a:r>
+          </a:p>
+        </p:txBody>
+      </p:sp>
+      <p:sp>
+        <p:nvSpPr>
+          <p:cNvPr id="26" name="TextBox 25"/>
+          <p:cNvSpPr txBox="1"/>
+          <p:nvPr/>
+        </p:nvSpPr>
+        <p:spPr>
+          <a:xfrm>
+            <a:off x="914400" y="5897880"/>
+            <a:ext cx="10241280" cy="411480"/>
+          </a:xfrm>
+          <a:prstGeom prst="rect">
+            <a:avLst/>
+          </a:prstGeom>
+          <a:noFill/>
+        </p:spPr>
+        <p:txBody>
+          <a:bodyPr wrap="square" lIns="54864" tIns="54864" rIns="54864" bIns="54864" anchor="t">
+            <a:spAutoFit/>
+          </a:bodyPr>
+          <a:lstStyle/>
+          <a:p>
+            <a:pPr algn="ctr"/>
+            <a:r>
+              <a:rPr sz="1500" b="1">
+                <a:solidFill>
+                  <a:srgbClr val="C0392B"/>
+                </a:solidFill>
+                <a:latin typeface="Aptos"/>
+              </a:rPr>
+              <a:t>Không chạy del /f /s /q nếu chưa xác minh chính xác đường dẫn và phạm vi xóa.</a:t>
+            </a:r>
+          </a:p>
+        </p:txBody>
+      </p:sp>
+      <p:sp>
+        <p:nvSpPr>
+          <p:cNvPr id="27" name="TextBox 26"/>
+          <p:cNvSpPr txBox="1"/>
+          <p:nvPr/>
+        </p:nvSpPr>
+        <p:spPr>
+          <a:xfrm>
+            <a:off x="594360" y="6510528"/>
+            <a:ext cx="8686800" cy="164592"/>
+          </a:xfrm>
+          <a:prstGeom prst="rect">
+            <a:avLst/>
+          </a:prstGeom>
+          <a:noFill/>
+        </p:spPr>
+        <p:txBody>
+          <a:bodyPr wrap="square" lIns="54864" tIns="54864" rIns="54864" bIns="54864" anchor="t">
+            <a:spAutoFit/>
+          </a:bodyPr>
+          <a:lstStyle/>
+          <a:p>
+            <a:r>
+              <a:rPr sz="800" b="0">
+                <a:solidFill>
+                  <a:srgbClr val="66757E"/>
+                </a:solidFill>
+                <a:latin typeface="Aptos"/>
+              </a:rPr>
+              <a:t>GREENTECH  |  MINI PROJECT HẠ TẦNG &amp; NHẬT KÝ KỸ THUẬT</a:t>
+            </a:r>
+          </a:p>
+        </p:txBody>
+      </p:sp>
+      <p:sp>
+        <p:nvSpPr>
+          <p:cNvPr id="28" name="TextBox 27"/>
+          <p:cNvSpPr txBox="1"/>
+          <p:nvPr/>
+        </p:nvSpPr>
+        <p:spPr>
+          <a:xfrm>
+            <a:off x="11155680" y="6473952"/>
+            <a:ext cx="411480" cy="228600"/>
+          </a:xfrm>
+          <a:prstGeom prst="rect">
+            <a:avLst/>
+          </a:prstGeom>
+          <a:noFill/>
+        </p:spPr>
+        <p:txBody>
+          <a:bodyPr wrap="square" lIns="54864" tIns="54864" rIns="54864" bIns="54864" anchor="t">
+            <a:spAutoFit/>
+          </a:bodyPr>
+          <a:lstStyle/>
+          <a:p>
+            <a:pPr algn="r"/>
+            <a:r>
+              <a:rPr sz="1000" b="1">
+                <a:solidFill>
+                  <a:srgbClr val="27AE60"/>
+                </a:solidFill>
+                <a:latin typeface="Aptos"/>
+              </a:rPr>
+              <a:t>07</a:t>
+            </a:r>
+          </a:p>
+        </p:txBody>
+      </p:sp>
+    </p:spTree>
+  </p:cSld>
+  <p:clrMapOvr>
+    <a:masterClrMapping/>
+  </p:clrMapOvr>
+  <mc:AlternateContent xmlns:mc="http://schemas.openxmlformats.org/markup-compatibility/2006" xmlns:p14="http://schemas.microsoft.com/office/powerpoint/2010/main">
+    <mc:Choice Requires="p14">
+      <p:transition spd="slow" p14:dur="1600">
+        <p14:prism isInverted="1"/>
+      </p:transition>
+    </mc:Choice>
+    <mc:Fallback xmlns="">
+      <p:transition spd="slow">
+        <p:fade/>
+      </p:transition>
+    </mc:Fallback>
+  </mc:AlternateContent>
+</p:sld>
+</file>
+
+<file path=ppt/slides/slide11.xml><?xml version="1.0" encoding="utf-8"?>
+<p:sld xmlns:a="http://schemas.openxmlformats.org/drawingml/2006/main" xmlns:r="http://schemas.openxmlformats.org/officeDocument/2006/relationships" xmlns:p="http://schemas.openxmlformats.org/presentationml/2006/main">
+  <p:cSld>
+    <p:bg>
+      <p:bgPr>
+        <a:solidFill>
+          <a:srgbClr val="F5F8FA"/>
+        </a:solidFill>
+        <a:effectLst/>
+      </p:bgPr>
+    </p:bg>
+    <p:spTree>
+      <p:nvGrpSpPr>
+        <p:cNvPr id="1" name=""/>
+        <p:cNvGrpSpPr/>
+        <p:nvPr/>
+      </p:nvGrpSpPr>
+      <p:grpSpPr>
+        <a:xfrm>
+          <a:off x="0" y="0"/>
+          <a:ext cx="0" cy="0"/>
+          <a:chOff x="0" y="0"/>
+          <a:chExt cx="0" cy="0"/>
+        </a:xfrm>
+      </p:grpSpPr>
+      <p:sp>
+        <p:nvSpPr>
+          <p:cNvPr id="2" name="TextBox 1"/>
+          <p:cNvSpPr txBox="1"/>
+          <p:nvPr/>
+        </p:nvSpPr>
+        <p:spPr>
+          <a:xfrm>
+            <a:off x="594360" y="347472"/>
+            <a:ext cx="10972800" cy="502920"/>
+          </a:xfrm>
+          <a:prstGeom prst="rect">
+            <a:avLst/>
+          </a:prstGeom>
+          <a:noFill/>
+        </p:spPr>
+        <p:txBody>
+          <a:bodyPr wrap="square" lIns="54864" tIns="54864" rIns="54864" bIns="54864" anchor="t">
+            <a:spAutoFit/>
+          </a:bodyPr>
+          <a:lstStyle/>
+          <a:p>
+            <a:r>
+              <a:rPr sz="2700" b="1">
+                <a:solidFill>
+                  <a:srgbClr val="12273A"/>
+                </a:solidFill>
+                <a:latin typeface="Aptos"/>
+              </a:rPr>
               <a:t>7. Module tài liệu: Markdown &amp; Word</a:t>
             </a:r>
           </a:p>
@@ -4929,13 +5961,13 @@
   <p:clrMapOvr>
     <a:masterClrMapping/>
   </p:clrMapOvr>
-  <mc:AlternateContent xmlns:mc="http://schemas.openxmlformats.org/markup-compatibility/2006">
-    <mc:Choice xmlns:p14="http://schemas.microsoft.com/office/powerpoint/2010/main" Requires="p14">
+  <mc:AlternateContent xmlns:mc="http://schemas.openxmlformats.org/markup-compatibility/2006" xmlns:p14="http://schemas.microsoft.com/office/powerpoint/2010/main">
+    <mc:Choice Requires="p14">
       <p:transition spd="slow" p14:dur="2000">
         <p14:ferris dir="l"/>
       </p:transition>
     </mc:Choice>
-    <mc:Fallback>
+    <mc:Fallback xmlns="">
       <p:transition spd="slow">
         <p:fade/>
       </p:transition>
@@ -4944,7 +5976,7 @@
 </p:sld>
 </file>
 
-<file path=ppt/slides/slide11.xml><?xml version="1.0" encoding="utf-8"?>
+<file path=ppt/slides/slide12.xml><?xml version="1.0" encoding="utf-8"?>
 <p:sld xmlns:a="http://schemas.openxmlformats.org/drawingml/2006/main" xmlns:r="http://schemas.openxmlformats.org/officeDocument/2006/relationships" xmlns:p="http://schemas.openxmlformats.org/presentationml/2006/main">
   <p:cSld>
     <p:spTree>
@@ -5192,612 +6224,13 @@
   <p:clrMapOvr>
     <a:masterClrMapping/>
   </p:clrMapOvr>
-  <mc:AlternateContent xmlns:mc="http://schemas.openxmlformats.org/markup-compatibility/2006">
-    <mc:Choice xmlns:p15="http://schemas.microsoft.com/office/powerpoint/2012/main" Requires="p15">
+  <mc:AlternateContent xmlns:mc="http://schemas.openxmlformats.org/markup-compatibility/2006" xmlns:p15="http://schemas.microsoft.com/office/powerpoint/2012/main">
+    <mc:Choice Requires="p15">
       <p:transition xmlns:p14="http://schemas.microsoft.com/office/powerpoint/2010/main" spd="slow" p14:dur="1250">
         <p15:prstTrans prst="pageCurlDouble"/>
       </p:transition>
     </mc:Choice>
-    <mc:Fallback>
-      <p:transition spd="slow">
-        <p:fade/>
-      </p:transition>
-    </mc:Fallback>
-  </mc:AlternateContent>
-</p:sld>
-</file>
-
-<file path=ppt/slides/slide12.xml><?xml version="1.0" encoding="utf-8"?>
-<p:sld xmlns:a="http://schemas.openxmlformats.org/drawingml/2006/main" xmlns:r="http://schemas.openxmlformats.org/officeDocument/2006/relationships" xmlns:p="http://schemas.openxmlformats.org/presentationml/2006/main">
-  <p:cSld>
-    <p:spTree>
-      <p:nvGrpSpPr>
-        <p:cNvPr id="1" name=""/>
-        <p:cNvGrpSpPr/>
-        <p:nvPr/>
-      </p:nvGrpSpPr>
-      <p:grpSpPr>
-        <a:xfrm>
-          <a:off x="0" y="0"/>
-          <a:ext cx="0" cy="0"/>
-          <a:chOff x="0" y="0"/>
-          <a:chExt cx="0" cy="0"/>
-        </a:xfrm>
-      </p:grpSpPr>
-      <p:sp>
-        <p:nvSpPr>
-          <p:cNvPr id="2" name="Rectangle 1">
-            <a:extLst>
-              <a:ext uri="{FF2B5EF4-FFF2-40B4-BE49-F238E27FC236}">
-                <a16:creationId xmlns:a16="http://schemas.microsoft.com/office/drawing/2014/main" id="{23FF395C-ED3F-612A-6D73-EAB4FA923649}"/>
-              </a:ext>
-            </a:extLst>
-          </p:cNvPr>
-          <p:cNvSpPr/>
-          <p:nvPr/>
-        </p:nvSpPr>
-        <p:spPr>
-          <a:xfrm>
-            <a:off x="4454525" y="368300"/>
-            <a:ext cx="3738880" cy="706755"/>
-          </a:xfrm>
-          <a:prstGeom prst="rect">
-            <a:avLst/>
-          </a:prstGeom>
-          <a:noFill/>
-          <a:ln>
-            <a:noFill/>
-          </a:ln>
-        </p:spPr>
-        <p:txBody>
-          <a:bodyPr wrap="none" rtlCol="0" anchor="t">
-            <a:spAutoFit/>
-          </a:bodyPr>
-          <a:lstStyle>
-            <a:defPPr>
-              <a:defRPr lang="en-US"/>
-            </a:defPPr>
-            <a:lvl1pPr marL="0" algn="l" defTabSz="457200" rtl="0" eaLnBrk="1" latinLnBrk="0" hangingPunct="1">
-              <a:defRPr sz="1800" kern="1200">
-                <a:solidFill>
-                  <a:schemeClr val="tx1"/>
-                </a:solidFill>
-                <a:latin typeface="+mn-lt"/>
-                <a:ea typeface="+mn-ea"/>
-                <a:cs typeface="+mn-cs"/>
-              </a:defRPr>
-            </a:lvl1pPr>
-            <a:lvl2pPr marL="457200" algn="l" defTabSz="457200" rtl="0" eaLnBrk="1" latinLnBrk="0" hangingPunct="1">
-              <a:defRPr sz="1800" kern="1200">
-                <a:solidFill>
-                  <a:schemeClr val="tx1"/>
-                </a:solidFill>
-                <a:latin typeface="+mn-lt"/>
-                <a:ea typeface="+mn-ea"/>
-                <a:cs typeface="+mn-cs"/>
-              </a:defRPr>
-            </a:lvl2pPr>
-            <a:lvl3pPr marL="914400" algn="l" defTabSz="457200" rtl="0" eaLnBrk="1" latinLnBrk="0" hangingPunct="1">
-              <a:defRPr sz="1800" kern="1200">
-                <a:solidFill>
-                  <a:schemeClr val="tx1"/>
-                </a:solidFill>
-                <a:latin typeface="+mn-lt"/>
-                <a:ea typeface="+mn-ea"/>
-                <a:cs typeface="+mn-cs"/>
-              </a:defRPr>
-            </a:lvl3pPr>
-            <a:lvl4pPr marL="1371600" algn="l" defTabSz="457200" rtl="0" eaLnBrk="1" latinLnBrk="0" hangingPunct="1">
-              <a:defRPr sz="1800" kern="1200">
-                <a:solidFill>
-                  <a:schemeClr val="tx1"/>
-                </a:solidFill>
-                <a:latin typeface="+mn-lt"/>
-                <a:ea typeface="+mn-ea"/>
-                <a:cs typeface="+mn-cs"/>
-              </a:defRPr>
-            </a:lvl4pPr>
-            <a:lvl5pPr marL="1828800" algn="l" defTabSz="457200" rtl="0" eaLnBrk="1" latinLnBrk="0" hangingPunct="1">
-              <a:defRPr sz="1800" kern="1200">
-                <a:solidFill>
-                  <a:schemeClr val="tx1"/>
-                </a:solidFill>
-                <a:latin typeface="+mn-lt"/>
-                <a:ea typeface="+mn-ea"/>
-                <a:cs typeface="+mn-cs"/>
-              </a:defRPr>
-            </a:lvl5pPr>
-            <a:lvl6pPr marL="2286000" algn="l" defTabSz="457200" rtl="0" eaLnBrk="1" latinLnBrk="0" hangingPunct="1">
-              <a:defRPr sz="1800" kern="1200">
-                <a:solidFill>
-                  <a:schemeClr val="tx1"/>
-                </a:solidFill>
-                <a:latin typeface="+mn-lt"/>
-                <a:ea typeface="+mn-ea"/>
-                <a:cs typeface="+mn-cs"/>
-              </a:defRPr>
-            </a:lvl6pPr>
-            <a:lvl7pPr marL="2743200" algn="l" defTabSz="457200" rtl="0" eaLnBrk="1" latinLnBrk="0" hangingPunct="1">
-              <a:defRPr sz="1800" kern="1200">
-                <a:solidFill>
-                  <a:schemeClr val="tx1"/>
-                </a:solidFill>
-                <a:latin typeface="+mn-lt"/>
-                <a:ea typeface="+mn-ea"/>
-                <a:cs typeface="+mn-cs"/>
-              </a:defRPr>
-            </a:lvl7pPr>
-            <a:lvl8pPr marL="3200400" algn="l" defTabSz="457200" rtl="0" eaLnBrk="1" latinLnBrk="0" hangingPunct="1">
-              <a:defRPr sz="1800" kern="1200">
-                <a:solidFill>
-                  <a:schemeClr val="tx1"/>
-                </a:solidFill>
-                <a:latin typeface="+mn-lt"/>
-                <a:ea typeface="+mn-ea"/>
-                <a:cs typeface="+mn-cs"/>
-              </a:defRPr>
-            </a:lvl8pPr>
-            <a:lvl9pPr marL="3657600" algn="l" defTabSz="457200" rtl="0" eaLnBrk="1" latinLnBrk="0" hangingPunct="1">
-              <a:defRPr sz="1800" kern="1200">
-                <a:solidFill>
-                  <a:schemeClr val="tx1"/>
-                </a:solidFill>
-                <a:latin typeface="+mn-lt"/>
-                <a:ea typeface="+mn-ea"/>
-                <a:cs typeface="+mn-cs"/>
-              </a:defRPr>
-            </a:lvl9pPr>
-          </a:lstStyle>
-          <a:p>
-            <a:pPr algn="ctr"/>
-            <a:r>
-              <a:rPr lang="vi-VN" altLang="en-US" sz="4000" b="1">
-                <a:ln/>
-                <a:solidFill>
-                  <a:schemeClr val="tx1"/>
-                </a:solidFill>
-                <a:effectLst>
-                  <a:outerShdw blurRad="38100" dist="19050" dir="2700000" algn="tl" rotWithShape="0">
-                    <a:schemeClr val="dk1">
-                      <a:alpha val="40000"/>
-                    </a:schemeClr>
-                  </a:outerShdw>
-                </a:effectLst>
-              </a:rPr>
-              <a:t>Nội dung word</a:t>
-            </a:r>
-          </a:p>
-        </p:txBody>
-      </p:sp>
-      <p:sp>
-        <p:nvSpPr>
-          <p:cNvPr id="3" name="Text Box 6">
-            <a:extLst>
-              <a:ext uri="{FF2B5EF4-FFF2-40B4-BE49-F238E27FC236}">
-                <a16:creationId xmlns:a16="http://schemas.microsoft.com/office/drawing/2014/main" id="{782A015A-3FED-C71B-D685-31FA74CAABE4}"/>
-              </a:ext>
-            </a:extLst>
-          </p:cNvPr>
-          <p:cNvSpPr txBox="1"/>
-          <p:nvPr/>
-        </p:nvSpPr>
-        <p:spPr>
-          <a:xfrm>
-            <a:off x="5332730" y="2971165"/>
-            <a:ext cx="6313170" cy="1476375"/>
-          </a:xfrm>
-          <a:prstGeom prst="rect">
-            <a:avLst/>
-          </a:prstGeom>
-          <a:noFill/>
-        </p:spPr>
-        <p:txBody>
-          <a:bodyPr wrap="square" rtlCol="0">
-            <a:spAutoFit/>
-          </a:bodyPr>
-          <a:lstStyle>
-            <a:defPPr>
-              <a:defRPr lang="en-US"/>
-            </a:defPPr>
-            <a:lvl1pPr marL="0" algn="l" defTabSz="457200" rtl="0" eaLnBrk="1" latinLnBrk="0" hangingPunct="1">
-              <a:defRPr sz="1800" kern="1200">
-                <a:solidFill>
-                  <a:schemeClr val="tx1"/>
-                </a:solidFill>
-                <a:latin typeface="+mn-lt"/>
-                <a:ea typeface="+mn-ea"/>
-                <a:cs typeface="+mn-cs"/>
-              </a:defRPr>
-            </a:lvl1pPr>
-            <a:lvl2pPr marL="457200" algn="l" defTabSz="457200" rtl="0" eaLnBrk="1" latinLnBrk="0" hangingPunct="1">
-              <a:defRPr sz="1800" kern="1200">
-                <a:solidFill>
-                  <a:schemeClr val="tx1"/>
-                </a:solidFill>
-                <a:latin typeface="+mn-lt"/>
-                <a:ea typeface="+mn-ea"/>
-                <a:cs typeface="+mn-cs"/>
-              </a:defRPr>
-            </a:lvl2pPr>
-            <a:lvl3pPr marL="914400" algn="l" defTabSz="457200" rtl="0" eaLnBrk="1" latinLnBrk="0" hangingPunct="1">
-              <a:defRPr sz="1800" kern="1200">
-                <a:solidFill>
-                  <a:schemeClr val="tx1"/>
-                </a:solidFill>
-                <a:latin typeface="+mn-lt"/>
-                <a:ea typeface="+mn-ea"/>
-                <a:cs typeface="+mn-cs"/>
-              </a:defRPr>
-            </a:lvl3pPr>
-            <a:lvl4pPr marL="1371600" algn="l" defTabSz="457200" rtl="0" eaLnBrk="1" latinLnBrk="0" hangingPunct="1">
-              <a:defRPr sz="1800" kern="1200">
-                <a:solidFill>
-                  <a:schemeClr val="tx1"/>
-                </a:solidFill>
-                <a:latin typeface="+mn-lt"/>
-                <a:ea typeface="+mn-ea"/>
-                <a:cs typeface="+mn-cs"/>
-              </a:defRPr>
-            </a:lvl4pPr>
-            <a:lvl5pPr marL="1828800" algn="l" defTabSz="457200" rtl="0" eaLnBrk="1" latinLnBrk="0" hangingPunct="1">
-              <a:defRPr sz="1800" kern="1200">
-                <a:solidFill>
-                  <a:schemeClr val="tx1"/>
-                </a:solidFill>
-                <a:latin typeface="+mn-lt"/>
-                <a:ea typeface="+mn-ea"/>
-                <a:cs typeface="+mn-cs"/>
-              </a:defRPr>
-            </a:lvl5pPr>
-            <a:lvl6pPr marL="2286000" algn="l" defTabSz="457200" rtl="0" eaLnBrk="1" latinLnBrk="0" hangingPunct="1">
-              <a:defRPr sz="1800" kern="1200">
-                <a:solidFill>
-                  <a:schemeClr val="tx1"/>
-                </a:solidFill>
-                <a:latin typeface="+mn-lt"/>
-                <a:ea typeface="+mn-ea"/>
-                <a:cs typeface="+mn-cs"/>
-              </a:defRPr>
-            </a:lvl6pPr>
-            <a:lvl7pPr marL="2743200" algn="l" defTabSz="457200" rtl="0" eaLnBrk="1" latinLnBrk="0" hangingPunct="1">
-              <a:defRPr sz="1800" kern="1200">
-                <a:solidFill>
-                  <a:schemeClr val="tx1"/>
-                </a:solidFill>
-                <a:latin typeface="+mn-lt"/>
-                <a:ea typeface="+mn-ea"/>
-                <a:cs typeface="+mn-cs"/>
-              </a:defRPr>
-            </a:lvl7pPr>
-            <a:lvl8pPr marL="3200400" algn="l" defTabSz="457200" rtl="0" eaLnBrk="1" latinLnBrk="0" hangingPunct="1">
-              <a:defRPr sz="1800" kern="1200">
-                <a:solidFill>
-                  <a:schemeClr val="tx1"/>
-                </a:solidFill>
-                <a:latin typeface="+mn-lt"/>
-                <a:ea typeface="+mn-ea"/>
-                <a:cs typeface="+mn-cs"/>
-              </a:defRPr>
-            </a:lvl8pPr>
-            <a:lvl9pPr marL="3657600" algn="l" defTabSz="457200" rtl="0" eaLnBrk="1" latinLnBrk="0" hangingPunct="1">
-              <a:defRPr sz="1800" kern="1200">
-                <a:solidFill>
-                  <a:schemeClr val="tx1"/>
-                </a:solidFill>
-                <a:latin typeface="+mn-lt"/>
-                <a:ea typeface="+mn-ea"/>
-                <a:cs typeface="+mn-cs"/>
-              </a:defRPr>
-            </a:lvl9pPr>
-          </a:lstStyle>
-          <a:p>
-            <a:pPr algn="l"/>
-            <a:r>
-              <a:rPr lang="en-US" altLang="en-US" b="1">
-                <a:effectLst>
-                  <a:outerShdw blurRad="38100" dist="19050" dir="2700000" algn="tl" rotWithShape="0">
-                    <a:schemeClr val="dk1">
-                      <a:alpha val="40000"/>
-                    </a:schemeClr>
-                  </a:outerShdw>
-                </a:effectLst>
-                <a:sym typeface="+mn-ea"/>
-              </a:rPr>
-              <a:t>Cách gán Style: </a:t>
-            </a:r>
-          </a:p>
-          <a:p>
-            <a:pPr algn="l"/>
-            <a:r>
-              <a:rPr lang="en-US" altLang="en-US" b="1">
-                <a:effectLst>
-                  <a:outerShdw blurRad="38100" dist="19050" dir="2700000" algn="tl" rotWithShape="0">
-                    <a:schemeClr val="dk1">
-                      <a:alpha val="40000"/>
-                    </a:schemeClr>
-                  </a:outerShdw>
-                </a:effectLst>
-                <a:sym typeface="+mn-ea"/>
-              </a:rPr>
-              <a:t>Bôi đen tiêu đề </a:t>
-            </a:r>
-          </a:p>
-          <a:p>
-            <a:pPr algn="l"/>
-            <a:r>
-              <a:rPr lang="en-US" altLang="en-US" b="1">
-                <a:effectLst>
-                  <a:outerShdw blurRad="38100" dist="19050" dir="2700000" algn="tl" rotWithShape="0">
-                    <a:schemeClr val="dk1">
-                      <a:alpha val="40000"/>
-                    </a:schemeClr>
-                  </a:outerShdw>
-                </a:effectLst>
-                <a:sym typeface="+mn-ea"/>
-              </a:rPr>
-              <a:t>→ vào Home </a:t>
-            </a:r>
-          </a:p>
-          <a:p>
-            <a:pPr algn="l"/>
-            <a:r>
-              <a:rPr lang="en-US" altLang="en-US" b="1">
-                <a:effectLst>
-                  <a:outerShdw blurRad="38100" dist="19050" dir="2700000" algn="tl" rotWithShape="0">
-                    <a:schemeClr val="dk1">
-                      <a:alpha val="40000"/>
-                    </a:schemeClr>
-                  </a:outerShdw>
-                </a:effectLst>
-                <a:sym typeface="+mn-ea"/>
-              </a:rPr>
-              <a:t>→ Styles</a:t>
-            </a:r>
-          </a:p>
-          <a:p>
-            <a:pPr algn="l"/>
-            <a:r>
-              <a:rPr lang="en-US" altLang="en-US" b="1">
-                <a:effectLst>
-                  <a:outerShdw blurRad="38100" dist="19050" dir="2700000" algn="tl" rotWithShape="0">
-                    <a:schemeClr val="dk1">
-                      <a:alpha val="40000"/>
-                    </a:schemeClr>
-                  </a:outerShdw>
-                </a:effectLst>
-                <a:sym typeface="+mn-ea"/>
-              </a:rPr>
-              <a:t>→ chọn Heading 1, Heading 2 hoặc Heading 3 phù hợp.</a:t>
-            </a:r>
-            <a:endParaRPr lang="en-US" altLang="en-US" b="1">
-              <a:effectLst>
-                <a:outerShdw blurRad="38100" dist="19050" dir="2700000" algn="tl" rotWithShape="0">
-                  <a:schemeClr val="dk1">
-                    <a:alpha val="40000"/>
-                  </a:schemeClr>
-                </a:outerShdw>
-              </a:effectLst>
-            </a:endParaRPr>
-          </a:p>
-        </p:txBody>
-      </p:sp>
-      <p:sp>
-        <p:nvSpPr>
-          <p:cNvPr id="4" name="Text Box 7">
-            <a:extLst>
-              <a:ext uri="{FF2B5EF4-FFF2-40B4-BE49-F238E27FC236}">
-                <a16:creationId xmlns:a16="http://schemas.microsoft.com/office/drawing/2014/main" id="{9A53177F-1CDA-084F-834A-B2C15D456863}"/>
-              </a:ext>
-            </a:extLst>
-          </p:cNvPr>
-          <p:cNvSpPr txBox="1"/>
-          <p:nvPr/>
-        </p:nvSpPr>
-        <p:spPr>
-          <a:xfrm>
-            <a:off x="3385820" y="1075055"/>
-            <a:ext cx="6015355" cy="486410"/>
-          </a:xfrm>
-          <a:prstGeom prst="rect">
-            <a:avLst/>
-          </a:prstGeom>
-        </p:spPr>
-        <p:txBody>
-          <a:bodyPr wrap="square">
-            <a:spAutoFit/>
-          </a:bodyPr>
-          <a:lstStyle>
-            <a:defPPr>
-              <a:defRPr lang="en-US"/>
-            </a:defPPr>
-            <a:lvl1pPr marL="0" algn="l" defTabSz="457200" rtl="0" eaLnBrk="1" latinLnBrk="0" hangingPunct="1">
-              <a:defRPr sz="1800" kern="1200">
-                <a:solidFill>
-                  <a:schemeClr val="tx1"/>
-                </a:solidFill>
-                <a:latin typeface="+mn-lt"/>
-                <a:ea typeface="+mn-ea"/>
-                <a:cs typeface="+mn-cs"/>
-              </a:defRPr>
-            </a:lvl1pPr>
-            <a:lvl2pPr marL="457200" algn="l" defTabSz="457200" rtl="0" eaLnBrk="1" latinLnBrk="0" hangingPunct="1">
-              <a:defRPr sz="1800" kern="1200">
-                <a:solidFill>
-                  <a:schemeClr val="tx1"/>
-                </a:solidFill>
-                <a:latin typeface="+mn-lt"/>
-                <a:ea typeface="+mn-ea"/>
-                <a:cs typeface="+mn-cs"/>
-              </a:defRPr>
-            </a:lvl2pPr>
-            <a:lvl3pPr marL="914400" algn="l" defTabSz="457200" rtl="0" eaLnBrk="1" latinLnBrk="0" hangingPunct="1">
-              <a:defRPr sz="1800" kern="1200">
-                <a:solidFill>
-                  <a:schemeClr val="tx1"/>
-                </a:solidFill>
-                <a:latin typeface="+mn-lt"/>
-                <a:ea typeface="+mn-ea"/>
-                <a:cs typeface="+mn-cs"/>
-              </a:defRPr>
-            </a:lvl3pPr>
-            <a:lvl4pPr marL="1371600" algn="l" defTabSz="457200" rtl="0" eaLnBrk="1" latinLnBrk="0" hangingPunct="1">
-              <a:defRPr sz="1800" kern="1200">
-                <a:solidFill>
-                  <a:schemeClr val="tx1"/>
-                </a:solidFill>
-                <a:latin typeface="+mn-lt"/>
-                <a:ea typeface="+mn-ea"/>
-                <a:cs typeface="+mn-cs"/>
-              </a:defRPr>
-            </a:lvl4pPr>
-            <a:lvl5pPr marL="1828800" algn="l" defTabSz="457200" rtl="0" eaLnBrk="1" latinLnBrk="0" hangingPunct="1">
-              <a:defRPr sz="1800" kern="1200">
-                <a:solidFill>
-                  <a:schemeClr val="tx1"/>
-                </a:solidFill>
-                <a:latin typeface="+mn-lt"/>
-                <a:ea typeface="+mn-ea"/>
-                <a:cs typeface="+mn-cs"/>
-              </a:defRPr>
-            </a:lvl5pPr>
-            <a:lvl6pPr marL="2286000" algn="l" defTabSz="457200" rtl="0" eaLnBrk="1" latinLnBrk="0" hangingPunct="1">
-              <a:defRPr sz="1800" kern="1200">
-                <a:solidFill>
-                  <a:schemeClr val="tx1"/>
-                </a:solidFill>
-                <a:latin typeface="+mn-lt"/>
-                <a:ea typeface="+mn-ea"/>
-                <a:cs typeface="+mn-cs"/>
-              </a:defRPr>
-            </a:lvl6pPr>
-            <a:lvl7pPr marL="2743200" algn="l" defTabSz="457200" rtl="0" eaLnBrk="1" latinLnBrk="0" hangingPunct="1">
-              <a:defRPr sz="1800" kern="1200">
-                <a:solidFill>
-                  <a:schemeClr val="tx1"/>
-                </a:solidFill>
-                <a:latin typeface="+mn-lt"/>
-                <a:ea typeface="+mn-ea"/>
-                <a:cs typeface="+mn-cs"/>
-              </a:defRPr>
-            </a:lvl7pPr>
-            <a:lvl8pPr marL="3200400" algn="l" defTabSz="457200" rtl="0" eaLnBrk="1" latinLnBrk="0" hangingPunct="1">
-              <a:defRPr sz="1800" kern="1200">
-                <a:solidFill>
-                  <a:schemeClr val="tx1"/>
-                </a:solidFill>
-                <a:latin typeface="+mn-lt"/>
-                <a:ea typeface="+mn-ea"/>
-                <a:cs typeface="+mn-cs"/>
-              </a:defRPr>
-            </a:lvl8pPr>
-            <a:lvl9pPr marL="3657600" algn="l" defTabSz="457200" rtl="0" eaLnBrk="1" latinLnBrk="0" hangingPunct="1">
-              <a:defRPr sz="1800" kern="1200">
-                <a:solidFill>
-                  <a:schemeClr val="tx1"/>
-                </a:solidFill>
-                <a:latin typeface="+mn-lt"/>
-                <a:ea typeface="+mn-ea"/>
-                <a:cs typeface="+mn-cs"/>
-              </a:defRPr>
-            </a:lvl9pPr>
-          </a:lstStyle>
-          <a:p>
-            <a:pPr algn="ctr" defTabSz="266700">
-              <a:lnSpc>
-                <a:spcPct val="107000"/>
-              </a:lnSpc>
-              <a:spcAft>
-                <a:spcPts val="800"/>
-              </a:spcAft>
-            </a:pPr>
-            <a:r>
-              <a:rPr sz="2400" b="1">
-                <a:latin typeface="Times New Roman" panose="02020603050405020304"/>
-                <a:ea typeface="Calibri" panose="020F0502020204030204"/>
-              </a:rPr>
-              <a:t>1. Tạo các tiêu đề bằng Heading Styles</a:t>
-            </a:r>
-          </a:p>
-        </p:txBody>
-      </p:sp>
-      <p:pic>
-        <p:nvPicPr>
-          <p:cNvPr id="5" name="table">
-            <a:extLst>
-              <a:ext uri="{FF2B5EF4-FFF2-40B4-BE49-F238E27FC236}">
-                <a16:creationId xmlns:a16="http://schemas.microsoft.com/office/drawing/2014/main" id="{F4EEE358-1594-65B8-2FEA-3FC19B4FF487}"/>
-              </a:ext>
-            </a:extLst>
-          </p:cNvPr>
-          <p:cNvPicPr>
-            <a:picLocks noChangeAspect="1"/>
-          </p:cNvPicPr>
-          <p:nvPr/>
-        </p:nvPicPr>
-        <p:blipFill>
-          <a:blip r:embed="rId2"/>
-          <a:stretch>
-            <a:fillRect/>
-          </a:stretch>
-        </p:blipFill>
-        <p:spPr>
-          <a:xfrm>
-            <a:off x="546100" y="1413510"/>
-            <a:ext cx="4090035" cy="3698240"/>
-          </a:xfrm>
-          <a:prstGeom prst="rect">
-            <a:avLst/>
-          </a:prstGeom>
-        </p:spPr>
-      </p:pic>
-      <p:pic>
-        <p:nvPicPr>
-          <p:cNvPr id="6" name="Picture 5" descr="Ảnh chụp màn hình 2026-10-27 005052">
-            <a:extLst>
-              <a:ext uri="{FF2B5EF4-FFF2-40B4-BE49-F238E27FC236}">
-                <a16:creationId xmlns:a16="http://schemas.microsoft.com/office/drawing/2014/main" id="{4E343DAF-53F4-51B4-B499-DDA2B3BC4920}"/>
-              </a:ext>
-            </a:extLst>
-          </p:cNvPr>
-          <p:cNvPicPr>
-            <a:picLocks noChangeAspect="1"/>
-          </p:cNvPicPr>
-          <p:nvPr/>
-        </p:nvPicPr>
-        <p:blipFill>
-          <a:blip r:embed="rId3"/>
-          <a:srcRect t="5215" r="876"/>
-          <a:stretch>
-            <a:fillRect/>
-          </a:stretch>
-        </p:blipFill>
-        <p:spPr>
-          <a:xfrm>
-            <a:off x="546100" y="1722755"/>
-            <a:ext cx="4309110" cy="4766945"/>
-          </a:xfrm>
-          <a:prstGeom prst="rect">
-            <a:avLst/>
-          </a:prstGeom>
-        </p:spPr>
-      </p:pic>
-    </p:spTree>
-    <p:extLst>
-      <p:ext uri="{BB962C8B-B14F-4D97-AF65-F5344CB8AC3E}">
-        <p14:creationId xmlns:p14="http://schemas.microsoft.com/office/powerpoint/2010/main" val="4245227612"/>
-      </p:ext>
-    </p:extLst>
-  </p:cSld>
-  <p:clrMapOvr>
-    <a:masterClrMapping/>
-  </p:clrMapOvr>
-  <mc:AlternateContent xmlns:mc="http://schemas.openxmlformats.org/markup-compatibility/2006">
-    <mc:Choice xmlns:p15="http://schemas.microsoft.com/office/powerpoint/2012/main" Requires="p15">
-      <p:transition xmlns:p14="http://schemas.microsoft.com/office/powerpoint/2010/main" spd="slow" p14:dur="2000">
-        <p15:prstTrans prst="prestige"/>
-      </p:transition>
-    </mc:Choice>
-    <mc:Fallback>
+    <mc:Fallback xmlns="">
       <p:transition spd="slow">
         <p:fade/>
       </p:transition>
@@ -5825,10 +6258,155 @@
       </p:grpSpPr>
       <p:sp>
         <p:nvSpPr>
-          <p:cNvPr id="2" name="Text Box 1">
+          <p:cNvPr id="2" name="Rectangle 1">
             <a:extLst>
               <a:ext uri="{FF2B5EF4-FFF2-40B4-BE49-F238E27FC236}">
-                <a16:creationId xmlns:a16="http://schemas.microsoft.com/office/drawing/2014/main" id="{A3768C80-3722-8045-F303-061E1BF2F517}"/>
+                <a16:creationId xmlns:a16="http://schemas.microsoft.com/office/drawing/2014/main" id="{23FF395C-ED3F-612A-6D73-EAB4FA923649}"/>
+              </a:ext>
+            </a:extLst>
+          </p:cNvPr>
+          <p:cNvSpPr/>
+          <p:nvPr/>
+        </p:nvSpPr>
+        <p:spPr>
+          <a:xfrm>
+            <a:off x="4454525" y="368300"/>
+            <a:ext cx="3738880" cy="706755"/>
+          </a:xfrm>
+          <a:prstGeom prst="rect">
+            <a:avLst/>
+          </a:prstGeom>
+          <a:noFill/>
+          <a:ln>
+            <a:noFill/>
+          </a:ln>
+        </p:spPr>
+        <p:txBody>
+          <a:bodyPr wrap="none" rtlCol="0" anchor="t">
+            <a:spAutoFit/>
+          </a:bodyPr>
+          <a:lstStyle>
+            <a:defPPr>
+              <a:defRPr lang="en-US"/>
+            </a:defPPr>
+            <a:lvl1pPr marL="0" algn="l" defTabSz="457200" rtl="0" eaLnBrk="1" latinLnBrk="0" hangingPunct="1">
+              <a:defRPr sz="1800" kern="1200">
+                <a:solidFill>
+                  <a:schemeClr val="tx1"/>
+                </a:solidFill>
+                <a:latin typeface="+mn-lt"/>
+                <a:ea typeface="+mn-ea"/>
+                <a:cs typeface="+mn-cs"/>
+              </a:defRPr>
+            </a:lvl1pPr>
+            <a:lvl2pPr marL="457200" algn="l" defTabSz="457200" rtl="0" eaLnBrk="1" latinLnBrk="0" hangingPunct="1">
+              <a:defRPr sz="1800" kern="1200">
+                <a:solidFill>
+                  <a:schemeClr val="tx1"/>
+                </a:solidFill>
+                <a:latin typeface="+mn-lt"/>
+                <a:ea typeface="+mn-ea"/>
+                <a:cs typeface="+mn-cs"/>
+              </a:defRPr>
+            </a:lvl2pPr>
+            <a:lvl3pPr marL="914400" algn="l" defTabSz="457200" rtl="0" eaLnBrk="1" latinLnBrk="0" hangingPunct="1">
+              <a:defRPr sz="1800" kern="1200">
+                <a:solidFill>
+                  <a:schemeClr val="tx1"/>
+                </a:solidFill>
+                <a:latin typeface="+mn-lt"/>
+                <a:ea typeface="+mn-ea"/>
+                <a:cs typeface="+mn-cs"/>
+              </a:defRPr>
+            </a:lvl3pPr>
+            <a:lvl4pPr marL="1371600" algn="l" defTabSz="457200" rtl="0" eaLnBrk="1" latinLnBrk="0" hangingPunct="1">
+              <a:defRPr sz="1800" kern="1200">
+                <a:solidFill>
+                  <a:schemeClr val="tx1"/>
+                </a:solidFill>
+                <a:latin typeface="+mn-lt"/>
+                <a:ea typeface="+mn-ea"/>
+                <a:cs typeface="+mn-cs"/>
+              </a:defRPr>
+            </a:lvl4pPr>
+            <a:lvl5pPr marL="1828800" algn="l" defTabSz="457200" rtl="0" eaLnBrk="1" latinLnBrk="0" hangingPunct="1">
+              <a:defRPr sz="1800" kern="1200">
+                <a:solidFill>
+                  <a:schemeClr val="tx1"/>
+                </a:solidFill>
+                <a:latin typeface="+mn-lt"/>
+                <a:ea typeface="+mn-ea"/>
+                <a:cs typeface="+mn-cs"/>
+              </a:defRPr>
+            </a:lvl5pPr>
+            <a:lvl6pPr marL="2286000" algn="l" defTabSz="457200" rtl="0" eaLnBrk="1" latinLnBrk="0" hangingPunct="1">
+              <a:defRPr sz="1800" kern="1200">
+                <a:solidFill>
+                  <a:schemeClr val="tx1"/>
+                </a:solidFill>
+                <a:latin typeface="+mn-lt"/>
+                <a:ea typeface="+mn-ea"/>
+                <a:cs typeface="+mn-cs"/>
+              </a:defRPr>
+            </a:lvl6pPr>
+            <a:lvl7pPr marL="2743200" algn="l" defTabSz="457200" rtl="0" eaLnBrk="1" latinLnBrk="0" hangingPunct="1">
+              <a:defRPr sz="1800" kern="1200">
+                <a:solidFill>
+                  <a:schemeClr val="tx1"/>
+                </a:solidFill>
+                <a:latin typeface="+mn-lt"/>
+                <a:ea typeface="+mn-ea"/>
+                <a:cs typeface="+mn-cs"/>
+              </a:defRPr>
+            </a:lvl7pPr>
+            <a:lvl8pPr marL="3200400" algn="l" defTabSz="457200" rtl="0" eaLnBrk="1" latinLnBrk="0" hangingPunct="1">
+              <a:defRPr sz="1800" kern="1200">
+                <a:solidFill>
+                  <a:schemeClr val="tx1"/>
+                </a:solidFill>
+                <a:latin typeface="+mn-lt"/>
+                <a:ea typeface="+mn-ea"/>
+                <a:cs typeface="+mn-cs"/>
+              </a:defRPr>
+            </a:lvl8pPr>
+            <a:lvl9pPr marL="3657600" algn="l" defTabSz="457200" rtl="0" eaLnBrk="1" latinLnBrk="0" hangingPunct="1">
+              <a:defRPr sz="1800" kern="1200">
+                <a:solidFill>
+                  <a:schemeClr val="tx1"/>
+                </a:solidFill>
+                <a:latin typeface="+mn-lt"/>
+                <a:ea typeface="+mn-ea"/>
+                <a:cs typeface="+mn-cs"/>
+              </a:defRPr>
+            </a:lvl9pPr>
+          </a:lstStyle>
+          <a:p>
+            <a:pPr algn="ctr"/>
+            <a:r>
+              <a:rPr lang="vi-VN" altLang="en-US" sz="4000" b="1">
+                <a:ln/>
+                <a:solidFill>
+                  <a:schemeClr val="tx1"/>
+                </a:solidFill>
+                <a:effectLst>
+                  <a:outerShdw blurRad="38100" dist="19050" dir="2700000" algn="tl" rotWithShape="0">
+                    <a:schemeClr val="dk1">
+                      <a:alpha val="40000"/>
+                    </a:schemeClr>
+                  </a:outerShdw>
+                </a:effectLst>
+              </a:rPr>
+              <a:t>Nội dung word</a:t>
+            </a:r>
+          </a:p>
+        </p:txBody>
+      </p:sp>
+      <p:sp>
+        <p:nvSpPr>
+          <p:cNvPr id="3" name="Text Box 6">
+            <a:extLst>
+              <a:ext uri="{FF2B5EF4-FFF2-40B4-BE49-F238E27FC236}">
+                <a16:creationId xmlns:a16="http://schemas.microsoft.com/office/drawing/2014/main" id="{782A015A-3FED-C71B-D685-31FA74CAABE4}"/>
               </a:ext>
             </a:extLst>
           </p:cNvPr>
@@ -5837,8 +6415,220 @@
         </p:nvSpPr>
         <p:spPr>
           <a:xfrm>
-            <a:off x="2380297" y="454342"/>
-            <a:ext cx="8021320" cy="460895"/>
+            <a:off x="5332730" y="2971165"/>
+            <a:ext cx="6313170" cy="1476375"/>
+          </a:xfrm>
+          <a:prstGeom prst="rect">
+            <a:avLst/>
+          </a:prstGeom>
+          <a:noFill/>
+        </p:spPr>
+        <p:txBody>
+          <a:bodyPr wrap="square" rtlCol="0">
+            <a:spAutoFit/>
+          </a:bodyPr>
+          <a:lstStyle>
+            <a:defPPr>
+              <a:defRPr lang="en-US"/>
+            </a:defPPr>
+            <a:lvl1pPr marL="0" algn="l" defTabSz="457200" rtl="0" eaLnBrk="1" latinLnBrk="0" hangingPunct="1">
+              <a:defRPr sz="1800" kern="1200">
+                <a:solidFill>
+                  <a:schemeClr val="tx1"/>
+                </a:solidFill>
+                <a:latin typeface="+mn-lt"/>
+                <a:ea typeface="+mn-ea"/>
+                <a:cs typeface="+mn-cs"/>
+              </a:defRPr>
+            </a:lvl1pPr>
+            <a:lvl2pPr marL="457200" algn="l" defTabSz="457200" rtl="0" eaLnBrk="1" latinLnBrk="0" hangingPunct="1">
+              <a:defRPr sz="1800" kern="1200">
+                <a:solidFill>
+                  <a:schemeClr val="tx1"/>
+                </a:solidFill>
+                <a:latin typeface="+mn-lt"/>
+                <a:ea typeface="+mn-ea"/>
+                <a:cs typeface="+mn-cs"/>
+              </a:defRPr>
+            </a:lvl2pPr>
+            <a:lvl3pPr marL="914400" algn="l" defTabSz="457200" rtl="0" eaLnBrk="1" latinLnBrk="0" hangingPunct="1">
+              <a:defRPr sz="1800" kern="1200">
+                <a:solidFill>
+                  <a:schemeClr val="tx1"/>
+                </a:solidFill>
+                <a:latin typeface="+mn-lt"/>
+                <a:ea typeface="+mn-ea"/>
+                <a:cs typeface="+mn-cs"/>
+              </a:defRPr>
+            </a:lvl3pPr>
+            <a:lvl4pPr marL="1371600" algn="l" defTabSz="457200" rtl="0" eaLnBrk="1" latinLnBrk="0" hangingPunct="1">
+              <a:defRPr sz="1800" kern="1200">
+                <a:solidFill>
+                  <a:schemeClr val="tx1"/>
+                </a:solidFill>
+                <a:latin typeface="+mn-lt"/>
+                <a:ea typeface="+mn-ea"/>
+                <a:cs typeface="+mn-cs"/>
+              </a:defRPr>
+            </a:lvl4pPr>
+            <a:lvl5pPr marL="1828800" algn="l" defTabSz="457200" rtl="0" eaLnBrk="1" latinLnBrk="0" hangingPunct="1">
+              <a:defRPr sz="1800" kern="1200">
+                <a:solidFill>
+                  <a:schemeClr val="tx1"/>
+                </a:solidFill>
+                <a:latin typeface="+mn-lt"/>
+                <a:ea typeface="+mn-ea"/>
+                <a:cs typeface="+mn-cs"/>
+              </a:defRPr>
+            </a:lvl5pPr>
+            <a:lvl6pPr marL="2286000" algn="l" defTabSz="457200" rtl="0" eaLnBrk="1" latinLnBrk="0" hangingPunct="1">
+              <a:defRPr sz="1800" kern="1200">
+                <a:solidFill>
+                  <a:schemeClr val="tx1"/>
+                </a:solidFill>
+                <a:latin typeface="+mn-lt"/>
+                <a:ea typeface="+mn-ea"/>
+                <a:cs typeface="+mn-cs"/>
+              </a:defRPr>
+            </a:lvl6pPr>
+            <a:lvl7pPr marL="2743200" algn="l" defTabSz="457200" rtl="0" eaLnBrk="1" latinLnBrk="0" hangingPunct="1">
+              <a:defRPr sz="1800" kern="1200">
+                <a:solidFill>
+                  <a:schemeClr val="tx1"/>
+                </a:solidFill>
+                <a:latin typeface="+mn-lt"/>
+                <a:ea typeface="+mn-ea"/>
+                <a:cs typeface="+mn-cs"/>
+              </a:defRPr>
+            </a:lvl7pPr>
+            <a:lvl8pPr marL="3200400" algn="l" defTabSz="457200" rtl="0" eaLnBrk="1" latinLnBrk="0" hangingPunct="1">
+              <a:defRPr sz="1800" kern="1200">
+                <a:solidFill>
+                  <a:schemeClr val="tx1"/>
+                </a:solidFill>
+                <a:latin typeface="+mn-lt"/>
+                <a:ea typeface="+mn-ea"/>
+                <a:cs typeface="+mn-cs"/>
+              </a:defRPr>
+            </a:lvl8pPr>
+            <a:lvl9pPr marL="3657600" algn="l" defTabSz="457200" rtl="0" eaLnBrk="1" latinLnBrk="0" hangingPunct="1">
+              <a:defRPr sz="1800" kern="1200">
+                <a:solidFill>
+                  <a:schemeClr val="tx1"/>
+                </a:solidFill>
+                <a:latin typeface="+mn-lt"/>
+                <a:ea typeface="+mn-ea"/>
+                <a:cs typeface="+mn-cs"/>
+              </a:defRPr>
+            </a:lvl9pPr>
+          </a:lstStyle>
+          <a:p>
+            <a:pPr algn="l"/>
+            <a:r>
+              <a:rPr lang="en-US" altLang="en-US" b="1">
+                <a:effectLst>
+                  <a:outerShdw blurRad="38100" dist="19050" dir="2700000" algn="tl" rotWithShape="0">
+                    <a:schemeClr val="dk1">
+                      <a:alpha val="40000"/>
+                    </a:schemeClr>
+                  </a:outerShdw>
+                </a:effectLst>
+                <a:sym typeface="+mn-ea"/>
+              </a:rPr>
+              <a:t>Cách gán Style: </a:t>
+            </a:r>
+          </a:p>
+          <a:p>
+            <a:pPr algn="l"/>
+            <a:r>
+              <a:rPr lang="en-US" altLang="en-US" b="1">
+                <a:effectLst>
+                  <a:outerShdw blurRad="38100" dist="19050" dir="2700000" algn="tl" rotWithShape="0">
+                    <a:schemeClr val="dk1">
+                      <a:alpha val="40000"/>
+                    </a:schemeClr>
+                  </a:outerShdw>
+                </a:effectLst>
+                <a:sym typeface="+mn-ea"/>
+              </a:rPr>
+              <a:t>Bôi đen tiêu đề </a:t>
+            </a:r>
+          </a:p>
+          <a:p>
+            <a:pPr algn="l"/>
+            <a:r>
+              <a:rPr lang="en-US" altLang="en-US" b="1">
+                <a:effectLst>
+                  <a:outerShdw blurRad="38100" dist="19050" dir="2700000" algn="tl" rotWithShape="0">
+                    <a:schemeClr val="dk1">
+                      <a:alpha val="40000"/>
+                    </a:schemeClr>
+                  </a:outerShdw>
+                </a:effectLst>
+                <a:sym typeface="+mn-ea"/>
+              </a:rPr>
+              <a:t>→ vào Home </a:t>
+            </a:r>
+          </a:p>
+          <a:p>
+            <a:pPr algn="l"/>
+            <a:r>
+              <a:rPr lang="en-US" altLang="en-US" b="1">
+                <a:effectLst>
+                  <a:outerShdw blurRad="38100" dist="19050" dir="2700000" algn="tl" rotWithShape="0">
+                    <a:schemeClr val="dk1">
+                      <a:alpha val="40000"/>
+                    </a:schemeClr>
+                  </a:outerShdw>
+                </a:effectLst>
+                <a:sym typeface="+mn-ea"/>
+              </a:rPr>
+              <a:t>→ Styles</a:t>
+            </a:r>
+          </a:p>
+          <a:p>
+            <a:pPr algn="l"/>
+            <a:r>
+              <a:rPr lang="en-US" altLang="en-US" b="1">
+                <a:effectLst>
+                  <a:outerShdw blurRad="38100" dist="19050" dir="2700000" algn="tl" rotWithShape="0">
+                    <a:schemeClr val="dk1">
+                      <a:alpha val="40000"/>
+                    </a:schemeClr>
+                  </a:outerShdw>
+                </a:effectLst>
+                <a:sym typeface="+mn-ea"/>
+              </a:rPr>
+              <a:t>→ chọn Heading 1, Heading 2 hoặc Heading 3 phù hợp.</a:t>
+            </a:r>
+            <a:endParaRPr lang="en-US" altLang="en-US" b="1">
+              <a:effectLst>
+                <a:outerShdw blurRad="38100" dist="19050" dir="2700000" algn="tl" rotWithShape="0">
+                  <a:schemeClr val="dk1">
+                    <a:alpha val="40000"/>
+                  </a:schemeClr>
+                </a:outerShdw>
+              </a:effectLst>
+            </a:endParaRPr>
+          </a:p>
+        </p:txBody>
+      </p:sp>
+      <p:sp>
+        <p:nvSpPr>
+          <p:cNvPr id="4" name="Text Box 7">
+            <a:extLst>
+              <a:ext uri="{FF2B5EF4-FFF2-40B4-BE49-F238E27FC236}">
+                <a16:creationId xmlns:a16="http://schemas.microsoft.com/office/drawing/2014/main" id="{9A53177F-1CDA-084F-834A-B2C15D456863}"/>
+              </a:ext>
+            </a:extLst>
+          </p:cNvPr>
+          <p:cNvSpPr txBox="1"/>
+          <p:nvPr/>
+        </p:nvSpPr>
+        <p:spPr>
+          <a:xfrm>
+            <a:off x="3385820" y="1075055"/>
+            <a:ext cx="6015355" cy="486410"/>
           </a:xfrm>
           <a:prstGeom prst="rect">
             <a:avLst/>
@@ -5953,459 +6743,93 @@
               </a:spcAft>
             </a:pPr>
             <a:r>
-              <a:rPr sz="2400" b="1" dirty="0" err="1">
+              <a:rPr sz="2400" b="1">
                 <a:latin typeface="Times New Roman" panose="02020603050405020304"/>
                 <a:ea typeface="Calibri" panose="020F0502020204030204"/>
               </a:rPr>
-              <a:t>Chèn</a:t>
-            </a:r>
-            <a:r>
-              <a:rPr sz="2400" b="1" dirty="0">
-                <a:latin typeface="Times New Roman" panose="02020603050405020304"/>
-                <a:ea typeface="Calibri" panose="020F0502020204030204"/>
-              </a:rPr>
-              <a:t> Auto TOC ở </a:t>
-            </a:r>
-            <a:r>
-              <a:rPr sz="2400" b="1" dirty="0" err="1">
-                <a:latin typeface="Times New Roman" panose="02020603050405020304"/>
-                <a:ea typeface="Calibri" panose="020F0502020204030204"/>
-              </a:rPr>
-              <a:t>trang</a:t>
-            </a:r>
-            <a:r>
-              <a:rPr sz="2400" b="1" dirty="0">
-                <a:latin typeface="Times New Roman" panose="02020603050405020304"/>
-                <a:ea typeface="Calibri" panose="020F0502020204030204"/>
-              </a:rPr>
-              <a:t> </a:t>
-            </a:r>
-            <a:r>
-              <a:rPr sz="2400" b="1" dirty="0" err="1">
-                <a:latin typeface="Times New Roman" panose="02020603050405020304"/>
-                <a:ea typeface="Calibri" panose="020F0502020204030204"/>
-              </a:rPr>
-              <a:t>đầu</a:t>
-            </a:r>
-            <a:r>
-              <a:rPr sz="2400" b="1" dirty="0">
-                <a:latin typeface="Times New Roman" panose="02020603050405020304"/>
-                <a:ea typeface="Calibri" panose="020F0502020204030204"/>
-              </a:rPr>
-              <a:t> </a:t>
-            </a:r>
-            <a:r>
-              <a:rPr sz="2400" b="1" dirty="0" err="1">
-                <a:latin typeface="Times New Roman" panose="02020603050405020304"/>
-                <a:ea typeface="Calibri" panose="020F0502020204030204"/>
-              </a:rPr>
-              <a:t>tiên</a:t>
-            </a:r>
-            <a:endParaRPr sz="2400" b="1" dirty="0">
-              <a:latin typeface="Times New Roman" panose="02020603050405020304"/>
-              <a:ea typeface="Calibri" panose="020F0502020204030204"/>
-            </a:endParaRPr>
-          </a:p>
-        </p:txBody>
-      </p:sp>
-      <p:sp>
-        <p:nvSpPr>
-          <p:cNvPr id="3" name="Text Box 2">
+              <a:t>1. Tạo các tiêu đề bằng Heading Styles</a:t>
+            </a:r>
+          </a:p>
+        </p:txBody>
+      </p:sp>
+      <p:pic>
+        <p:nvPicPr>
+          <p:cNvPr id="5" name="table">
             <a:extLst>
               <a:ext uri="{FF2B5EF4-FFF2-40B4-BE49-F238E27FC236}">
-                <a16:creationId xmlns:a16="http://schemas.microsoft.com/office/drawing/2014/main" id="{0FABE1EE-6E94-976A-9990-76065FC5A940}"/>
-              </a:ext>
-            </a:extLst>
-          </p:cNvPr>
-          <p:cNvSpPr txBox="1"/>
-          <p:nvPr/>
-        </p:nvSpPr>
-        <p:spPr>
-          <a:xfrm>
-            <a:off x="395287" y="1347787"/>
-            <a:ext cx="5080000" cy="420370"/>
-          </a:xfrm>
-          <a:prstGeom prst="rect">
-            <a:avLst/>
-          </a:prstGeom>
-        </p:spPr>
-        <p:txBody>
-          <a:bodyPr>
-            <a:spAutoFit/>
-          </a:bodyPr>
-          <a:lstStyle>
-            <a:defPPr>
-              <a:defRPr lang="en-US"/>
-            </a:defPPr>
-            <a:lvl1pPr marL="0" algn="l" defTabSz="457200" rtl="0" eaLnBrk="1" latinLnBrk="0" hangingPunct="1">
-              <a:defRPr sz="1800" kern="1200">
-                <a:solidFill>
-                  <a:schemeClr val="tx1"/>
-                </a:solidFill>
-                <a:latin typeface="+mn-lt"/>
-                <a:ea typeface="+mn-ea"/>
-                <a:cs typeface="+mn-cs"/>
-              </a:defRPr>
-            </a:lvl1pPr>
-            <a:lvl2pPr marL="457200" algn="l" defTabSz="457200" rtl="0" eaLnBrk="1" latinLnBrk="0" hangingPunct="1">
-              <a:defRPr sz="1800" kern="1200">
-                <a:solidFill>
-                  <a:schemeClr val="tx1"/>
-                </a:solidFill>
-                <a:latin typeface="+mn-lt"/>
-                <a:ea typeface="+mn-ea"/>
-                <a:cs typeface="+mn-cs"/>
-              </a:defRPr>
-            </a:lvl2pPr>
-            <a:lvl3pPr marL="914400" algn="l" defTabSz="457200" rtl="0" eaLnBrk="1" latinLnBrk="0" hangingPunct="1">
-              <a:defRPr sz="1800" kern="1200">
-                <a:solidFill>
-                  <a:schemeClr val="tx1"/>
-                </a:solidFill>
-                <a:latin typeface="+mn-lt"/>
-                <a:ea typeface="+mn-ea"/>
-                <a:cs typeface="+mn-cs"/>
-              </a:defRPr>
-            </a:lvl3pPr>
-            <a:lvl4pPr marL="1371600" algn="l" defTabSz="457200" rtl="0" eaLnBrk="1" latinLnBrk="0" hangingPunct="1">
-              <a:defRPr sz="1800" kern="1200">
-                <a:solidFill>
-                  <a:schemeClr val="tx1"/>
-                </a:solidFill>
-                <a:latin typeface="+mn-lt"/>
-                <a:ea typeface="+mn-ea"/>
-                <a:cs typeface="+mn-cs"/>
-              </a:defRPr>
-            </a:lvl4pPr>
-            <a:lvl5pPr marL="1828800" algn="l" defTabSz="457200" rtl="0" eaLnBrk="1" latinLnBrk="0" hangingPunct="1">
-              <a:defRPr sz="1800" kern="1200">
-                <a:solidFill>
-                  <a:schemeClr val="tx1"/>
-                </a:solidFill>
-                <a:latin typeface="+mn-lt"/>
-                <a:ea typeface="+mn-ea"/>
-                <a:cs typeface="+mn-cs"/>
-              </a:defRPr>
-            </a:lvl5pPr>
-            <a:lvl6pPr marL="2286000" algn="l" defTabSz="457200" rtl="0" eaLnBrk="1" latinLnBrk="0" hangingPunct="1">
-              <a:defRPr sz="1800" kern="1200">
-                <a:solidFill>
-                  <a:schemeClr val="tx1"/>
-                </a:solidFill>
-                <a:latin typeface="+mn-lt"/>
-                <a:ea typeface="+mn-ea"/>
-                <a:cs typeface="+mn-cs"/>
-              </a:defRPr>
-            </a:lvl6pPr>
-            <a:lvl7pPr marL="2743200" algn="l" defTabSz="457200" rtl="0" eaLnBrk="1" latinLnBrk="0" hangingPunct="1">
-              <a:defRPr sz="1800" kern="1200">
-                <a:solidFill>
-                  <a:schemeClr val="tx1"/>
-                </a:solidFill>
-                <a:latin typeface="+mn-lt"/>
-                <a:ea typeface="+mn-ea"/>
-                <a:cs typeface="+mn-cs"/>
-              </a:defRPr>
-            </a:lvl7pPr>
-            <a:lvl8pPr marL="3200400" algn="l" defTabSz="457200" rtl="0" eaLnBrk="1" latinLnBrk="0" hangingPunct="1">
-              <a:defRPr sz="1800" kern="1200">
-                <a:solidFill>
-                  <a:schemeClr val="tx1"/>
-                </a:solidFill>
-                <a:latin typeface="+mn-lt"/>
-                <a:ea typeface="+mn-ea"/>
-                <a:cs typeface="+mn-cs"/>
-              </a:defRPr>
-            </a:lvl8pPr>
-            <a:lvl9pPr marL="3657600" algn="l" defTabSz="457200" rtl="0" eaLnBrk="1" latinLnBrk="0" hangingPunct="1">
-              <a:defRPr sz="1800" kern="1200">
-                <a:solidFill>
-                  <a:schemeClr val="tx1"/>
-                </a:solidFill>
-                <a:latin typeface="+mn-lt"/>
-                <a:ea typeface="+mn-ea"/>
-                <a:cs typeface="+mn-cs"/>
-              </a:defRPr>
-            </a:lvl9pPr>
-          </a:lstStyle>
-          <a:p>
-            <a:pPr algn="ctr" defTabSz="266700">
-              <a:lnSpc>
-                <a:spcPct val="107000"/>
-              </a:lnSpc>
-              <a:spcAft>
-                <a:spcPts val="800"/>
-              </a:spcAft>
-            </a:pPr>
-            <a:r>
-              <a:rPr sz="2000">
-                <a:latin typeface="Times New Roman" panose="02020603050405020304"/>
-                <a:ea typeface="Calibri" panose="020F0502020204030204"/>
-              </a:rPr>
-              <a:t>Bước 1. Tạo trang mục lục</a:t>
-            </a:r>
-            <a:r>
-              <a:rPr lang="vi-VN" sz="2000">
-                <a:latin typeface="Times New Roman" panose="02020603050405020304"/>
-                <a:ea typeface="Calibri" panose="020F0502020204030204"/>
-              </a:rPr>
-              <a:t>, gõ tiêu đề mục lục</a:t>
-            </a:r>
-          </a:p>
-        </p:txBody>
-      </p:sp>
-      <p:pic>
-        <p:nvPicPr>
-          <p:cNvPr id="4" name="Picture 3" descr="2026 | How to Edit Table of Contents in Word Easily - EaseUS">
-            <a:extLst>
-              <a:ext uri="{FF2B5EF4-FFF2-40B4-BE49-F238E27FC236}">
-                <a16:creationId xmlns:a16="http://schemas.microsoft.com/office/drawing/2014/main" id="{0A162FB4-5BB8-F9B9-D9A9-CFDFE83FA0E7}"/>
+                <a16:creationId xmlns:a16="http://schemas.microsoft.com/office/drawing/2014/main" id="{F4EEE358-1594-65B8-2FEA-3FC19B4FF487}"/>
               </a:ext>
             </a:extLst>
           </p:cNvPr>
           <p:cNvPicPr>
-            <a:picLocks noChangeAspect="1" noChangeArrowheads="1"/>
+            <a:picLocks noChangeAspect="1"/>
           </p:cNvPicPr>
           <p:nvPr/>
         </p:nvPicPr>
         <p:blipFill>
-          <a:blip r:embed="rId2">
-            <a:extLst>
-              <a:ext uri="{28A0092B-C50C-407E-A947-70E740481C1C}">
-                <a14:useLocalDpi xmlns:a14="http://schemas.microsoft.com/office/drawing/2010/main" val="0"/>
-              </a:ext>
-            </a:extLst>
-          </a:blip>
-          <a:srcRect/>
+          <a:blip r:embed="rId2"/>
           <a:stretch>
             <a:fillRect/>
           </a:stretch>
         </p:blipFill>
         <p:spPr>
           <a:xfrm>
-            <a:off x="487362" y="1886902"/>
-            <a:ext cx="5202555" cy="4516755"/>
-          </a:xfrm>
-          <a:prstGeom prst="rect">
-            <a:avLst/>
-          </a:prstGeom>
-          <a:noFill/>
-          <a:ln>
-            <a:noFill/>
-          </a:ln>
+            <a:off x="546100" y="1413510"/>
+            <a:ext cx="4090035" cy="3698240"/>
+          </a:xfrm>
+          <a:prstGeom prst="rect">
+            <a:avLst/>
+          </a:prstGeom>
         </p:spPr>
       </p:pic>
-      <p:sp>
-        <p:nvSpPr>
-          <p:cNvPr id="5" name="Text Box 3">
+      <p:pic>
+        <p:nvPicPr>
+          <p:cNvPr id="6" name="Picture 5" descr="Ảnh chụp màn hình 2026-10-27 005052">
             <a:extLst>
               <a:ext uri="{FF2B5EF4-FFF2-40B4-BE49-F238E27FC236}">
-                <a16:creationId xmlns:a16="http://schemas.microsoft.com/office/drawing/2014/main" id="{65ED87E7-0D48-4EC3-8178-67C86DC48245}"/>
-              </a:ext>
-            </a:extLst>
-          </p:cNvPr>
-          <p:cNvSpPr txBox="1"/>
-          <p:nvPr/>
-        </p:nvSpPr>
-        <p:spPr>
-          <a:xfrm>
-            <a:off x="6422072" y="1347787"/>
-            <a:ext cx="5080000" cy="420370"/>
-          </a:xfrm>
-          <a:prstGeom prst="rect">
-            <a:avLst/>
-          </a:prstGeom>
-        </p:spPr>
-        <p:txBody>
-          <a:bodyPr>
-            <a:spAutoFit/>
-          </a:bodyPr>
-          <a:lstStyle>
-            <a:defPPr>
-              <a:defRPr lang="en-US"/>
-            </a:defPPr>
-            <a:lvl1pPr marL="0" algn="l" defTabSz="457200" rtl="0" eaLnBrk="1" latinLnBrk="0" hangingPunct="1">
-              <a:defRPr sz="1800" kern="1200">
-                <a:solidFill>
-                  <a:schemeClr val="tx1"/>
-                </a:solidFill>
-                <a:latin typeface="+mn-lt"/>
-                <a:ea typeface="+mn-ea"/>
-                <a:cs typeface="+mn-cs"/>
-              </a:defRPr>
-            </a:lvl1pPr>
-            <a:lvl2pPr marL="457200" algn="l" defTabSz="457200" rtl="0" eaLnBrk="1" latinLnBrk="0" hangingPunct="1">
-              <a:defRPr sz="1800" kern="1200">
-                <a:solidFill>
-                  <a:schemeClr val="tx1"/>
-                </a:solidFill>
-                <a:latin typeface="+mn-lt"/>
-                <a:ea typeface="+mn-ea"/>
-                <a:cs typeface="+mn-cs"/>
-              </a:defRPr>
-            </a:lvl2pPr>
-            <a:lvl3pPr marL="914400" algn="l" defTabSz="457200" rtl="0" eaLnBrk="1" latinLnBrk="0" hangingPunct="1">
-              <a:defRPr sz="1800" kern="1200">
-                <a:solidFill>
-                  <a:schemeClr val="tx1"/>
-                </a:solidFill>
-                <a:latin typeface="+mn-lt"/>
-                <a:ea typeface="+mn-ea"/>
-                <a:cs typeface="+mn-cs"/>
-              </a:defRPr>
-            </a:lvl3pPr>
-            <a:lvl4pPr marL="1371600" algn="l" defTabSz="457200" rtl="0" eaLnBrk="1" latinLnBrk="0" hangingPunct="1">
-              <a:defRPr sz="1800" kern="1200">
-                <a:solidFill>
-                  <a:schemeClr val="tx1"/>
-                </a:solidFill>
-                <a:latin typeface="+mn-lt"/>
-                <a:ea typeface="+mn-ea"/>
-                <a:cs typeface="+mn-cs"/>
-              </a:defRPr>
-            </a:lvl4pPr>
-            <a:lvl5pPr marL="1828800" algn="l" defTabSz="457200" rtl="0" eaLnBrk="1" latinLnBrk="0" hangingPunct="1">
-              <a:defRPr sz="1800" kern="1200">
-                <a:solidFill>
-                  <a:schemeClr val="tx1"/>
-                </a:solidFill>
-                <a:latin typeface="+mn-lt"/>
-                <a:ea typeface="+mn-ea"/>
-                <a:cs typeface="+mn-cs"/>
-              </a:defRPr>
-            </a:lvl5pPr>
-            <a:lvl6pPr marL="2286000" algn="l" defTabSz="457200" rtl="0" eaLnBrk="1" latinLnBrk="0" hangingPunct="1">
-              <a:defRPr sz="1800" kern="1200">
-                <a:solidFill>
-                  <a:schemeClr val="tx1"/>
-                </a:solidFill>
-                <a:latin typeface="+mn-lt"/>
-                <a:ea typeface="+mn-ea"/>
-                <a:cs typeface="+mn-cs"/>
-              </a:defRPr>
-            </a:lvl6pPr>
-            <a:lvl7pPr marL="2743200" algn="l" defTabSz="457200" rtl="0" eaLnBrk="1" latinLnBrk="0" hangingPunct="1">
-              <a:defRPr sz="1800" kern="1200">
-                <a:solidFill>
-                  <a:schemeClr val="tx1"/>
-                </a:solidFill>
-                <a:latin typeface="+mn-lt"/>
-                <a:ea typeface="+mn-ea"/>
-                <a:cs typeface="+mn-cs"/>
-              </a:defRPr>
-            </a:lvl7pPr>
-            <a:lvl8pPr marL="3200400" algn="l" defTabSz="457200" rtl="0" eaLnBrk="1" latinLnBrk="0" hangingPunct="1">
-              <a:defRPr sz="1800" kern="1200">
-                <a:solidFill>
-                  <a:schemeClr val="tx1"/>
-                </a:solidFill>
-                <a:latin typeface="+mn-lt"/>
-                <a:ea typeface="+mn-ea"/>
-                <a:cs typeface="+mn-cs"/>
-              </a:defRPr>
-            </a:lvl8pPr>
-            <a:lvl9pPr marL="3657600" algn="l" defTabSz="457200" rtl="0" eaLnBrk="1" latinLnBrk="0" hangingPunct="1">
-              <a:defRPr sz="1800" kern="1200">
-                <a:solidFill>
-                  <a:schemeClr val="tx1"/>
-                </a:solidFill>
-                <a:latin typeface="+mn-lt"/>
-                <a:ea typeface="+mn-ea"/>
-                <a:cs typeface="+mn-cs"/>
-              </a:defRPr>
-            </a:lvl9pPr>
-          </a:lstStyle>
-          <a:p>
-            <a:pPr algn="ctr" defTabSz="266700">
-              <a:lnSpc>
-                <a:spcPct val="107000"/>
-              </a:lnSpc>
-              <a:spcAft>
-                <a:spcPts val="800"/>
-              </a:spcAft>
-            </a:pPr>
-            <a:r>
-              <a:rPr sz="2000">
-                <a:latin typeface="Times New Roman" panose="02020603050405020304"/>
-                <a:ea typeface="Calibri" panose="020F0502020204030204"/>
-              </a:rPr>
-              <a:t>Bước </a:t>
-            </a:r>
-            <a:r>
-              <a:rPr lang="vi-VN" sz="2000">
-                <a:latin typeface="Times New Roman" panose="02020603050405020304"/>
-                <a:ea typeface="Calibri" panose="020F0502020204030204"/>
-              </a:rPr>
-              <a:t>2</a:t>
-            </a:r>
-            <a:r>
-              <a:rPr sz="2000">
-                <a:latin typeface="Times New Roman" panose="02020603050405020304"/>
-                <a:ea typeface="Calibri" panose="020F0502020204030204"/>
-              </a:rPr>
-              <a:t>. Cập nhật mục lục</a:t>
-            </a:r>
-          </a:p>
-        </p:txBody>
-      </p:sp>
-      <p:pic>
-        <p:nvPicPr>
-          <p:cNvPr id="6" name="Picture 5" descr="Bot Verification">
-            <a:extLst>
-              <a:ext uri="{FF2B5EF4-FFF2-40B4-BE49-F238E27FC236}">
-                <a16:creationId xmlns:a16="http://schemas.microsoft.com/office/drawing/2014/main" id="{AC4F1AD0-B732-2AAF-E0CB-21A33D3A6BD5}"/>
+                <a16:creationId xmlns:a16="http://schemas.microsoft.com/office/drawing/2014/main" id="{4E343DAF-53F4-51B4-B499-DDA2B3BC4920}"/>
               </a:ext>
             </a:extLst>
           </p:cNvPr>
           <p:cNvPicPr>
-            <a:picLocks noChangeAspect="1" noChangeArrowheads="1"/>
+            <a:picLocks noChangeAspect="1"/>
           </p:cNvPicPr>
           <p:nvPr/>
         </p:nvPicPr>
         <p:blipFill>
-          <a:blip r:embed="rId3">
-            <a:extLst>
-              <a:ext uri="{28A0092B-C50C-407E-A947-70E740481C1C}">
-                <a14:useLocalDpi xmlns:a14="http://schemas.microsoft.com/office/drawing/2010/main" val="0"/>
-              </a:ext>
-            </a:extLst>
-          </a:blip>
-          <a:srcRect/>
+          <a:blip r:embed="rId3"/>
+          <a:srcRect t="5215" r="876"/>
           <a:stretch>
             <a:fillRect/>
           </a:stretch>
         </p:blipFill>
         <p:spPr>
           <a:xfrm>
-            <a:off x="6126797" y="1886902"/>
-            <a:ext cx="5669915" cy="4483100"/>
-          </a:xfrm>
-          <a:prstGeom prst="rect">
-            <a:avLst/>
-          </a:prstGeom>
-          <a:noFill/>
-          <a:ln>
-            <a:noFill/>
-          </a:ln>
+            <a:off x="546100" y="1722755"/>
+            <a:ext cx="4309110" cy="4766945"/>
+          </a:xfrm>
+          <a:prstGeom prst="rect">
+            <a:avLst/>
+          </a:prstGeom>
         </p:spPr>
       </p:pic>
     </p:spTree>
     <p:extLst>
       <p:ext uri="{BB962C8B-B14F-4D97-AF65-F5344CB8AC3E}">
-        <p14:creationId xmlns:p14="http://schemas.microsoft.com/office/powerpoint/2010/main" val="4200119961"/>
+        <p14:creationId xmlns:p14="http://schemas.microsoft.com/office/powerpoint/2010/main" val="4245227612"/>
       </p:ext>
     </p:extLst>
   </p:cSld>
   <p:clrMapOvr>
     <a:masterClrMapping/>
   </p:clrMapOvr>
-  <mc:AlternateContent xmlns:mc="http://schemas.openxmlformats.org/markup-compatibility/2006">
-    <mc:Choice xmlns:p15="http://schemas.microsoft.com/office/powerpoint/2012/main" Requires="p15">
+  <mc:AlternateContent xmlns:mc="http://schemas.openxmlformats.org/markup-compatibility/2006" xmlns:p15="http://schemas.microsoft.com/office/powerpoint/2012/main">
+    <mc:Choice Requires="p15">
       <p:transition xmlns:p14="http://schemas.microsoft.com/office/powerpoint/2010/main" spd="slow" p14:dur="2000">
-        <p15:prstTrans prst="crush"/>
+        <p15:prstTrans prst="prestige"/>
       </p:transition>
     </mc:Choice>
-    <mc:Fallback>
+    <mc:Fallback xmlns="">
       <p:transition spd="slow">
         <p:fade/>
       </p:transition>
@@ -6436,6 +6860,614 @@
           <p:cNvPr id="2" name="Text Box 1">
             <a:extLst>
               <a:ext uri="{FF2B5EF4-FFF2-40B4-BE49-F238E27FC236}">
+                <a16:creationId xmlns:a16="http://schemas.microsoft.com/office/drawing/2014/main" id="{A3768C80-3722-8045-F303-061E1BF2F517}"/>
+              </a:ext>
+            </a:extLst>
+          </p:cNvPr>
+          <p:cNvSpPr txBox="1"/>
+          <p:nvPr/>
+        </p:nvSpPr>
+        <p:spPr>
+          <a:xfrm>
+            <a:off x="2380297" y="454342"/>
+            <a:ext cx="8021320" cy="460895"/>
+          </a:xfrm>
+          <a:prstGeom prst="rect">
+            <a:avLst/>
+          </a:prstGeom>
+        </p:spPr>
+        <p:txBody>
+          <a:bodyPr wrap="square">
+            <a:spAutoFit/>
+          </a:bodyPr>
+          <a:lstStyle>
+            <a:defPPr>
+              <a:defRPr lang="en-US"/>
+            </a:defPPr>
+            <a:lvl1pPr marL="0" algn="l" defTabSz="457200" rtl="0" eaLnBrk="1" latinLnBrk="0" hangingPunct="1">
+              <a:defRPr sz="1800" kern="1200">
+                <a:solidFill>
+                  <a:schemeClr val="tx1"/>
+                </a:solidFill>
+                <a:latin typeface="+mn-lt"/>
+                <a:ea typeface="+mn-ea"/>
+                <a:cs typeface="+mn-cs"/>
+              </a:defRPr>
+            </a:lvl1pPr>
+            <a:lvl2pPr marL="457200" algn="l" defTabSz="457200" rtl="0" eaLnBrk="1" latinLnBrk="0" hangingPunct="1">
+              <a:defRPr sz="1800" kern="1200">
+                <a:solidFill>
+                  <a:schemeClr val="tx1"/>
+                </a:solidFill>
+                <a:latin typeface="+mn-lt"/>
+                <a:ea typeface="+mn-ea"/>
+                <a:cs typeface="+mn-cs"/>
+              </a:defRPr>
+            </a:lvl2pPr>
+            <a:lvl3pPr marL="914400" algn="l" defTabSz="457200" rtl="0" eaLnBrk="1" latinLnBrk="0" hangingPunct="1">
+              <a:defRPr sz="1800" kern="1200">
+                <a:solidFill>
+                  <a:schemeClr val="tx1"/>
+                </a:solidFill>
+                <a:latin typeface="+mn-lt"/>
+                <a:ea typeface="+mn-ea"/>
+                <a:cs typeface="+mn-cs"/>
+              </a:defRPr>
+            </a:lvl3pPr>
+            <a:lvl4pPr marL="1371600" algn="l" defTabSz="457200" rtl="0" eaLnBrk="1" latinLnBrk="0" hangingPunct="1">
+              <a:defRPr sz="1800" kern="1200">
+                <a:solidFill>
+                  <a:schemeClr val="tx1"/>
+                </a:solidFill>
+                <a:latin typeface="+mn-lt"/>
+                <a:ea typeface="+mn-ea"/>
+                <a:cs typeface="+mn-cs"/>
+              </a:defRPr>
+            </a:lvl4pPr>
+            <a:lvl5pPr marL="1828800" algn="l" defTabSz="457200" rtl="0" eaLnBrk="1" latinLnBrk="0" hangingPunct="1">
+              <a:defRPr sz="1800" kern="1200">
+                <a:solidFill>
+                  <a:schemeClr val="tx1"/>
+                </a:solidFill>
+                <a:latin typeface="+mn-lt"/>
+                <a:ea typeface="+mn-ea"/>
+                <a:cs typeface="+mn-cs"/>
+              </a:defRPr>
+            </a:lvl5pPr>
+            <a:lvl6pPr marL="2286000" algn="l" defTabSz="457200" rtl="0" eaLnBrk="1" latinLnBrk="0" hangingPunct="1">
+              <a:defRPr sz="1800" kern="1200">
+                <a:solidFill>
+                  <a:schemeClr val="tx1"/>
+                </a:solidFill>
+                <a:latin typeface="+mn-lt"/>
+                <a:ea typeface="+mn-ea"/>
+                <a:cs typeface="+mn-cs"/>
+              </a:defRPr>
+            </a:lvl6pPr>
+            <a:lvl7pPr marL="2743200" algn="l" defTabSz="457200" rtl="0" eaLnBrk="1" latinLnBrk="0" hangingPunct="1">
+              <a:defRPr sz="1800" kern="1200">
+                <a:solidFill>
+                  <a:schemeClr val="tx1"/>
+                </a:solidFill>
+                <a:latin typeface="+mn-lt"/>
+                <a:ea typeface="+mn-ea"/>
+                <a:cs typeface="+mn-cs"/>
+              </a:defRPr>
+            </a:lvl7pPr>
+            <a:lvl8pPr marL="3200400" algn="l" defTabSz="457200" rtl="0" eaLnBrk="1" latinLnBrk="0" hangingPunct="1">
+              <a:defRPr sz="1800" kern="1200">
+                <a:solidFill>
+                  <a:schemeClr val="tx1"/>
+                </a:solidFill>
+                <a:latin typeface="+mn-lt"/>
+                <a:ea typeface="+mn-ea"/>
+                <a:cs typeface="+mn-cs"/>
+              </a:defRPr>
+            </a:lvl8pPr>
+            <a:lvl9pPr marL="3657600" algn="l" defTabSz="457200" rtl="0" eaLnBrk="1" latinLnBrk="0" hangingPunct="1">
+              <a:defRPr sz="1800" kern="1200">
+                <a:solidFill>
+                  <a:schemeClr val="tx1"/>
+                </a:solidFill>
+                <a:latin typeface="+mn-lt"/>
+                <a:ea typeface="+mn-ea"/>
+                <a:cs typeface="+mn-cs"/>
+              </a:defRPr>
+            </a:lvl9pPr>
+          </a:lstStyle>
+          <a:p>
+            <a:pPr algn="ctr" defTabSz="266700">
+              <a:lnSpc>
+                <a:spcPct val="107000"/>
+              </a:lnSpc>
+              <a:spcAft>
+                <a:spcPts val="800"/>
+              </a:spcAft>
+            </a:pPr>
+            <a:r>
+              <a:rPr sz="2400" b="1" dirty="0" err="1">
+                <a:latin typeface="Times New Roman" panose="02020603050405020304"/>
+                <a:ea typeface="Calibri" panose="020F0502020204030204"/>
+              </a:rPr>
+              <a:t>Chèn</a:t>
+            </a:r>
+            <a:r>
+              <a:rPr sz="2400" b="1" dirty="0">
+                <a:latin typeface="Times New Roman" panose="02020603050405020304"/>
+                <a:ea typeface="Calibri" panose="020F0502020204030204"/>
+              </a:rPr>
+              <a:t> Auto TOC ở </a:t>
+            </a:r>
+            <a:r>
+              <a:rPr sz="2400" b="1" dirty="0" err="1">
+                <a:latin typeface="Times New Roman" panose="02020603050405020304"/>
+                <a:ea typeface="Calibri" panose="020F0502020204030204"/>
+              </a:rPr>
+              <a:t>trang</a:t>
+            </a:r>
+            <a:r>
+              <a:rPr sz="2400" b="1" dirty="0">
+                <a:latin typeface="Times New Roman" panose="02020603050405020304"/>
+                <a:ea typeface="Calibri" panose="020F0502020204030204"/>
+              </a:rPr>
+              <a:t> </a:t>
+            </a:r>
+            <a:r>
+              <a:rPr sz="2400" b="1" dirty="0" err="1">
+                <a:latin typeface="Times New Roman" panose="02020603050405020304"/>
+                <a:ea typeface="Calibri" panose="020F0502020204030204"/>
+              </a:rPr>
+              <a:t>đầu</a:t>
+            </a:r>
+            <a:r>
+              <a:rPr sz="2400" b="1" dirty="0">
+                <a:latin typeface="Times New Roman" panose="02020603050405020304"/>
+                <a:ea typeface="Calibri" panose="020F0502020204030204"/>
+              </a:rPr>
+              <a:t> </a:t>
+            </a:r>
+            <a:r>
+              <a:rPr sz="2400" b="1" dirty="0" err="1">
+                <a:latin typeface="Times New Roman" panose="02020603050405020304"/>
+                <a:ea typeface="Calibri" panose="020F0502020204030204"/>
+              </a:rPr>
+              <a:t>tiên</a:t>
+            </a:r>
+            <a:endParaRPr sz="2400" b="1" dirty="0">
+              <a:latin typeface="Times New Roman" panose="02020603050405020304"/>
+              <a:ea typeface="Calibri" panose="020F0502020204030204"/>
+            </a:endParaRPr>
+          </a:p>
+        </p:txBody>
+      </p:sp>
+      <p:sp>
+        <p:nvSpPr>
+          <p:cNvPr id="3" name="Text Box 2">
+            <a:extLst>
+              <a:ext uri="{FF2B5EF4-FFF2-40B4-BE49-F238E27FC236}">
+                <a16:creationId xmlns:a16="http://schemas.microsoft.com/office/drawing/2014/main" id="{0FABE1EE-6E94-976A-9990-76065FC5A940}"/>
+              </a:ext>
+            </a:extLst>
+          </p:cNvPr>
+          <p:cNvSpPr txBox="1"/>
+          <p:nvPr/>
+        </p:nvSpPr>
+        <p:spPr>
+          <a:xfrm>
+            <a:off x="395287" y="1347787"/>
+            <a:ext cx="5080000" cy="420370"/>
+          </a:xfrm>
+          <a:prstGeom prst="rect">
+            <a:avLst/>
+          </a:prstGeom>
+        </p:spPr>
+        <p:txBody>
+          <a:bodyPr>
+            <a:spAutoFit/>
+          </a:bodyPr>
+          <a:lstStyle>
+            <a:defPPr>
+              <a:defRPr lang="en-US"/>
+            </a:defPPr>
+            <a:lvl1pPr marL="0" algn="l" defTabSz="457200" rtl="0" eaLnBrk="1" latinLnBrk="0" hangingPunct="1">
+              <a:defRPr sz="1800" kern="1200">
+                <a:solidFill>
+                  <a:schemeClr val="tx1"/>
+                </a:solidFill>
+                <a:latin typeface="+mn-lt"/>
+                <a:ea typeface="+mn-ea"/>
+                <a:cs typeface="+mn-cs"/>
+              </a:defRPr>
+            </a:lvl1pPr>
+            <a:lvl2pPr marL="457200" algn="l" defTabSz="457200" rtl="0" eaLnBrk="1" latinLnBrk="0" hangingPunct="1">
+              <a:defRPr sz="1800" kern="1200">
+                <a:solidFill>
+                  <a:schemeClr val="tx1"/>
+                </a:solidFill>
+                <a:latin typeface="+mn-lt"/>
+                <a:ea typeface="+mn-ea"/>
+                <a:cs typeface="+mn-cs"/>
+              </a:defRPr>
+            </a:lvl2pPr>
+            <a:lvl3pPr marL="914400" algn="l" defTabSz="457200" rtl="0" eaLnBrk="1" latinLnBrk="0" hangingPunct="1">
+              <a:defRPr sz="1800" kern="1200">
+                <a:solidFill>
+                  <a:schemeClr val="tx1"/>
+                </a:solidFill>
+                <a:latin typeface="+mn-lt"/>
+                <a:ea typeface="+mn-ea"/>
+                <a:cs typeface="+mn-cs"/>
+              </a:defRPr>
+            </a:lvl3pPr>
+            <a:lvl4pPr marL="1371600" algn="l" defTabSz="457200" rtl="0" eaLnBrk="1" latinLnBrk="0" hangingPunct="1">
+              <a:defRPr sz="1800" kern="1200">
+                <a:solidFill>
+                  <a:schemeClr val="tx1"/>
+                </a:solidFill>
+                <a:latin typeface="+mn-lt"/>
+                <a:ea typeface="+mn-ea"/>
+                <a:cs typeface="+mn-cs"/>
+              </a:defRPr>
+            </a:lvl4pPr>
+            <a:lvl5pPr marL="1828800" algn="l" defTabSz="457200" rtl="0" eaLnBrk="1" latinLnBrk="0" hangingPunct="1">
+              <a:defRPr sz="1800" kern="1200">
+                <a:solidFill>
+                  <a:schemeClr val="tx1"/>
+                </a:solidFill>
+                <a:latin typeface="+mn-lt"/>
+                <a:ea typeface="+mn-ea"/>
+                <a:cs typeface="+mn-cs"/>
+              </a:defRPr>
+            </a:lvl5pPr>
+            <a:lvl6pPr marL="2286000" algn="l" defTabSz="457200" rtl="0" eaLnBrk="1" latinLnBrk="0" hangingPunct="1">
+              <a:defRPr sz="1800" kern="1200">
+                <a:solidFill>
+                  <a:schemeClr val="tx1"/>
+                </a:solidFill>
+                <a:latin typeface="+mn-lt"/>
+                <a:ea typeface="+mn-ea"/>
+                <a:cs typeface="+mn-cs"/>
+              </a:defRPr>
+            </a:lvl6pPr>
+            <a:lvl7pPr marL="2743200" algn="l" defTabSz="457200" rtl="0" eaLnBrk="1" latinLnBrk="0" hangingPunct="1">
+              <a:defRPr sz="1800" kern="1200">
+                <a:solidFill>
+                  <a:schemeClr val="tx1"/>
+                </a:solidFill>
+                <a:latin typeface="+mn-lt"/>
+                <a:ea typeface="+mn-ea"/>
+                <a:cs typeface="+mn-cs"/>
+              </a:defRPr>
+            </a:lvl7pPr>
+            <a:lvl8pPr marL="3200400" algn="l" defTabSz="457200" rtl="0" eaLnBrk="1" latinLnBrk="0" hangingPunct="1">
+              <a:defRPr sz="1800" kern="1200">
+                <a:solidFill>
+                  <a:schemeClr val="tx1"/>
+                </a:solidFill>
+                <a:latin typeface="+mn-lt"/>
+                <a:ea typeface="+mn-ea"/>
+                <a:cs typeface="+mn-cs"/>
+              </a:defRPr>
+            </a:lvl8pPr>
+            <a:lvl9pPr marL="3657600" algn="l" defTabSz="457200" rtl="0" eaLnBrk="1" latinLnBrk="0" hangingPunct="1">
+              <a:defRPr sz="1800" kern="1200">
+                <a:solidFill>
+                  <a:schemeClr val="tx1"/>
+                </a:solidFill>
+                <a:latin typeface="+mn-lt"/>
+                <a:ea typeface="+mn-ea"/>
+                <a:cs typeface="+mn-cs"/>
+              </a:defRPr>
+            </a:lvl9pPr>
+          </a:lstStyle>
+          <a:p>
+            <a:pPr algn="ctr" defTabSz="266700">
+              <a:lnSpc>
+                <a:spcPct val="107000"/>
+              </a:lnSpc>
+              <a:spcAft>
+                <a:spcPts val="800"/>
+              </a:spcAft>
+            </a:pPr>
+            <a:r>
+              <a:rPr sz="2000">
+                <a:latin typeface="Times New Roman" panose="02020603050405020304"/>
+                <a:ea typeface="Calibri" panose="020F0502020204030204"/>
+              </a:rPr>
+              <a:t>Bước 1. Tạo trang mục lục</a:t>
+            </a:r>
+            <a:r>
+              <a:rPr lang="vi-VN" sz="2000">
+                <a:latin typeface="Times New Roman" panose="02020603050405020304"/>
+                <a:ea typeface="Calibri" panose="020F0502020204030204"/>
+              </a:rPr>
+              <a:t>, gõ tiêu đề mục lục</a:t>
+            </a:r>
+          </a:p>
+        </p:txBody>
+      </p:sp>
+      <p:pic>
+        <p:nvPicPr>
+          <p:cNvPr id="4" name="Picture 3" descr="2026 | How to Edit Table of Contents in Word Easily - EaseUS">
+            <a:extLst>
+              <a:ext uri="{FF2B5EF4-FFF2-40B4-BE49-F238E27FC236}">
+                <a16:creationId xmlns:a16="http://schemas.microsoft.com/office/drawing/2014/main" id="{0A162FB4-5BB8-F9B9-D9A9-CFDFE83FA0E7}"/>
+              </a:ext>
+            </a:extLst>
+          </p:cNvPr>
+          <p:cNvPicPr>
+            <a:picLocks noChangeAspect="1" noChangeArrowheads="1"/>
+          </p:cNvPicPr>
+          <p:nvPr/>
+        </p:nvPicPr>
+        <p:blipFill>
+          <a:blip r:embed="rId2">
+            <a:extLst>
+              <a:ext uri="{28A0092B-C50C-407E-A947-70E740481C1C}">
+                <a14:useLocalDpi xmlns:a14="http://schemas.microsoft.com/office/drawing/2010/main" val="0"/>
+              </a:ext>
+            </a:extLst>
+          </a:blip>
+          <a:srcRect/>
+          <a:stretch>
+            <a:fillRect/>
+          </a:stretch>
+        </p:blipFill>
+        <p:spPr>
+          <a:xfrm>
+            <a:off x="487362" y="1886902"/>
+            <a:ext cx="5202555" cy="4516755"/>
+          </a:xfrm>
+          <a:prstGeom prst="rect">
+            <a:avLst/>
+          </a:prstGeom>
+          <a:noFill/>
+          <a:ln>
+            <a:noFill/>
+          </a:ln>
+        </p:spPr>
+      </p:pic>
+      <p:sp>
+        <p:nvSpPr>
+          <p:cNvPr id="5" name="Text Box 3">
+            <a:extLst>
+              <a:ext uri="{FF2B5EF4-FFF2-40B4-BE49-F238E27FC236}">
+                <a16:creationId xmlns:a16="http://schemas.microsoft.com/office/drawing/2014/main" id="{65ED87E7-0D48-4EC3-8178-67C86DC48245}"/>
+              </a:ext>
+            </a:extLst>
+          </p:cNvPr>
+          <p:cNvSpPr txBox="1"/>
+          <p:nvPr/>
+        </p:nvSpPr>
+        <p:spPr>
+          <a:xfrm>
+            <a:off x="6422072" y="1347787"/>
+            <a:ext cx="5080000" cy="420370"/>
+          </a:xfrm>
+          <a:prstGeom prst="rect">
+            <a:avLst/>
+          </a:prstGeom>
+        </p:spPr>
+        <p:txBody>
+          <a:bodyPr>
+            <a:spAutoFit/>
+          </a:bodyPr>
+          <a:lstStyle>
+            <a:defPPr>
+              <a:defRPr lang="en-US"/>
+            </a:defPPr>
+            <a:lvl1pPr marL="0" algn="l" defTabSz="457200" rtl="0" eaLnBrk="1" latinLnBrk="0" hangingPunct="1">
+              <a:defRPr sz="1800" kern="1200">
+                <a:solidFill>
+                  <a:schemeClr val="tx1"/>
+                </a:solidFill>
+                <a:latin typeface="+mn-lt"/>
+                <a:ea typeface="+mn-ea"/>
+                <a:cs typeface="+mn-cs"/>
+              </a:defRPr>
+            </a:lvl1pPr>
+            <a:lvl2pPr marL="457200" algn="l" defTabSz="457200" rtl="0" eaLnBrk="1" latinLnBrk="0" hangingPunct="1">
+              <a:defRPr sz="1800" kern="1200">
+                <a:solidFill>
+                  <a:schemeClr val="tx1"/>
+                </a:solidFill>
+                <a:latin typeface="+mn-lt"/>
+                <a:ea typeface="+mn-ea"/>
+                <a:cs typeface="+mn-cs"/>
+              </a:defRPr>
+            </a:lvl2pPr>
+            <a:lvl3pPr marL="914400" algn="l" defTabSz="457200" rtl="0" eaLnBrk="1" latinLnBrk="0" hangingPunct="1">
+              <a:defRPr sz="1800" kern="1200">
+                <a:solidFill>
+                  <a:schemeClr val="tx1"/>
+                </a:solidFill>
+                <a:latin typeface="+mn-lt"/>
+                <a:ea typeface="+mn-ea"/>
+                <a:cs typeface="+mn-cs"/>
+              </a:defRPr>
+            </a:lvl3pPr>
+            <a:lvl4pPr marL="1371600" algn="l" defTabSz="457200" rtl="0" eaLnBrk="1" latinLnBrk="0" hangingPunct="1">
+              <a:defRPr sz="1800" kern="1200">
+                <a:solidFill>
+                  <a:schemeClr val="tx1"/>
+                </a:solidFill>
+                <a:latin typeface="+mn-lt"/>
+                <a:ea typeface="+mn-ea"/>
+                <a:cs typeface="+mn-cs"/>
+              </a:defRPr>
+            </a:lvl4pPr>
+            <a:lvl5pPr marL="1828800" algn="l" defTabSz="457200" rtl="0" eaLnBrk="1" latinLnBrk="0" hangingPunct="1">
+              <a:defRPr sz="1800" kern="1200">
+                <a:solidFill>
+                  <a:schemeClr val="tx1"/>
+                </a:solidFill>
+                <a:latin typeface="+mn-lt"/>
+                <a:ea typeface="+mn-ea"/>
+                <a:cs typeface="+mn-cs"/>
+              </a:defRPr>
+            </a:lvl5pPr>
+            <a:lvl6pPr marL="2286000" algn="l" defTabSz="457200" rtl="0" eaLnBrk="1" latinLnBrk="0" hangingPunct="1">
+              <a:defRPr sz="1800" kern="1200">
+                <a:solidFill>
+                  <a:schemeClr val="tx1"/>
+                </a:solidFill>
+                <a:latin typeface="+mn-lt"/>
+                <a:ea typeface="+mn-ea"/>
+                <a:cs typeface="+mn-cs"/>
+              </a:defRPr>
+            </a:lvl6pPr>
+            <a:lvl7pPr marL="2743200" algn="l" defTabSz="457200" rtl="0" eaLnBrk="1" latinLnBrk="0" hangingPunct="1">
+              <a:defRPr sz="1800" kern="1200">
+                <a:solidFill>
+                  <a:schemeClr val="tx1"/>
+                </a:solidFill>
+                <a:latin typeface="+mn-lt"/>
+                <a:ea typeface="+mn-ea"/>
+                <a:cs typeface="+mn-cs"/>
+              </a:defRPr>
+            </a:lvl7pPr>
+            <a:lvl8pPr marL="3200400" algn="l" defTabSz="457200" rtl="0" eaLnBrk="1" latinLnBrk="0" hangingPunct="1">
+              <a:defRPr sz="1800" kern="1200">
+                <a:solidFill>
+                  <a:schemeClr val="tx1"/>
+                </a:solidFill>
+                <a:latin typeface="+mn-lt"/>
+                <a:ea typeface="+mn-ea"/>
+                <a:cs typeface="+mn-cs"/>
+              </a:defRPr>
+            </a:lvl8pPr>
+            <a:lvl9pPr marL="3657600" algn="l" defTabSz="457200" rtl="0" eaLnBrk="1" latinLnBrk="0" hangingPunct="1">
+              <a:defRPr sz="1800" kern="1200">
+                <a:solidFill>
+                  <a:schemeClr val="tx1"/>
+                </a:solidFill>
+                <a:latin typeface="+mn-lt"/>
+                <a:ea typeface="+mn-ea"/>
+                <a:cs typeface="+mn-cs"/>
+              </a:defRPr>
+            </a:lvl9pPr>
+          </a:lstStyle>
+          <a:p>
+            <a:pPr algn="ctr" defTabSz="266700">
+              <a:lnSpc>
+                <a:spcPct val="107000"/>
+              </a:lnSpc>
+              <a:spcAft>
+                <a:spcPts val="800"/>
+              </a:spcAft>
+            </a:pPr>
+            <a:r>
+              <a:rPr sz="2000">
+                <a:latin typeface="Times New Roman" panose="02020603050405020304"/>
+                <a:ea typeface="Calibri" panose="020F0502020204030204"/>
+              </a:rPr>
+              <a:t>Bước </a:t>
+            </a:r>
+            <a:r>
+              <a:rPr lang="vi-VN" sz="2000">
+                <a:latin typeface="Times New Roman" panose="02020603050405020304"/>
+                <a:ea typeface="Calibri" panose="020F0502020204030204"/>
+              </a:rPr>
+              <a:t>2</a:t>
+            </a:r>
+            <a:r>
+              <a:rPr sz="2000">
+                <a:latin typeface="Times New Roman" panose="02020603050405020304"/>
+                <a:ea typeface="Calibri" panose="020F0502020204030204"/>
+              </a:rPr>
+              <a:t>. Cập nhật mục lục</a:t>
+            </a:r>
+          </a:p>
+        </p:txBody>
+      </p:sp>
+      <p:pic>
+        <p:nvPicPr>
+          <p:cNvPr id="6" name="Picture 5" descr="Bot Verification">
+            <a:extLst>
+              <a:ext uri="{FF2B5EF4-FFF2-40B4-BE49-F238E27FC236}">
+                <a16:creationId xmlns:a16="http://schemas.microsoft.com/office/drawing/2014/main" id="{AC4F1AD0-B732-2AAF-E0CB-21A33D3A6BD5}"/>
+              </a:ext>
+            </a:extLst>
+          </p:cNvPr>
+          <p:cNvPicPr>
+            <a:picLocks noChangeAspect="1" noChangeArrowheads="1"/>
+          </p:cNvPicPr>
+          <p:nvPr/>
+        </p:nvPicPr>
+        <p:blipFill>
+          <a:blip r:embed="rId3">
+            <a:extLst>
+              <a:ext uri="{28A0092B-C50C-407E-A947-70E740481C1C}">
+                <a14:useLocalDpi xmlns:a14="http://schemas.microsoft.com/office/drawing/2010/main" val="0"/>
+              </a:ext>
+            </a:extLst>
+          </a:blip>
+          <a:srcRect/>
+          <a:stretch>
+            <a:fillRect/>
+          </a:stretch>
+        </p:blipFill>
+        <p:spPr>
+          <a:xfrm>
+            <a:off x="6126797" y="1886902"/>
+            <a:ext cx="5669915" cy="4483100"/>
+          </a:xfrm>
+          <a:prstGeom prst="rect">
+            <a:avLst/>
+          </a:prstGeom>
+          <a:noFill/>
+          <a:ln>
+            <a:noFill/>
+          </a:ln>
+        </p:spPr>
+      </p:pic>
+    </p:spTree>
+    <p:extLst>
+      <p:ext uri="{BB962C8B-B14F-4D97-AF65-F5344CB8AC3E}">
+        <p14:creationId xmlns:p14="http://schemas.microsoft.com/office/powerpoint/2010/main" val="4200119961"/>
+      </p:ext>
+    </p:extLst>
+  </p:cSld>
+  <p:clrMapOvr>
+    <a:masterClrMapping/>
+  </p:clrMapOvr>
+  <mc:AlternateContent xmlns:mc="http://schemas.openxmlformats.org/markup-compatibility/2006" xmlns:p15="http://schemas.microsoft.com/office/powerpoint/2012/main">
+    <mc:Choice Requires="p15">
+      <p:transition xmlns:p14="http://schemas.microsoft.com/office/powerpoint/2010/main" spd="slow" p14:dur="2000">
+        <p15:prstTrans prst="crush"/>
+      </p:transition>
+    </mc:Choice>
+    <mc:Fallback xmlns="">
+      <p:transition spd="slow">
+        <p:fade/>
+      </p:transition>
+    </mc:Fallback>
+  </mc:AlternateContent>
+</p:sld>
+</file>
+
+<file path=ppt/slides/slide15.xml><?xml version="1.0" encoding="utf-8"?>
+<p:sld xmlns:a="http://schemas.openxmlformats.org/drawingml/2006/main" xmlns:r="http://schemas.openxmlformats.org/officeDocument/2006/relationships" xmlns:p="http://schemas.openxmlformats.org/presentationml/2006/main">
+  <p:cSld>
+    <p:spTree>
+      <p:nvGrpSpPr>
+        <p:cNvPr id="1" name=""/>
+        <p:cNvGrpSpPr/>
+        <p:nvPr/>
+      </p:nvGrpSpPr>
+      <p:grpSpPr>
+        <a:xfrm>
+          <a:off x="0" y="0"/>
+          <a:ext cx="0" cy="0"/>
+          <a:chOff x="0" y="0"/>
+          <a:chExt cx="0" cy="0"/>
+        </a:xfrm>
+      </p:grpSpPr>
+      <p:sp>
+        <p:nvSpPr>
+          <p:cNvPr id="2" name="Text Box 1">
+            <a:extLst>
+              <a:ext uri="{FF2B5EF4-FFF2-40B4-BE49-F238E27FC236}">
                 <a16:creationId xmlns:a16="http://schemas.microsoft.com/office/drawing/2014/main" id="{FBABA599-E850-D0E5-716E-B27790159FC8}"/>
               </a:ext>
             </a:extLst>
@@ -6888,13 +7920,13 @@
   <p:clrMapOvr>
     <a:masterClrMapping/>
   </p:clrMapOvr>
-  <mc:AlternateContent xmlns:mc="http://schemas.openxmlformats.org/markup-compatibility/2006">
-    <mc:Choice xmlns:p14="http://schemas.microsoft.com/office/powerpoint/2010/main" Requires="p14">
+  <mc:AlternateContent xmlns:mc="http://schemas.openxmlformats.org/markup-compatibility/2006" xmlns:p14="http://schemas.microsoft.com/office/powerpoint/2010/main">
+    <mc:Choice Requires="p14">
       <p:transition spd="slow" p14:dur="1200">
         <p:dissolve/>
       </p:transition>
     </mc:Choice>
-    <mc:Fallback>
+    <mc:Fallback xmlns="">
       <p:transition spd="slow">
         <p:dissolve/>
       </p:transition>
@@ -6903,7 +7935,7 @@
 </p:sld>
 </file>
 
-<file path=ppt/slides/slide15.xml><?xml version="1.0" encoding="utf-8"?>
+<file path=ppt/slides/slide16.xml><?xml version="1.0" encoding="utf-8"?>
 <p:sld xmlns:a="http://schemas.openxmlformats.org/drawingml/2006/main" xmlns:r="http://schemas.openxmlformats.org/officeDocument/2006/relationships" xmlns:p="http://schemas.openxmlformats.org/presentationml/2006/main">
   <p:cSld>
     <p:bg>
@@ -8100,709 +9132,13 @@
   <p:clrMapOvr>
     <a:masterClrMapping/>
   </p:clrMapOvr>
-  <mc:AlternateContent xmlns:mc="http://schemas.openxmlformats.org/markup-compatibility/2006">
-    <mc:Choice xmlns:p14="http://schemas.microsoft.com/office/powerpoint/2010/main" Requires="p14">
+  <mc:AlternateContent xmlns:mc="http://schemas.openxmlformats.org/markup-compatibility/2006" xmlns:p14="http://schemas.microsoft.com/office/powerpoint/2010/main">
+    <mc:Choice Requires="p14">
       <p:transition spd="slow" p14:dur="4000">
         <p14:vortex dir="r"/>
       </p:transition>
     </mc:Choice>
-    <mc:Fallback>
-      <p:transition spd="slow">
-        <p:fade/>
-      </p:transition>
-    </mc:Fallback>
-  </mc:AlternateContent>
-</p:sld>
-</file>
-
-<file path=ppt/slides/slide16.xml><?xml version="1.0" encoding="utf-8"?>
-<p:sld xmlns:a="http://schemas.openxmlformats.org/drawingml/2006/main" xmlns:r="http://schemas.openxmlformats.org/officeDocument/2006/relationships" xmlns:p="http://schemas.openxmlformats.org/presentationml/2006/main">
-  <p:cSld>
-    <p:bg>
-      <p:bgPr>
-        <a:solidFill>
-          <a:srgbClr val="F5F8FA"/>
-        </a:solidFill>
-        <a:effectLst/>
-      </p:bgPr>
-    </p:bg>
-    <p:spTree>
-      <p:nvGrpSpPr>
-        <p:cNvPr id="1" name=""/>
-        <p:cNvGrpSpPr/>
-        <p:nvPr/>
-      </p:nvGrpSpPr>
-      <p:grpSpPr>
-        <a:xfrm>
-          <a:off x="0" y="0"/>
-          <a:ext cx="0" cy="0"/>
-          <a:chOff x="0" y="0"/>
-          <a:chExt cx="0" cy="0"/>
-        </a:xfrm>
-      </p:grpSpPr>
-      <p:sp>
-        <p:nvSpPr>
-          <p:cNvPr id="2" name="TextBox 1"/>
-          <p:cNvSpPr txBox="1"/>
-          <p:nvPr/>
-        </p:nvSpPr>
-        <p:spPr>
-          <a:xfrm>
-            <a:off x="594360" y="347472"/>
-            <a:ext cx="10972800" cy="502920"/>
-          </a:xfrm>
-          <a:prstGeom prst="rect">
-            <a:avLst/>
-          </a:prstGeom>
-          <a:noFill/>
-        </p:spPr>
-        <p:txBody>
-          <a:bodyPr wrap="square" lIns="54864" tIns="54864" rIns="54864" bIns="54864" anchor="t">
-            <a:spAutoFit/>
-          </a:bodyPr>
-          <a:lstStyle/>
-          <a:p>
-            <a:r>
-              <a:rPr sz="2700" b="1">
-                <a:solidFill>
-                  <a:srgbClr val="12273A"/>
-                </a:solidFill>
-                <a:latin typeface="Aptos"/>
-              </a:rPr>
-              <a:t>9. Tính toán dung lượng &amp; thời gian tải</a:t>
-            </a:r>
-          </a:p>
-        </p:txBody>
-      </p:sp>
-      <p:sp>
-        <p:nvSpPr>
-          <p:cNvPr id="3" name="Rectangle 2"/>
-          <p:cNvSpPr/>
-          <p:nvPr/>
-        </p:nvSpPr>
-        <p:spPr>
-          <a:xfrm>
-            <a:off x="612648" y="960120"/>
-            <a:ext cx="822960" cy="54864"/>
-          </a:xfrm>
-          <a:prstGeom prst="rect">
-            <a:avLst/>
-          </a:prstGeom>
-          <a:solidFill>
-            <a:srgbClr val="27AE60"/>
-          </a:solidFill>
-          <a:ln>
-            <a:noFill/>
-          </a:ln>
-        </p:spPr>
-        <p:style>
-          <a:lnRef idx="1">
-            <a:schemeClr val="accent1"/>
-          </a:lnRef>
-          <a:fillRef idx="3">
-            <a:schemeClr val="accent1"/>
-          </a:fillRef>
-          <a:effectRef idx="2">
-            <a:schemeClr val="accent1"/>
-          </a:effectRef>
-          <a:fontRef idx="minor">
-            <a:schemeClr val="lt1"/>
-          </a:fontRef>
-        </p:style>
-        <p:txBody>
-          <a:bodyPr rtlCol="0" anchor="ctr"/>
-          <a:lstStyle/>
-          <a:p>
-            <a:pPr algn="ctr"/>
-            <a:endParaRPr/>
-          </a:p>
-        </p:txBody>
-      </p:sp>
-      <p:sp>
-        <p:nvSpPr>
-          <p:cNvPr id="4" name="TextBox 3"/>
-          <p:cNvSpPr txBox="1"/>
-          <p:nvPr/>
-        </p:nvSpPr>
-        <p:spPr>
-          <a:xfrm>
-            <a:off x="9601200" y="411480"/>
-            <a:ext cx="1920240" cy="274320"/>
-          </a:xfrm>
-          <a:prstGeom prst="rect">
-            <a:avLst/>
-          </a:prstGeom>
-          <a:noFill/>
-        </p:spPr>
-        <p:txBody>
-          <a:bodyPr wrap="square" lIns="54864" tIns="54864" rIns="54864" bIns="54864" anchor="t">
-            <a:spAutoFit/>
-          </a:bodyPr>
-          <a:lstStyle/>
-          <a:p>
-            <a:pPr algn="r"/>
-            <a:r>
-              <a:rPr sz="1000" b="1">
-                <a:solidFill>
-                  <a:srgbClr val="27AE60"/>
-                </a:solidFill>
-                <a:latin typeface="Aptos"/>
-              </a:rPr>
-              <a:t>BẪY DỮ LIỆU</a:t>
-            </a:r>
-          </a:p>
-        </p:txBody>
-      </p:sp>
-      <p:sp>
-        <p:nvSpPr>
-          <p:cNvPr id="5" name="Rounded Rectangle 4"/>
-          <p:cNvSpPr/>
-          <p:nvPr/>
-        </p:nvSpPr>
-        <p:spPr>
-          <a:xfrm>
-            <a:off x="731520" y="1417320"/>
-            <a:ext cx="5120640" cy="1828800"/>
-          </a:xfrm>
-          <a:prstGeom prst="roundRect">
-            <a:avLst/>
-          </a:prstGeom>
-          <a:solidFill>
-            <a:srgbClr val="FFFFFF"/>
-          </a:solidFill>
-          <a:ln>
-            <a:solidFill>
-              <a:srgbClr val="E0E8EC"/>
-            </a:solidFill>
-          </a:ln>
-        </p:spPr>
-        <p:style>
-          <a:lnRef idx="1">
-            <a:schemeClr val="accent1"/>
-          </a:lnRef>
-          <a:fillRef idx="3">
-            <a:schemeClr val="accent1"/>
-          </a:fillRef>
-          <a:effectRef idx="2">
-            <a:schemeClr val="accent1"/>
-          </a:effectRef>
-          <a:fontRef idx="minor">
-            <a:schemeClr val="lt1"/>
-          </a:fontRef>
-        </p:style>
-        <p:txBody>
-          <a:bodyPr rtlCol="0" anchor="ctr"/>
-          <a:lstStyle/>
-          <a:p>
-            <a:pPr algn="ctr"/>
-            <a:endParaRPr/>
-          </a:p>
-        </p:txBody>
-      </p:sp>
-      <p:sp>
-        <p:nvSpPr>
-          <p:cNvPr id="6" name="Rectangle 5"/>
-          <p:cNvSpPr/>
-          <p:nvPr/>
-        </p:nvSpPr>
-        <p:spPr>
-          <a:xfrm>
-            <a:off x="731520" y="1417320"/>
-            <a:ext cx="73152" cy="1828800"/>
-          </a:xfrm>
-          <a:prstGeom prst="rect">
-            <a:avLst/>
-          </a:prstGeom>
-          <a:solidFill>
-            <a:srgbClr val="27AE60"/>
-          </a:solidFill>
-          <a:ln>
-            <a:noFill/>
-          </a:ln>
-        </p:spPr>
-        <p:style>
-          <a:lnRef idx="1">
-            <a:schemeClr val="accent1"/>
-          </a:lnRef>
-          <a:fillRef idx="3">
-            <a:schemeClr val="accent1"/>
-          </a:fillRef>
-          <a:effectRef idx="2">
-            <a:schemeClr val="accent1"/>
-          </a:effectRef>
-          <a:fontRef idx="minor">
-            <a:schemeClr val="lt1"/>
-          </a:fontRef>
-        </p:style>
-        <p:txBody>
-          <a:bodyPr rtlCol="0" anchor="ctr"/>
-          <a:lstStyle/>
-          <a:p>
-            <a:pPr algn="ctr"/>
-            <a:endParaRPr/>
-          </a:p>
-        </p:txBody>
-      </p:sp>
-      <p:sp>
-        <p:nvSpPr>
-          <p:cNvPr id="7" name="TextBox 6"/>
-          <p:cNvSpPr txBox="1"/>
-          <p:nvPr/>
-        </p:nvSpPr>
-        <p:spPr>
-          <a:xfrm>
-            <a:off x="932688" y="1581912"/>
-            <a:ext cx="4754879" cy="320040"/>
-          </a:xfrm>
-          <a:prstGeom prst="rect">
-            <a:avLst/>
-          </a:prstGeom>
-          <a:noFill/>
-        </p:spPr>
-        <p:txBody>
-          <a:bodyPr wrap="square" lIns="54864" tIns="54864" rIns="54864" bIns="54864" anchor="t">
-            <a:spAutoFit/>
-          </a:bodyPr>
-          <a:lstStyle/>
-          <a:p>
-            <a:r>
-              <a:rPr sz="1700" b="1">
-                <a:solidFill>
-                  <a:srgbClr val="12273A"/>
-                </a:solidFill>
-                <a:latin typeface="Aptos"/>
-              </a:rPr>
-              <a:t>Quy đổi tốc độ mạng</a:t>
-            </a:r>
-          </a:p>
-        </p:txBody>
-      </p:sp>
-      <p:sp>
-        <p:nvSpPr>
-          <p:cNvPr id="8" name="TextBox 7"/>
-          <p:cNvSpPr txBox="1"/>
-          <p:nvPr/>
-        </p:nvSpPr>
-        <p:spPr>
-          <a:xfrm>
-            <a:off x="932688" y="2011680"/>
-            <a:ext cx="4754879" cy="1097280"/>
-          </a:xfrm>
-          <a:prstGeom prst="rect">
-            <a:avLst/>
-          </a:prstGeom>
-          <a:noFill/>
-        </p:spPr>
-        <p:txBody>
-          <a:bodyPr wrap="square" lIns="54864" tIns="54864" rIns="54864" bIns="54864" anchor="t">
-            <a:spAutoFit/>
-          </a:bodyPr>
-          <a:lstStyle/>
-          <a:p>
-            <a:r>
-              <a:rPr sz="1500" b="0">
-                <a:solidFill>
-                  <a:srgbClr val="2F3E46"/>
-                </a:solidFill>
-                <a:latin typeface="Aptos"/>
-              </a:rPr>
-              <a:t>Mbps là megabit/giây; MB/s là megabyte/giây.
-MB/s ≈ Mbps ÷ 8 (bỏ qua overhead).</a:t>
-            </a:r>
-          </a:p>
-        </p:txBody>
-      </p:sp>
-      <p:sp>
-        <p:nvSpPr>
-          <p:cNvPr id="9" name="Rounded Rectangle 8"/>
-          <p:cNvSpPr/>
-          <p:nvPr/>
-        </p:nvSpPr>
-        <p:spPr>
-          <a:xfrm>
-            <a:off x="6217920" y="1417320"/>
-            <a:ext cx="5120640" cy="1828800"/>
-          </a:xfrm>
-          <a:prstGeom prst="roundRect">
-            <a:avLst/>
-          </a:prstGeom>
-          <a:solidFill>
-            <a:srgbClr val="FFFFFF"/>
-          </a:solidFill>
-          <a:ln>
-            <a:solidFill>
-              <a:srgbClr val="E0E8EC"/>
-            </a:solidFill>
-          </a:ln>
-        </p:spPr>
-        <p:style>
-          <a:lnRef idx="1">
-            <a:schemeClr val="accent1"/>
-          </a:lnRef>
-          <a:fillRef idx="3">
-            <a:schemeClr val="accent1"/>
-          </a:fillRef>
-          <a:effectRef idx="2">
-            <a:schemeClr val="accent1"/>
-          </a:effectRef>
-          <a:fontRef idx="minor">
-            <a:schemeClr val="lt1"/>
-          </a:fontRef>
-        </p:style>
-        <p:txBody>
-          <a:bodyPr rtlCol="0" anchor="ctr"/>
-          <a:lstStyle/>
-          <a:p>
-            <a:pPr algn="ctr"/>
-            <a:endParaRPr/>
-          </a:p>
-        </p:txBody>
-      </p:sp>
-      <p:sp>
-        <p:nvSpPr>
-          <p:cNvPr id="10" name="Rectangle 9"/>
-          <p:cNvSpPr/>
-          <p:nvPr/>
-        </p:nvSpPr>
-        <p:spPr>
-          <a:xfrm>
-            <a:off x="6217920" y="1417320"/>
-            <a:ext cx="73152" cy="1828800"/>
-          </a:xfrm>
-          <a:prstGeom prst="rect">
-            <a:avLst/>
-          </a:prstGeom>
-          <a:solidFill>
-            <a:srgbClr val="3498DB"/>
-          </a:solidFill>
-          <a:ln>
-            <a:noFill/>
-          </a:ln>
-        </p:spPr>
-        <p:style>
-          <a:lnRef idx="1">
-            <a:schemeClr val="accent1"/>
-          </a:lnRef>
-          <a:fillRef idx="3">
-            <a:schemeClr val="accent1"/>
-          </a:fillRef>
-          <a:effectRef idx="2">
-            <a:schemeClr val="accent1"/>
-          </a:effectRef>
-          <a:fontRef idx="minor">
-            <a:schemeClr val="lt1"/>
-          </a:fontRef>
-        </p:style>
-        <p:txBody>
-          <a:bodyPr rtlCol="0" anchor="ctr"/>
-          <a:lstStyle/>
-          <a:p>
-            <a:pPr algn="ctr"/>
-            <a:endParaRPr/>
-          </a:p>
-        </p:txBody>
-      </p:sp>
-      <p:sp>
-        <p:nvSpPr>
-          <p:cNvPr id="11" name="TextBox 10"/>
-          <p:cNvSpPr txBox="1"/>
-          <p:nvPr/>
-        </p:nvSpPr>
-        <p:spPr>
-          <a:xfrm>
-            <a:off x="6419088" y="1581912"/>
-            <a:ext cx="4754879" cy="320040"/>
-          </a:xfrm>
-          <a:prstGeom prst="rect">
-            <a:avLst/>
-          </a:prstGeom>
-          <a:noFill/>
-        </p:spPr>
-        <p:txBody>
-          <a:bodyPr wrap="square" lIns="54864" tIns="54864" rIns="54864" bIns="54864" anchor="t">
-            <a:spAutoFit/>
-          </a:bodyPr>
-          <a:lstStyle/>
-          <a:p>
-            <a:r>
-              <a:rPr sz="1700" b="1">
-                <a:solidFill>
-                  <a:srgbClr val="12273A"/>
-                </a:solidFill>
-                <a:latin typeface="Aptos"/>
-              </a:rPr>
-              <a:t>Ví dụ tải log 500 MB</a:t>
-            </a:r>
-          </a:p>
-        </p:txBody>
-      </p:sp>
-      <p:sp>
-        <p:nvSpPr>
-          <p:cNvPr id="12" name="TextBox 11"/>
-          <p:cNvSpPr txBox="1"/>
-          <p:nvPr/>
-        </p:nvSpPr>
-        <p:spPr>
-          <a:xfrm>
-            <a:off x="6419088" y="2011680"/>
-            <a:ext cx="4754879" cy="1097280"/>
-          </a:xfrm>
-          <a:prstGeom prst="rect">
-            <a:avLst/>
-          </a:prstGeom>
-          <a:noFill/>
-        </p:spPr>
-        <p:txBody>
-          <a:bodyPr wrap="square" lIns="54864" tIns="54864" rIns="54864" bIns="54864" anchor="t">
-            <a:spAutoFit/>
-          </a:bodyPr>
-          <a:lstStyle/>
-          <a:p>
-            <a:r>
-              <a:rPr sz="1500" b="0">
-                <a:solidFill>
-                  <a:srgbClr val="2F3E46"/>
-                </a:solidFill>
-                <a:latin typeface="Aptos"/>
-              </a:rPr>
-              <a:t>Mạng 40 Mbps → khoảng 5 MB/s.
-Thời gian lý tưởng ≈ 500 ÷ 5 = 100 giây.</a:t>
-            </a:r>
-          </a:p>
-        </p:txBody>
-      </p:sp>
-      <p:sp>
-        <p:nvSpPr>
-          <p:cNvPr id="13" name="TextBox 12"/>
-          <p:cNvSpPr txBox="1"/>
-          <p:nvPr/>
-        </p:nvSpPr>
-        <p:spPr>
-          <a:xfrm>
-            <a:off x="822960" y="3749039"/>
-            <a:ext cx="2743200" cy="320040"/>
-          </a:xfrm>
-          <a:prstGeom prst="rect">
-            <a:avLst/>
-          </a:prstGeom>
-          <a:noFill/>
-        </p:spPr>
-        <p:txBody>
-          <a:bodyPr wrap="square" lIns="54864" tIns="54864" rIns="54864" bIns="54864" anchor="t">
-            <a:spAutoFit/>
-          </a:bodyPr>
-          <a:lstStyle/>
-          <a:p>
-            <a:r>
-              <a:rPr sz="1600" b="1">
-                <a:solidFill>
-                  <a:srgbClr val="12273A"/>
-                </a:solidFill>
-                <a:latin typeface="Aptos"/>
-              </a:rPr>
-              <a:t>Công thức tổng quát</a:t>
-            </a:r>
-          </a:p>
-        </p:txBody>
-      </p:sp>
-      <p:sp>
-        <p:nvSpPr>
-          <p:cNvPr id="14" name="Rounded Rectangle 13"/>
-          <p:cNvSpPr/>
-          <p:nvPr/>
-        </p:nvSpPr>
-        <p:spPr>
-          <a:xfrm>
-            <a:off x="777240" y="4206240"/>
-            <a:ext cx="7498079" cy="777240"/>
-          </a:xfrm>
-          <a:prstGeom prst="roundRect">
-            <a:avLst/>
-          </a:prstGeom>
-          <a:solidFill>
-            <a:srgbClr val="12273A"/>
-          </a:solidFill>
-          <a:ln>
-            <a:noFill/>
-          </a:ln>
-        </p:spPr>
-        <p:style>
-          <a:lnRef idx="1">
-            <a:schemeClr val="accent1"/>
-          </a:lnRef>
-          <a:fillRef idx="3">
-            <a:schemeClr val="accent1"/>
-          </a:fillRef>
-          <a:effectRef idx="2">
-            <a:schemeClr val="accent1"/>
-          </a:effectRef>
-          <a:fontRef idx="minor">
-            <a:schemeClr val="lt1"/>
-          </a:fontRef>
-        </p:style>
-        <p:txBody>
-          <a:bodyPr rtlCol="0" anchor="ctr"/>
-          <a:lstStyle/>
-          <a:p>
-            <a:pPr algn="ctr"/>
-            <a:endParaRPr/>
-          </a:p>
-        </p:txBody>
-      </p:sp>
-      <p:sp>
-        <p:nvSpPr>
-          <p:cNvPr id="15" name="TextBox 14"/>
-          <p:cNvSpPr txBox="1"/>
-          <p:nvPr/>
-        </p:nvSpPr>
-        <p:spPr>
-          <a:xfrm>
-            <a:off x="941832" y="4315968"/>
-            <a:ext cx="7168895" cy="557784"/>
-          </a:xfrm>
-          <a:prstGeom prst="rect">
-            <a:avLst/>
-          </a:prstGeom>
-          <a:noFill/>
-        </p:spPr>
-        <p:txBody>
-          <a:bodyPr wrap="square" lIns="0" tIns="0" rIns="0" bIns="0">
-            <a:spAutoFit/>
-          </a:bodyPr>
-          <a:lstStyle/>
-          <a:p>
-            <a:pPr>
-              <a:spcAft>
-                <a:spcPts val="300"/>
-              </a:spcAft>
-              <a:defRPr sz="1600">
-                <a:solidFill>
-                  <a:srgbClr val="BFEBD2"/>
-                </a:solidFill>
-                <a:latin typeface="Consolas"/>
-              </a:defRPr>
-            </a:pPr>
-            <a:r>
-              <a:t>Thoi_gian_giay ≈ Dung_luong_MB / (Toc_do_Mbps / 8)</a:t>
-            </a:r>
-          </a:p>
-        </p:txBody>
-      </p:sp>
-      <p:sp>
-        <p:nvSpPr>
-          <p:cNvPr id="16" name="TextBox 15"/>
-          <p:cNvSpPr txBox="1"/>
-          <p:nvPr/>
-        </p:nvSpPr>
-        <p:spPr>
-          <a:xfrm>
-            <a:off x="822960" y="5303520"/>
-            <a:ext cx="10332720" cy="411480"/>
-          </a:xfrm>
-          <a:prstGeom prst="rect">
-            <a:avLst/>
-          </a:prstGeom>
-          <a:noFill/>
-        </p:spPr>
-        <p:txBody>
-          <a:bodyPr wrap="square" lIns="54864" tIns="54864" rIns="54864" bIns="54864" anchor="t">
-            <a:spAutoFit/>
-          </a:bodyPr>
-          <a:lstStyle/>
-          <a:p>
-            <a:r>
-              <a:rPr sz="1400" b="0">
-                <a:solidFill>
-                  <a:srgbClr val="66757E"/>
-                </a:solidFill>
-                <a:latin typeface="Aptos"/>
-              </a:rPr>
-              <a:t>Thực tế có thể lâu hơn do overhead mạng, độ trễ, ổ đĩa và tải máy chủ.</a:t>
-            </a:r>
-          </a:p>
-        </p:txBody>
-      </p:sp>
-      <p:sp>
-        <p:nvSpPr>
-          <p:cNvPr id="17" name="TextBox 16"/>
-          <p:cNvSpPr txBox="1"/>
-          <p:nvPr/>
-        </p:nvSpPr>
-        <p:spPr>
-          <a:xfrm>
-            <a:off x="594360" y="6510528"/>
-            <a:ext cx="8686800" cy="164592"/>
-          </a:xfrm>
-          <a:prstGeom prst="rect">
-            <a:avLst/>
-          </a:prstGeom>
-          <a:noFill/>
-        </p:spPr>
-        <p:txBody>
-          <a:bodyPr wrap="square" lIns="54864" tIns="54864" rIns="54864" bIns="54864" anchor="t">
-            <a:spAutoFit/>
-          </a:bodyPr>
-          <a:lstStyle/>
-          <a:p>
-            <a:r>
-              <a:rPr sz="800" b="0">
-                <a:solidFill>
-                  <a:srgbClr val="66757E"/>
-                </a:solidFill>
-                <a:latin typeface="Aptos"/>
-              </a:rPr>
-              <a:t>GREENTECH  |  MINI PROJECT HẠ TẦNG &amp; NHẬT KÝ KỸ THUẬT</a:t>
-            </a:r>
-          </a:p>
-        </p:txBody>
-      </p:sp>
-      <p:sp>
-        <p:nvSpPr>
-          <p:cNvPr id="18" name="TextBox 17"/>
-          <p:cNvSpPr txBox="1"/>
-          <p:nvPr/>
-        </p:nvSpPr>
-        <p:spPr>
-          <a:xfrm>
-            <a:off x="11155680" y="6473952"/>
-            <a:ext cx="411480" cy="228600"/>
-          </a:xfrm>
-          <a:prstGeom prst="rect">
-            <a:avLst/>
-          </a:prstGeom>
-          <a:noFill/>
-        </p:spPr>
-        <p:txBody>
-          <a:bodyPr wrap="square" lIns="54864" tIns="54864" rIns="54864" bIns="54864" anchor="t">
-            <a:spAutoFit/>
-          </a:bodyPr>
-          <a:lstStyle/>
-          <a:p>
-            <a:pPr algn="r"/>
-            <a:r>
-              <a:rPr sz="1000" b="1">
-                <a:solidFill>
-                  <a:srgbClr val="27AE60"/>
-                </a:solidFill>
-                <a:latin typeface="Aptos"/>
-              </a:rPr>
-              <a:t>10</a:t>
-            </a:r>
-          </a:p>
-        </p:txBody>
-      </p:sp>
-    </p:spTree>
-  </p:cSld>
-  <p:clrMapOvr>
-    <a:masterClrMapping/>
-  </p:clrMapOvr>
-  <mc:AlternateContent xmlns:mc="http://schemas.openxmlformats.org/markup-compatibility/2006">
-    <mc:Choice xmlns:p14="http://schemas.microsoft.com/office/powerpoint/2010/main" Requires="p14">
-      <p:transition spd="slow" p14:dur="3000">
-        <p14:shred/>
-      </p:transition>
-    </mc:Choice>
-    <mc:Fallback>
+    <mc:Fallback xmlns="">
       <p:transition spd="slow">
         <p:fade/>
       </p:transition>
@@ -8865,6 +9201,702 @@
                 </a:solidFill>
                 <a:latin typeface="Aptos"/>
               </a:rPr>
+              <a:t>9. Tính toán dung lượng &amp; thời gian tải</a:t>
+            </a:r>
+          </a:p>
+        </p:txBody>
+      </p:sp>
+      <p:sp>
+        <p:nvSpPr>
+          <p:cNvPr id="3" name="Rectangle 2"/>
+          <p:cNvSpPr/>
+          <p:nvPr/>
+        </p:nvSpPr>
+        <p:spPr>
+          <a:xfrm>
+            <a:off x="612648" y="960120"/>
+            <a:ext cx="822960" cy="54864"/>
+          </a:xfrm>
+          <a:prstGeom prst="rect">
+            <a:avLst/>
+          </a:prstGeom>
+          <a:solidFill>
+            <a:srgbClr val="27AE60"/>
+          </a:solidFill>
+          <a:ln>
+            <a:noFill/>
+          </a:ln>
+        </p:spPr>
+        <p:style>
+          <a:lnRef idx="1">
+            <a:schemeClr val="accent1"/>
+          </a:lnRef>
+          <a:fillRef idx="3">
+            <a:schemeClr val="accent1"/>
+          </a:fillRef>
+          <a:effectRef idx="2">
+            <a:schemeClr val="accent1"/>
+          </a:effectRef>
+          <a:fontRef idx="minor">
+            <a:schemeClr val="lt1"/>
+          </a:fontRef>
+        </p:style>
+        <p:txBody>
+          <a:bodyPr rtlCol="0" anchor="ctr"/>
+          <a:lstStyle/>
+          <a:p>
+            <a:pPr algn="ctr"/>
+            <a:endParaRPr/>
+          </a:p>
+        </p:txBody>
+      </p:sp>
+      <p:sp>
+        <p:nvSpPr>
+          <p:cNvPr id="4" name="TextBox 3"/>
+          <p:cNvSpPr txBox="1"/>
+          <p:nvPr/>
+        </p:nvSpPr>
+        <p:spPr>
+          <a:xfrm>
+            <a:off x="9601200" y="411480"/>
+            <a:ext cx="1920240" cy="274320"/>
+          </a:xfrm>
+          <a:prstGeom prst="rect">
+            <a:avLst/>
+          </a:prstGeom>
+          <a:noFill/>
+        </p:spPr>
+        <p:txBody>
+          <a:bodyPr wrap="square" lIns="54864" tIns="54864" rIns="54864" bIns="54864" anchor="t">
+            <a:spAutoFit/>
+          </a:bodyPr>
+          <a:lstStyle/>
+          <a:p>
+            <a:pPr algn="r"/>
+            <a:r>
+              <a:rPr sz="1000" b="1">
+                <a:solidFill>
+                  <a:srgbClr val="27AE60"/>
+                </a:solidFill>
+                <a:latin typeface="Aptos"/>
+              </a:rPr>
+              <a:t>BẪY DỮ LIỆU</a:t>
+            </a:r>
+          </a:p>
+        </p:txBody>
+      </p:sp>
+      <p:sp>
+        <p:nvSpPr>
+          <p:cNvPr id="5" name="Rounded Rectangle 4"/>
+          <p:cNvSpPr/>
+          <p:nvPr/>
+        </p:nvSpPr>
+        <p:spPr>
+          <a:xfrm>
+            <a:off x="731520" y="1417320"/>
+            <a:ext cx="5120640" cy="1828800"/>
+          </a:xfrm>
+          <a:prstGeom prst="roundRect">
+            <a:avLst/>
+          </a:prstGeom>
+          <a:solidFill>
+            <a:srgbClr val="FFFFFF"/>
+          </a:solidFill>
+          <a:ln>
+            <a:solidFill>
+              <a:srgbClr val="E0E8EC"/>
+            </a:solidFill>
+          </a:ln>
+        </p:spPr>
+        <p:style>
+          <a:lnRef idx="1">
+            <a:schemeClr val="accent1"/>
+          </a:lnRef>
+          <a:fillRef idx="3">
+            <a:schemeClr val="accent1"/>
+          </a:fillRef>
+          <a:effectRef idx="2">
+            <a:schemeClr val="accent1"/>
+          </a:effectRef>
+          <a:fontRef idx="minor">
+            <a:schemeClr val="lt1"/>
+          </a:fontRef>
+        </p:style>
+        <p:txBody>
+          <a:bodyPr rtlCol="0" anchor="ctr"/>
+          <a:lstStyle/>
+          <a:p>
+            <a:pPr algn="ctr"/>
+            <a:endParaRPr/>
+          </a:p>
+        </p:txBody>
+      </p:sp>
+      <p:sp>
+        <p:nvSpPr>
+          <p:cNvPr id="6" name="Rectangle 5"/>
+          <p:cNvSpPr/>
+          <p:nvPr/>
+        </p:nvSpPr>
+        <p:spPr>
+          <a:xfrm>
+            <a:off x="731520" y="1417320"/>
+            <a:ext cx="73152" cy="1828800"/>
+          </a:xfrm>
+          <a:prstGeom prst="rect">
+            <a:avLst/>
+          </a:prstGeom>
+          <a:solidFill>
+            <a:srgbClr val="27AE60"/>
+          </a:solidFill>
+          <a:ln>
+            <a:noFill/>
+          </a:ln>
+        </p:spPr>
+        <p:style>
+          <a:lnRef idx="1">
+            <a:schemeClr val="accent1"/>
+          </a:lnRef>
+          <a:fillRef idx="3">
+            <a:schemeClr val="accent1"/>
+          </a:fillRef>
+          <a:effectRef idx="2">
+            <a:schemeClr val="accent1"/>
+          </a:effectRef>
+          <a:fontRef idx="minor">
+            <a:schemeClr val="lt1"/>
+          </a:fontRef>
+        </p:style>
+        <p:txBody>
+          <a:bodyPr rtlCol="0" anchor="ctr"/>
+          <a:lstStyle/>
+          <a:p>
+            <a:pPr algn="ctr"/>
+            <a:endParaRPr/>
+          </a:p>
+        </p:txBody>
+      </p:sp>
+      <p:sp>
+        <p:nvSpPr>
+          <p:cNvPr id="7" name="TextBox 6"/>
+          <p:cNvSpPr txBox="1"/>
+          <p:nvPr/>
+        </p:nvSpPr>
+        <p:spPr>
+          <a:xfrm>
+            <a:off x="932688" y="1581912"/>
+            <a:ext cx="4754879" cy="320040"/>
+          </a:xfrm>
+          <a:prstGeom prst="rect">
+            <a:avLst/>
+          </a:prstGeom>
+          <a:noFill/>
+        </p:spPr>
+        <p:txBody>
+          <a:bodyPr wrap="square" lIns="54864" tIns="54864" rIns="54864" bIns="54864" anchor="t">
+            <a:spAutoFit/>
+          </a:bodyPr>
+          <a:lstStyle/>
+          <a:p>
+            <a:r>
+              <a:rPr sz="1700" b="1">
+                <a:solidFill>
+                  <a:srgbClr val="12273A"/>
+                </a:solidFill>
+                <a:latin typeface="Aptos"/>
+              </a:rPr>
+              <a:t>Quy đổi tốc độ mạng</a:t>
+            </a:r>
+          </a:p>
+        </p:txBody>
+      </p:sp>
+      <p:sp>
+        <p:nvSpPr>
+          <p:cNvPr id="8" name="TextBox 7"/>
+          <p:cNvSpPr txBox="1"/>
+          <p:nvPr/>
+        </p:nvSpPr>
+        <p:spPr>
+          <a:xfrm>
+            <a:off x="932688" y="2011680"/>
+            <a:ext cx="4754879" cy="1097280"/>
+          </a:xfrm>
+          <a:prstGeom prst="rect">
+            <a:avLst/>
+          </a:prstGeom>
+          <a:noFill/>
+        </p:spPr>
+        <p:txBody>
+          <a:bodyPr wrap="square" lIns="54864" tIns="54864" rIns="54864" bIns="54864" anchor="t">
+            <a:spAutoFit/>
+          </a:bodyPr>
+          <a:lstStyle/>
+          <a:p>
+            <a:r>
+              <a:rPr sz="1500" b="0">
+                <a:solidFill>
+                  <a:srgbClr val="2F3E46"/>
+                </a:solidFill>
+                <a:latin typeface="Aptos"/>
+              </a:rPr>
+              <a:t>Mbps là megabit/giây; MB/s là megabyte/giây.
+MB/s ≈ Mbps ÷ 8 (bỏ qua overhead).</a:t>
+            </a:r>
+          </a:p>
+        </p:txBody>
+      </p:sp>
+      <p:sp>
+        <p:nvSpPr>
+          <p:cNvPr id="9" name="Rounded Rectangle 8"/>
+          <p:cNvSpPr/>
+          <p:nvPr/>
+        </p:nvSpPr>
+        <p:spPr>
+          <a:xfrm>
+            <a:off x="6217920" y="1417320"/>
+            <a:ext cx="5120640" cy="1828800"/>
+          </a:xfrm>
+          <a:prstGeom prst="roundRect">
+            <a:avLst/>
+          </a:prstGeom>
+          <a:solidFill>
+            <a:srgbClr val="FFFFFF"/>
+          </a:solidFill>
+          <a:ln>
+            <a:solidFill>
+              <a:srgbClr val="E0E8EC"/>
+            </a:solidFill>
+          </a:ln>
+        </p:spPr>
+        <p:style>
+          <a:lnRef idx="1">
+            <a:schemeClr val="accent1"/>
+          </a:lnRef>
+          <a:fillRef idx="3">
+            <a:schemeClr val="accent1"/>
+          </a:fillRef>
+          <a:effectRef idx="2">
+            <a:schemeClr val="accent1"/>
+          </a:effectRef>
+          <a:fontRef idx="minor">
+            <a:schemeClr val="lt1"/>
+          </a:fontRef>
+        </p:style>
+        <p:txBody>
+          <a:bodyPr rtlCol="0" anchor="ctr"/>
+          <a:lstStyle/>
+          <a:p>
+            <a:pPr algn="ctr"/>
+            <a:endParaRPr/>
+          </a:p>
+        </p:txBody>
+      </p:sp>
+      <p:sp>
+        <p:nvSpPr>
+          <p:cNvPr id="10" name="Rectangle 9"/>
+          <p:cNvSpPr/>
+          <p:nvPr/>
+        </p:nvSpPr>
+        <p:spPr>
+          <a:xfrm>
+            <a:off x="6217920" y="1417320"/>
+            <a:ext cx="73152" cy="1828800"/>
+          </a:xfrm>
+          <a:prstGeom prst="rect">
+            <a:avLst/>
+          </a:prstGeom>
+          <a:solidFill>
+            <a:srgbClr val="3498DB"/>
+          </a:solidFill>
+          <a:ln>
+            <a:noFill/>
+          </a:ln>
+        </p:spPr>
+        <p:style>
+          <a:lnRef idx="1">
+            <a:schemeClr val="accent1"/>
+          </a:lnRef>
+          <a:fillRef idx="3">
+            <a:schemeClr val="accent1"/>
+          </a:fillRef>
+          <a:effectRef idx="2">
+            <a:schemeClr val="accent1"/>
+          </a:effectRef>
+          <a:fontRef idx="minor">
+            <a:schemeClr val="lt1"/>
+          </a:fontRef>
+        </p:style>
+        <p:txBody>
+          <a:bodyPr rtlCol="0" anchor="ctr"/>
+          <a:lstStyle/>
+          <a:p>
+            <a:pPr algn="ctr"/>
+            <a:endParaRPr/>
+          </a:p>
+        </p:txBody>
+      </p:sp>
+      <p:sp>
+        <p:nvSpPr>
+          <p:cNvPr id="11" name="TextBox 10"/>
+          <p:cNvSpPr txBox="1"/>
+          <p:nvPr/>
+        </p:nvSpPr>
+        <p:spPr>
+          <a:xfrm>
+            <a:off x="6419088" y="1581912"/>
+            <a:ext cx="4754879" cy="320040"/>
+          </a:xfrm>
+          <a:prstGeom prst="rect">
+            <a:avLst/>
+          </a:prstGeom>
+          <a:noFill/>
+        </p:spPr>
+        <p:txBody>
+          <a:bodyPr wrap="square" lIns="54864" tIns="54864" rIns="54864" bIns="54864" anchor="t">
+            <a:spAutoFit/>
+          </a:bodyPr>
+          <a:lstStyle/>
+          <a:p>
+            <a:r>
+              <a:rPr sz="1700" b="1">
+                <a:solidFill>
+                  <a:srgbClr val="12273A"/>
+                </a:solidFill>
+                <a:latin typeface="Aptos"/>
+              </a:rPr>
+              <a:t>Ví dụ tải log 500 MB</a:t>
+            </a:r>
+          </a:p>
+        </p:txBody>
+      </p:sp>
+      <p:sp>
+        <p:nvSpPr>
+          <p:cNvPr id="12" name="TextBox 11"/>
+          <p:cNvSpPr txBox="1"/>
+          <p:nvPr/>
+        </p:nvSpPr>
+        <p:spPr>
+          <a:xfrm>
+            <a:off x="6419088" y="2011680"/>
+            <a:ext cx="4754879" cy="1097280"/>
+          </a:xfrm>
+          <a:prstGeom prst="rect">
+            <a:avLst/>
+          </a:prstGeom>
+          <a:noFill/>
+        </p:spPr>
+        <p:txBody>
+          <a:bodyPr wrap="square" lIns="54864" tIns="54864" rIns="54864" bIns="54864" anchor="t">
+            <a:spAutoFit/>
+          </a:bodyPr>
+          <a:lstStyle/>
+          <a:p>
+            <a:r>
+              <a:rPr sz="1500" b="0">
+                <a:solidFill>
+                  <a:srgbClr val="2F3E46"/>
+                </a:solidFill>
+                <a:latin typeface="Aptos"/>
+              </a:rPr>
+              <a:t>Mạng 40 Mbps → khoảng 5 MB/s.
+Thời gian lý tưởng ≈ 500 ÷ 5 = 100 giây.</a:t>
+            </a:r>
+          </a:p>
+        </p:txBody>
+      </p:sp>
+      <p:sp>
+        <p:nvSpPr>
+          <p:cNvPr id="13" name="TextBox 12"/>
+          <p:cNvSpPr txBox="1"/>
+          <p:nvPr/>
+        </p:nvSpPr>
+        <p:spPr>
+          <a:xfrm>
+            <a:off x="822960" y="3749039"/>
+            <a:ext cx="2743200" cy="320040"/>
+          </a:xfrm>
+          <a:prstGeom prst="rect">
+            <a:avLst/>
+          </a:prstGeom>
+          <a:noFill/>
+        </p:spPr>
+        <p:txBody>
+          <a:bodyPr wrap="square" lIns="54864" tIns="54864" rIns="54864" bIns="54864" anchor="t">
+            <a:spAutoFit/>
+          </a:bodyPr>
+          <a:lstStyle/>
+          <a:p>
+            <a:r>
+              <a:rPr sz="1600" b="1">
+                <a:solidFill>
+                  <a:srgbClr val="12273A"/>
+                </a:solidFill>
+                <a:latin typeface="Aptos"/>
+              </a:rPr>
+              <a:t>Công thức tổng quát</a:t>
+            </a:r>
+          </a:p>
+        </p:txBody>
+      </p:sp>
+      <p:sp>
+        <p:nvSpPr>
+          <p:cNvPr id="14" name="Rounded Rectangle 13"/>
+          <p:cNvSpPr/>
+          <p:nvPr/>
+        </p:nvSpPr>
+        <p:spPr>
+          <a:xfrm>
+            <a:off x="777240" y="4206240"/>
+            <a:ext cx="7498079" cy="777240"/>
+          </a:xfrm>
+          <a:prstGeom prst="roundRect">
+            <a:avLst/>
+          </a:prstGeom>
+          <a:solidFill>
+            <a:srgbClr val="12273A"/>
+          </a:solidFill>
+          <a:ln>
+            <a:noFill/>
+          </a:ln>
+        </p:spPr>
+        <p:style>
+          <a:lnRef idx="1">
+            <a:schemeClr val="accent1"/>
+          </a:lnRef>
+          <a:fillRef idx="3">
+            <a:schemeClr val="accent1"/>
+          </a:fillRef>
+          <a:effectRef idx="2">
+            <a:schemeClr val="accent1"/>
+          </a:effectRef>
+          <a:fontRef idx="minor">
+            <a:schemeClr val="lt1"/>
+          </a:fontRef>
+        </p:style>
+        <p:txBody>
+          <a:bodyPr rtlCol="0" anchor="ctr"/>
+          <a:lstStyle/>
+          <a:p>
+            <a:pPr algn="ctr"/>
+            <a:endParaRPr/>
+          </a:p>
+        </p:txBody>
+      </p:sp>
+      <p:sp>
+        <p:nvSpPr>
+          <p:cNvPr id="15" name="TextBox 14"/>
+          <p:cNvSpPr txBox="1"/>
+          <p:nvPr/>
+        </p:nvSpPr>
+        <p:spPr>
+          <a:xfrm>
+            <a:off x="941832" y="4315968"/>
+            <a:ext cx="7168895" cy="557784"/>
+          </a:xfrm>
+          <a:prstGeom prst="rect">
+            <a:avLst/>
+          </a:prstGeom>
+          <a:noFill/>
+        </p:spPr>
+        <p:txBody>
+          <a:bodyPr wrap="square" lIns="0" tIns="0" rIns="0" bIns="0">
+            <a:spAutoFit/>
+          </a:bodyPr>
+          <a:lstStyle/>
+          <a:p>
+            <a:pPr>
+              <a:spcAft>
+                <a:spcPts val="300"/>
+              </a:spcAft>
+              <a:defRPr sz="1600">
+                <a:solidFill>
+                  <a:srgbClr val="BFEBD2"/>
+                </a:solidFill>
+                <a:latin typeface="Consolas"/>
+              </a:defRPr>
+            </a:pPr>
+            <a:r>
+              <a:t>Thoi_gian_giay ≈ Dung_luong_MB / (Toc_do_Mbps / 8)</a:t>
+            </a:r>
+          </a:p>
+        </p:txBody>
+      </p:sp>
+      <p:sp>
+        <p:nvSpPr>
+          <p:cNvPr id="16" name="TextBox 15"/>
+          <p:cNvSpPr txBox="1"/>
+          <p:nvPr/>
+        </p:nvSpPr>
+        <p:spPr>
+          <a:xfrm>
+            <a:off x="822960" y="5303520"/>
+            <a:ext cx="10332720" cy="411480"/>
+          </a:xfrm>
+          <a:prstGeom prst="rect">
+            <a:avLst/>
+          </a:prstGeom>
+          <a:noFill/>
+        </p:spPr>
+        <p:txBody>
+          <a:bodyPr wrap="square" lIns="54864" tIns="54864" rIns="54864" bIns="54864" anchor="t">
+            <a:spAutoFit/>
+          </a:bodyPr>
+          <a:lstStyle/>
+          <a:p>
+            <a:r>
+              <a:rPr sz="1400" b="0">
+                <a:solidFill>
+                  <a:srgbClr val="66757E"/>
+                </a:solidFill>
+                <a:latin typeface="Aptos"/>
+              </a:rPr>
+              <a:t>Thực tế có thể lâu hơn do overhead mạng, độ trễ, ổ đĩa và tải máy chủ.</a:t>
+            </a:r>
+          </a:p>
+        </p:txBody>
+      </p:sp>
+      <p:sp>
+        <p:nvSpPr>
+          <p:cNvPr id="17" name="TextBox 16"/>
+          <p:cNvSpPr txBox="1"/>
+          <p:nvPr/>
+        </p:nvSpPr>
+        <p:spPr>
+          <a:xfrm>
+            <a:off x="594360" y="6510528"/>
+            <a:ext cx="8686800" cy="164592"/>
+          </a:xfrm>
+          <a:prstGeom prst="rect">
+            <a:avLst/>
+          </a:prstGeom>
+          <a:noFill/>
+        </p:spPr>
+        <p:txBody>
+          <a:bodyPr wrap="square" lIns="54864" tIns="54864" rIns="54864" bIns="54864" anchor="t">
+            <a:spAutoFit/>
+          </a:bodyPr>
+          <a:lstStyle/>
+          <a:p>
+            <a:r>
+              <a:rPr sz="800" b="0">
+                <a:solidFill>
+                  <a:srgbClr val="66757E"/>
+                </a:solidFill>
+                <a:latin typeface="Aptos"/>
+              </a:rPr>
+              <a:t>GREENTECH  |  MINI PROJECT HẠ TẦNG &amp; NHẬT KÝ KỸ THUẬT</a:t>
+            </a:r>
+          </a:p>
+        </p:txBody>
+      </p:sp>
+      <p:sp>
+        <p:nvSpPr>
+          <p:cNvPr id="18" name="TextBox 17"/>
+          <p:cNvSpPr txBox="1"/>
+          <p:nvPr/>
+        </p:nvSpPr>
+        <p:spPr>
+          <a:xfrm>
+            <a:off x="11155680" y="6473952"/>
+            <a:ext cx="411480" cy="228600"/>
+          </a:xfrm>
+          <a:prstGeom prst="rect">
+            <a:avLst/>
+          </a:prstGeom>
+          <a:noFill/>
+        </p:spPr>
+        <p:txBody>
+          <a:bodyPr wrap="square" lIns="54864" tIns="54864" rIns="54864" bIns="54864" anchor="t">
+            <a:spAutoFit/>
+          </a:bodyPr>
+          <a:lstStyle/>
+          <a:p>
+            <a:pPr algn="r"/>
+            <a:r>
+              <a:rPr sz="1000" b="1">
+                <a:solidFill>
+                  <a:srgbClr val="27AE60"/>
+                </a:solidFill>
+                <a:latin typeface="Aptos"/>
+              </a:rPr>
+              <a:t>10</a:t>
+            </a:r>
+          </a:p>
+        </p:txBody>
+      </p:sp>
+    </p:spTree>
+  </p:cSld>
+  <p:clrMapOvr>
+    <a:masterClrMapping/>
+  </p:clrMapOvr>
+  <mc:AlternateContent xmlns:mc="http://schemas.openxmlformats.org/markup-compatibility/2006" xmlns:p14="http://schemas.microsoft.com/office/powerpoint/2010/main">
+    <mc:Choice Requires="p14">
+      <p:transition spd="slow" p14:dur="3000">
+        <p14:shred/>
+      </p:transition>
+    </mc:Choice>
+    <mc:Fallback xmlns="">
+      <p:transition spd="slow">
+        <p:fade/>
+      </p:transition>
+    </mc:Fallback>
+  </mc:AlternateContent>
+</p:sld>
+</file>
+
+<file path=ppt/slides/slide18.xml><?xml version="1.0" encoding="utf-8"?>
+<p:sld xmlns:a="http://schemas.openxmlformats.org/drawingml/2006/main" xmlns:r="http://schemas.openxmlformats.org/officeDocument/2006/relationships" xmlns:p="http://schemas.openxmlformats.org/presentationml/2006/main">
+  <p:cSld>
+    <p:bg>
+      <p:bgPr>
+        <a:solidFill>
+          <a:srgbClr val="F5F8FA"/>
+        </a:solidFill>
+        <a:effectLst/>
+      </p:bgPr>
+    </p:bg>
+    <p:spTree>
+      <p:nvGrpSpPr>
+        <p:cNvPr id="1" name=""/>
+        <p:cNvGrpSpPr/>
+        <p:nvPr/>
+      </p:nvGrpSpPr>
+      <p:grpSpPr>
+        <a:xfrm>
+          <a:off x="0" y="0"/>
+          <a:ext cx="0" cy="0"/>
+          <a:chOff x="0" y="0"/>
+          <a:chExt cx="0" cy="0"/>
+        </a:xfrm>
+      </p:grpSpPr>
+      <p:sp>
+        <p:nvSpPr>
+          <p:cNvPr id="2" name="TextBox 1"/>
+          <p:cNvSpPr txBox="1"/>
+          <p:nvPr/>
+        </p:nvSpPr>
+        <p:spPr>
+          <a:xfrm>
+            <a:off x="594360" y="347472"/>
+            <a:ext cx="10972800" cy="502920"/>
+          </a:xfrm>
+          <a:prstGeom prst="rect">
+            <a:avLst/>
+          </a:prstGeom>
+          <a:noFill/>
+        </p:spPr>
+        <p:txBody>
+          <a:bodyPr wrap="square" lIns="54864" tIns="54864" rIns="54864" bIns="54864" anchor="t">
+            <a:spAutoFit/>
+          </a:bodyPr>
+          <a:lstStyle/>
+          <a:p>
+            <a:r>
+              <a:rPr sz="2700" b="1">
+                <a:solidFill>
+                  <a:srgbClr val="12273A"/>
+                </a:solidFill>
+                <a:latin typeface="Aptos"/>
+              </a:rPr>
               <a:t>10. Quy trình triển khai &amp; kiểm thử</a:t>
             </a:r>
           </a:p>
@@ -10126,7 +11158,7 @@
 </p:sld>
 </file>
 
-<file path=ppt/slides/slide18.xml><?xml version="1.0" encoding="utf-8"?>
+<file path=ppt/slides/slide19.xml><?xml version="1.0" encoding="utf-8"?>
 <p:sld xmlns:a="http://schemas.openxmlformats.org/drawingml/2006/main" xmlns:r="http://schemas.openxmlformats.org/officeDocument/2006/relationships" xmlns:p="http://schemas.openxmlformats.org/presentationml/2006/main">
   <p:cSld>
     <p:bg>
@@ -12170,933 +13202,13 @@
   <p:clrMapOvr>
     <a:masterClrMapping/>
   </p:clrMapOvr>
-  <mc:AlternateContent xmlns:mc="http://schemas.openxmlformats.org/markup-compatibility/2006">
-    <mc:Choice xmlns:p14="http://schemas.microsoft.com/office/powerpoint/2010/main" Requires="p14">
+  <mc:AlternateContent xmlns:mc="http://schemas.openxmlformats.org/markup-compatibility/2006" xmlns:p14="http://schemas.microsoft.com/office/powerpoint/2010/main">
+    <mc:Choice Requires="p14">
       <p:transition spd="slow" p14:dur="1250">
         <p14:flip dir="r"/>
       </p:transition>
     </mc:Choice>
-    <mc:Fallback>
-      <p:transition spd="slow">
-        <p:fade/>
-      </p:transition>
-    </mc:Fallback>
-  </mc:AlternateContent>
-</p:sld>
-</file>
-
-<file path=ppt/slides/slide19.xml><?xml version="1.0" encoding="utf-8"?>
-<p:sld xmlns:a="http://schemas.openxmlformats.org/drawingml/2006/main" xmlns:r="http://schemas.openxmlformats.org/officeDocument/2006/relationships" xmlns:p="http://schemas.openxmlformats.org/presentationml/2006/main">
-  <p:cSld>
-    <p:bg>
-      <p:bgPr>
-        <a:solidFill>
-          <a:srgbClr val="F5F8FA"/>
-        </a:solidFill>
-        <a:effectLst/>
-      </p:bgPr>
-    </p:bg>
-    <p:spTree>
-      <p:nvGrpSpPr>
-        <p:cNvPr id="1" name=""/>
-        <p:cNvGrpSpPr/>
-        <p:nvPr/>
-      </p:nvGrpSpPr>
-      <p:grpSpPr>
-        <a:xfrm>
-          <a:off x="0" y="0"/>
-          <a:ext cx="0" cy="0"/>
-          <a:chOff x="0" y="0"/>
-          <a:chExt cx="0" cy="0"/>
-        </a:xfrm>
-      </p:grpSpPr>
-      <p:sp>
-        <p:nvSpPr>
-          <p:cNvPr id="2" name="TextBox 1"/>
-          <p:cNvSpPr txBox="1"/>
-          <p:nvPr/>
-        </p:nvSpPr>
-        <p:spPr>
-          <a:xfrm>
-            <a:off x="594360" y="347472"/>
-            <a:ext cx="10972800" cy="502920"/>
-          </a:xfrm>
-          <a:prstGeom prst="rect">
-            <a:avLst/>
-          </a:prstGeom>
-          <a:noFill/>
-        </p:spPr>
-        <p:txBody>
-          <a:bodyPr wrap="square" lIns="54864" tIns="54864" rIns="54864" bIns="54864">
-            <a:spAutoFit/>
-          </a:bodyPr>
-          <a:lstStyle/>
-          <a:p>
-            <a:r>
-              <a:rPr sz="2700" b="1">
-                <a:solidFill>
-                  <a:srgbClr val="12273A"/>
-                </a:solidFill>
-                <a:latin typeface="Aptos"/>
-              </a:rPr>
-              <a:t>Công thức VLOOKUP áp dụng cho workbook</a:t>
-            </a:r>
-          </a:p>
-        </p:txBody>
-      </p:sp>
-      <p:sp>
-        <p:nvSpPr>
-          <p:cNvPr id="3" name="Rectangle 2"/>
-          <p:cNvSpPr/>
-          <p:nvPr/>
-        </p:nvSpPr>
-        <p:spPr>
-          <a:xfrm>
-            <a:off x="612648" y="960120"/>
-            <a:ext cx="822960" cy="54864"/>
-          </a:xfrm>
-          <a:prstGeom prst="rect">
-            <a:avLst/>
-          </a:prstGeom>
-          <a:solidFill>
-            <a:srgbClr val="27AE60"/>
-          </a:solidFill>
-          <a:ln>
-            <a:noFill/>
-          </a:ln>
-        </p:spPr>
-        <p:style>
-          <a:lnRef idx="1">
-            <a:schemeClr val="accent1"/>
-          </a:lnRef>
-          <a:fillRef idx="3">
-            <a:schemeClr val="accent1"/>
-          </a:fillRef>
-          <a:effectRef idx="2">
-            <a:schemeClr val="accent1"/>
-          </a:effectRef>
-          <a:fontRef idx="minor">
-            <a:schemeClr val="lt1"/>
-          </a:fontRef>
-        </p:style>
-        <p:txBody>
-          <a:bodyPr rtlCol="0" anchor="ctr"/>
-          <a:lstStyle/>
-          <a:p>
-            <a:pPr algn="ctr"/>
-            <a:endParaRPr/>
-          </a:p>
-        </p:txBody>
-      </p:sp>
-      <p:sp>
-        <p:nvSpPr>
-          <p:cNvPr id="4" name="TextBox 3"/>
-          <p:cNvSpPr txBox="1"/>
-          <p:nvPr/>
-        </p:nvSpPr>
-        <p:spPr>
-          <a:xfrm>
-            <a:off x="9601200" y="411480"/>
-            <a:ext cx="1920240" cy="274320"/>
-          </a:xfrm>
-          <a:prstGeom prst="rect">
-            <a:avLst/>
-          </a:prstGeom>
-          <a:noFill/>
-        </p:spPr>
-        <p:txBody>
-          <a:bodyPr wrap="square" lIns="54864" tIns="54864" rIns="54864" bIns="54864">
-            <a:spAutoFit/>
-          </a:bodyPr>
-          <a:lstStyle/>
-          <a:p>
-            <a:pPr algn="r"/>
-            <a:r>
-              <a:rPr sz="1000" b="1">
-                <a:solidFill>
-                  <a:srgbClr val="27AE60"/>
-                </a:solidFill>
-                <a:latin typeface="Aptos"/>
-              </a:rPr>
-              <a:t>EXCEL THỰC TẾ</a:t>
-            </a:r>
-          </a:p>
-        </p:txBody>
-      </p:sp>
-      <p:sp>
-        <p:nvSpPr>
-          <p:cNvPr id="5" name="TextBox 4"/>
-          <p:cNvSpPr txBox="1"/>
-          <p:nvPr/>
-        </p:nvSpPr>
-        <p:spPr>
-          <a:xfrm>
-            <a:off x="594360" y="6510528"/>
-            <a:ext cx="8686800" cy="164592"/>
-          </a:xfrm>
-          <a:prstGeom prst="rect">
-            <a:avLst/>
-          </a:prstGeom>
-          <a:noFill/>
-        </p:spPr>
-        <p:txBody>
-          <a:bodyPr wrap="square" lIns="54864" tIns="54864" rIns="54864" bIns="54864">
-            <a:spAutoFit/>
-          </a:bodyPr>
-          <a:lstStyle/>
-          <a:p>
-            <a:r>
-              <a:rPr sz="800" b="0">
-                <a:solidFill>
-                  <a:srgbClr val="66757E"/>
-                </a:solidFill>
-                <a:latin typeface="Aptos"/>
-              </a:rPr>
-              <a:t>GREENTECH  |  MINI PROJECT HẠ TẦNG &amp; NHẬT KÝ KỸ THUẬT</a:t>
-            </a:r>
-          </a:p>
-        </p:txBody>
-      </p:sp>
-      <p:sp>
-        <p:nvSpPr>
-          <p:cNvPr id="6" name="TextBox 5"/>
-          <p:cNvSpPr txBox="1"/>
-          <p:nvPr/>
-        </p:nvSpPr>
-        <p:spPr>
-          <a:xfrm>
-            <a:off x="11155680" y="6473952"/>
-            <a:ext cx="411480" cy="228600"/>
-          </a:xfrm>
-          <a:prstGeom prst="rect">
-            <a:avLst/>
-          </a:prstGeom>
-          <a:noFill/>
-        </p:spPr>
-        <p:txBody>
-          <a:bodyPr wrap="square" lIns="54864" tIns="54864" rIns="54864" bIns="54864">
-            <a:spAutoFit/>
-          </a:bodyPr>
-          <a:lstStyle/>
-          <a:p>
-            <a:pPr algn="r"/>
-            <a:r>
-              <a:rPr sz="1000" b="1">
-                <a:solidFill>
-                  <a:srgbClr val="27AE60"/>
-                </a:solidFill>
-                <a:latin typeface="Aptos"/>
-              </a:rPr>
-              <a:t>13</a:t>
-            </a:r>
-          </a:p>
-        </p:txBody>
-      </p:sp>
-      <p:sp>
-        <p:nvSpPr>
-          <p:cNvPr id="7" name="TextBox 6"/>
-          <p:cNvSpPr txBox="1"/>
-          <p:nvPr/>
-        </p:nvSpPr>
-        <p:spPr>
-          <a:xfrm>
-            <a:off x="731520" y="1234440"/>
-            <a:ext cx="10607040" cy="411480"/>
-          </a:xfrm>
-          <a:prstGeom prst="rect">
-            <a:avLst/>
-          </a:prstGeom>
-          <a:noFill/>
-        </p:spPr>
-        <p:txBody>
-          <a:bodyPr wrap="square" lIns="54864" tIns="54864" rIns="54864" bIns="54864">
-            <a:spAutoFit/>
-          </a:bodyPr>
-          <a:lstStyle/>
-          <a:p>
-            <a:r>
-              <a:rPr sz="1700" b="1">
-                <a:solidFill>
-                  <a:srgbClr val="12273A"/>
-                </a:solidFill>
-                <a:latin typeface="Aptos"/>
-              </a:rPr>
-              <a:t>Trong sheet trang-thai-tram, cột E (ten_thiet_bi) tra cứu theo mã ở cột B.</a:t>
-            </a:r>
-          </a:p>
-        </p:txBody>
-      </p:sp>
-      <p:sp>
-        <p:nvSpPr>
-          <p:cNvPr id="8" name="TextBox 7"/>
-          <p:cNvSpPr txBox="1"/>
-          <p:nvPr/>
-        </p:nvSpPr>
-        <p:spPr>
-          <a:xfrm>
-            <a:off x="777240" y="1828800"/>
-            <a:ext cx="4572000" cy="274320"/>
-          </a:xfrm>
-          <a:prstGeom prst="rect">
-            <a:avLst/>
-          </a:prstGeom>
-          <a:noFill/>
-        </p:spPr>
-        <p:txBody>
-          <a:bodyPr wrap="square" lIns="54864" tIns="54864" rIns="54864" bIns="54864">
-            <a:spAutoFit/>
-          </a:bodyPr>
-          <a:lstStyle/>
-          <a:p>
-            <a:r>
-              <a:rPr sz="1500" b="1">
-                <a:solidFill>
-                  <a:srgbClr val="2F3E46"/>
-                </a:solidFill>
-                <a:latin typeface="Aptos"/>
-              </a:rPr>
-              <a:t>Công thức khuyến nghị tại ô E2:</a:t>
-            </a:r>
-          </a:p>
-        </p:txBody>
-      </p:sp>
-      <p:sp>
-        <p:nvSpPr>
-          <p:cNvPr id="9" name="Rounded Rectangle 8"/>
-          <p:cNvSpPr/>
-          <p:nvPr/>
-        </p:nvSpPr>
-        <p:spPr>
-          <a:xfrm>
-            <a:off x="777240" y="2194560"/>
-            <a:ext cx="10607040" cy="822960"/>
-          </a:xfrm>
-          <a:prstGeom prst="roundRect">
-            <a:avLst/>
-          </a:prstGeom>
-          <a:solidFill>
-            <a:srgbClr val="12273A"/>
-          </a:solidFill>
-          <a:ln>
-            <a:noFill/>
-          </a:ln>
-        </p:spPr>
-        <p:style>
-          <a:lnRef idx="1">
-            <a:schemeClr val="accent1"/>
-          </a:lnRef>
-          <a:fillRef idx="3">
-            <a:schemeClr val="accent1"/>
-          </a:fillRef>
-          <a:effectRef idx="2">
-            <a:schemeClr val="accent1"/>
-          </a:effectRef>
-          <a:fontRef idx="minor">
-            <a:schemeClr val="lt1"/>
-          </a:fontRef>
-        </p:style>
-        <p:txBody>
-          <a:bodyPr rtlCol="0" anchor="ctr"/>
-          <a:lstStyle/>
-          <a:p>
-            <a:pPr algn="ctr"/>
-            <a:endParaRPr/>
-          </a:p>
-        </p:txBody>
-      </p:sp>
-      <p:sp>
-        <p:nvSpPr>
-          <p:cNvPr id="10" name="TextBox 9"/>
-          <p:cNvSpPr txBox="1"/>
-          <p:nvPr/>
-        </p:nvSpPr>
-        <p:spPr>
-          <a:xfrm>
-            <a:off x="941832" y="2304288"/>
-            <a:ext cx="10277856" cy="603504"/>
-          </a:xfrm>
-          <a:prstGeom prst="rect">
-            <a:avLst/>
-          </a:prstGeom>
-          <a:noFill/>
-        </p:spPr>
-        <p:txBody>
-          <a:bodyPr wrap="square" lIns="0" tIns="0" rIns="0" bIns="0">
-            <a:spAutoFit/>
-          </a:bodyPr>
-          <a:lstStyle/>
-          <a:p>
-            <a:pPr>
-              <a:spcAft>
-                <a:spcPts val="300"/>
-              </a:spcAft>
-              <a:defRPr sz="1300">
-                <a:solidFill>
-                  <a:srgbClr val="BFEBD2"/>
-                </a:solidFill>
-                <a:latin typeface="Consolas"/>
-              </a:defRPr>
-            </a:pPr>
-            <a:r>
-              <a:t>=IFERROR(VLOOKUP(TRIM(B2),'danh-muc-linh-kien'!$A$2:$D$4,2,FALSE),"Không tìm thấy mã")</a:t>
-            </a:r>
-          </a:p>
-        </p:txBody>
-      </p:sp>
-      <p:sp>
-        <p:nvSpPr>
-          <p:cNvPr id="11" name="Rounded Rectangle 10"/>
-          <p:cNvSpPr/>
-          <p:nvPr/>
-        </p:nvSpPr>
-        <p:spPr>
-          <a:xfrm>
-            <a:off x="777240" y="3383280"/>
-            <a:ext cx="3383280" cy="1417320"/>
-          </a:xfrm>
-          <a:prstGeom prst="roundRect">
-            <a:avLst/>
-          </a:prstGeom>
-          <a:solidFill>
-            <a:srgbClr val="FFFFFF"/>
-          </a:solidFill>
-          <a:ln>
-            <a:solidFill>
-              <a:srgbClr val="E0E8EC"/>
-            </a:solidFill>
-          </a:ln>
-        </p:spPr>
-        <p:style>
-          <a:lnRef idx="1">
-            <a:schemeClr val="accent1"/>
-          </a:lnRef>
-          <a:fillRef idx="3">
-            <a:schemeClr val="accent1"/>
-          </a:fillRef>
-          <a:effectRef idx="2">
-            <a:schemeClr val="accent1"/>
-          </a:effectRef>
-          <a:fontRef idx="minor">
-            <a:schemeClr val="lt1"/>
-          </a:fontRef>
-        </p:style>
-        <p:txBody>
-          <a:bodyPr rtlCol="0" anchor="ctr"/>
-          <a:lstStyle/>
-          <a:p>
-            <a:pPr algn="ctr"/>
-            <a:endParaRPr/>
-          </a:p>
-        </p:txBody>
-      </p:sp>
-      <p:sp>
-        <p:nvSpPr>
-          <p:cNvPr id="12" name="Rectangle 11"/>
-          <p:cNvSpPr/>
-          <p:nvPr/>
-        </p:nvSpPr>
-        <p:spPr>
-          <a:xfrm>
-            <a:off x="777240" y="3383280"/>
-            <a:ext cx="73152" cy="1417320"/>
-          </a:xfrm>
-          <a:prstGeom prst="rect">
-            <a:avLst/>
-          </a:prstGeom>
-          <a:solidFill>
-            <a:srgbClr val="27AE60"/>
-          </a:solidFill>
-          <a:ln>
-            <a:noFill/>
-          </a:ln>
-        </p:spPr>
-        <p:style>
-          <a:lnRef idx="1">
-            <a:schemeClr val="accent1"/>
-          </a:lnRef>
-          <a:fillRef idx="3">
-            <a:schemeClr val="accent1"/>
-          </a:fillRef>
-          <a:effectRef idx="2">
-            <a:schemeClr val="accent1"/>
-          </a:effectRef>
-          <a:fontRef idx="minor">
-            <a:schemeClr val="lt1"/>
-          </a:fontRef>
-        </p:style>
-        <p:txBody>
-          <a:bodyPr rtlCol="0" anchor="ctr"/>
-          <a:lstStyle/>
-          <a:p>
-            <a:pPr algn="ctr"/>
-            <a:endParaRPr/>
-          </a:p>
-        </p:txBody>
-      </p:sp>
-      <p:sp>
-        <p:nvSpPr>
-          <p:cNvPr id="13" name="TextBox 12"/>
-          <p:cNvSpPr txBox="1"/>
-          <p:nvPr/>
-        </p:nvSpPr>
-        <p:spPr>
-          <a:xfrm>
-            <a:off x="978408" y="3529584"/>
-            <a:ext cx="3017520" cy="320040"/>
-          </a:xfrm>
-          <a:prstGeom prst="rect">
-            <a:avLst/>
-          </a:prstGeom>
-          <a:noFill/>
-        </p:spPr>
-        <p:txBody>
-          <a:bodyPr wrap="square" lIns="54864" tIns="54864" rIns="54864" bIns="54864">
-            <a:spAutoFit/>
-          </a:bodyPr>
-          <a:lstStyle/>
-          <a:p>
-            <a:r>
-              <a:rPr sz="1600" b="1">
-                <a:solidFill>
-                  <a:srgbClr val="12273A"/>
-                </a:solidFill>
-                <a:latin typeface="Aptos"/>
-              </a:rPr>
-              <a:t>TRIM(B2)</a:t>
-            </a:r>
-          </a:p>
-        </p:txBody>
-      </p:sp>
-      <p:sp>
-        <p:nvSpPr>
-          <p:cNvPr id="14" name="TextBox 13"/>
-          <p:cNvSpPr txBox="1"/>
-          <p:nvPr/>
-        </p:nvSpPr>
-        <p:spPr>
-          <a:xfrm>
-            <a:off x="978408" y="3913632"/>
-            <a:ext cx="3017520" cy="795528"/>
-          </a:xfrm>
-          <a:prstGeom prst="rect">
-            <a:avLst/>
-          </a:prstGeom>
-          <a:noFill/>
-        </p:spPr>
-        <p:txBody>
-          <a:bodyPr wrap="square" lIns="54864" tIns="54864" rIns="54864" bIns="54864">
-            <a:spAutoFit/>
-          </a:bodyPr>
-          <a:lstStyle/>
-          <a:p>
-            <a:r>
-              <a:rPr sz="1300" b="0">
-                <a:solidFill>
-                  <a:srgbClr val="2F3E46"/>
-                </a:solidFill>
-                <a:latin typeface="Aptos"/>
-              </a:rPr>
-              <a:t>Loại bỏ khoảng trắng thừa trong mã linh kiện.</a:t>
-            </a:r>
-          </a:p>
-        </p:txBody>
-      </p:sp>
-      <p:sp>
-        <p:nvSpPr>
-          <p:cNvPr id="15" name="Rounded Rectangle 14"/>
-          <p:cNvSpPr/>
-          <p:nvPr/>
-        </p:nvSpPr>
-        <p:spPr>
-          <a:xfrm>
-            <a:off x="4389120" y="3383280"/>
-            <a:ext cx="3383280" cy="1417320"/>
-          </a:xfrm>
-          <a:prstGeom prst="roundRect">
-            <a:avLst/>
-          </a:prstGeom>
-          <a:solidFill>
-            <a:srgbClr val="FFFFFF"/>
-          </a:solidFill>
-          <a:ln>
-            <a:solidFill>
-              <a:srgbClr val="E0E8EC"/>
-            </a:solidFill>
-          </a:ln>
-        </p:spPr>
-        <p:style>
-          <a:lnRef idx="1">
-            <a:schemeClr val="accent1"/>
-          </a:lnRef>
-          <a:fillRef idx="3">
-            <a:schemeClr val="accent1"/>
-          </a:fillRef>
-          <a:effectRef idx="2">
-            <a:schemeClr val="accent1"/>
-          </a:effectRef>
-          <a:fontRef idx="minor">
-            <a:schemeClr val="lt1"/>
-          </a:fontRef>
-        </p:style>
-        <p:txBody>
-          <a:bodyPr rtlCol="0" anchor="ctr"/>
-          <a:lstStyle/>
-          <a:p>
-            <a:pPr algn="ctr"/>
-            <a:endParaRPr/>
-          </a:p>
-        </p:txBody>
-      </p:sp>
-      <p:sp>
-        <p:nvSpPr>
-          <p:cNvPr id="16" name="Rectangle 15"/>
-          <p:cNvSpPr/>
-          <p:nvPr/>
-        </p:nvSpPr>
-        <p:spPr>
-          <a:xfrm>
-            <a:off x="4389120" y="3383280"/>
-            <a:ext cx="73152" cy="1417320"/>
-          </a:xfrm>
-          <a:prstGeom prst="rect">
-            <a:avLst/>
-          </a:prstGeom>
-          <a:solidFill>
-            <a:srgbClr val="3498DB"/>
-          </a:solidFill>
-          <a:ln>
-            <a:noFill/>
-          </a:ln>
-        </p:spPr>
-        <p:style>
-          <a:lnRef idx="1">
-            <a:schemeClr val="accent1"/>
-          </a:lnRef>
-          <a:fillRef idx="3">
-            <a:schemeClr val="accent1"/>
-          </a:fillRef>
-          <a:effectRef idx="2">
-            <a:schemeClr val="accent1"/>
-          </a:effectRef>
-          <a:fontRef idx="minor">
-            <a:schemeClr val="lt1"/>
-          </a:fontRef>
-        </p:style>
-        <p:txBody>
-          <a:bodyPr rtlCol="0" anchor="ctr"/>
-          <a:lstStyle/>
-          <a:p>
-            <a:pPr algn="ctr"/>
-            <a:endParaRPr/>
-          </a:p>
-        </p:txBody>
-      </p:sp>
-      <p:sp>
-        <p:nvSpPr>
-          <p:cNvPr id="17" name="TextBox 16"/>
-          <p:cNvSpPr txBox="1"/>
-          <p:nvPr/>
-        </p:nvSpPr>
-        <p:spPr>
-          <a:xfrm>
-            <a:off x="4590288" y="3529584"/>
-            <a:ext cx="3017520" cy="320040"/>
-          </a:xfrm>
-          <a:prstGeom prst="rect">
-            <a:avLst/>
-          </a:prstGeom>
-          <a:noFill/>
-        </p:spPr>
-        <p:txBody>
-          <a:bodyPr wrap="square" lIns="54864" tIns="54864" rIns="54864" bIns="54864">
-            <a:spAutoFit/>
-          </a:bodyPr>
-          <a:lstStyle/>
-          <a:p>
-            <a:r>
-              <a:rPr sz="1600" b="1">
-                <a:solidFill>
-                  <a:srgbClr val="12273A"/>
-                </a:solidFill>
-                <a:latin typeface="Aptos"/>
-              </a:rPr>
-              <a:t>$A$2:$D$4</a:t>
-            </a:r>
-          </a:p>
-        </p:txBody>
-      </p:sp>
-      <p:sp>
-        <p:nvSpPr>
-          <p:cNvPr id="18" name="TextBox 17"/>
-          <p:cNvSpPr txBox="1"/>
-          <p:nvPr/>
-        </p:nvSpPr>
-        <p:spPr>
-          <a:xfrm>
-            <a:off x="4590288" y="3913632"/>
-            <a:ext cx="3017520" cy="795528"/>
-          </a:xfrm>
-          <a:prstGeom prst="rect">
-            <a:avLst/>
-          </a:prstGeom>
-          <a:noFill/>
-        </p:spPr>
-        <p:txBody>
-          <a:bodyPr wrap="square" lIns="54864" tIns="54864" rIns="54864" bIns="54864">
-            <a:spAutoFit/>
-          </a:bodyPr>
-          <a:lstStyle/>
-          <a:p>
-            <a:r>
-              <a:rPr sz="1300" b="0">
-                <a:solidFill>
-                  <a:srgbClr val="2F3E46"/>
-                </a:solidFill>
-                <a:latin typeface="Aptos"/>
-              </a:rPr>
-              <a:t>Cố định vùng danh mục khi sao chép công thức xuống.</a:t>
-            </a:r>
-          </a:p>
-        </p:txBody>
-      </p:sp>
-      <p:sp>
-        <p:nvSpPr>
-          <p:cNvPr id="19" name="Rounded Rectangle 18"/>
-          <p:cNvSpPr/>
-          <p:nvPr/>
-        </p:nvSpPr>
-        <p:spPr>
-          <a:xfrm>
-            <a:off x="8001000" y="3383280"/>
-            <a:ext cx="3383280" cy="1417320"/>
-          </a:xfrm>
-          <a:prstGeom prst="roundRect">
-            <a:avLst/>
-          </a:prstGeom>
-          <a:solidFill>
-            <a:srgbClr val="FFFFFF"/>
-          </a:solidFill>
-          <a:ln>
-            <a:solidFill>
-              <a:srgbClr val="E0E8EC"/>
-            </a:solidFill>
-          </a:ln>
-        </p:spPr>
-        <p:style>
-          <a:lnRef idx="1">
-            <a:schemeClr val="accent1"/>
-          </a:lnRef>
-          <a:fillRef idx="3">
-            <a:schemeClr val="accent1"/>
-          </a:fillRef>
-          <a:effectRef idx="2">
-            <a:schemeClr val="accent1"/>
-          </a:effectRef>
-          <a:fontRef idx="minor">
-            <a:schemeClr val="lt1"/>
-          </a:fontRef>
-        </p:style>
-        <p:txBody>
-          <a:bodyPr rtlCol="0" anchor="ctr"/>
-          <a:lstStyle/>
-          <a:p>
-            <a:pPr algn="ctr"/>
-            <a:endParaRPr/>
-          </a:p>
-        </p:txBody>
-      </p:sp>
-      <p:sp>
-        <p:nvSpPr>
-          <p:cNvPr id="20" name="Rectangle 19"/>
-          <p:cNvSpPr/>
-          <p:nvPr/>
-        </p:nvSpPr>
-        <p:spPr>
-          <a:xfrm>
-            <a:off x="8001000" y="3383280"/>
-            <a:ext cx="73152" cy="1417320"/>
-          </a:xfrm>
-          <a:prstGeom prst="rect">
-            <a:avLst/>
-          </a:prstGeom>
-          <a:solidFill>
-            <a:srgbClr val="F39C12"/>
-          </a:solidFill>
-          <a:ln>
-            <a:noFill/>
-          </a:ln>
-        </p:spPr>
-        <p:style>
-          <a:lnRef idx="1">
-            <a:schemeClr val="accent1"/>
-          </a:lnRef>
-          <a:fillRef idx="3">
-            <a:schemeClr val="accent1"/>
-          </a:fillRef>
-          <a:effectRef idx="2">
-            <a:schemeClr val="accent1"/>
-          </a:effectRef>
-          <a:fontRef idx="minor">
-            <a:schemeClr val="lt1"/>
-          </a:fontRef>
-        </p:style>
-        <p:txBody>
-          <a:bodyPr rtlCol="0" anchor="ctr"/>
-          <a:lstStyle/>
-          <a:p>
-            <a:pPr algn="ctr"/>
-            <a:endParaRPr/>
-          </a:p>
-        </p:txBody>
-      </p:sp>
-      <p:sp>
-        <p:nvSpPr>
-          <p:cNvPr id="21" name="TextBox 20"/>
-          <p:cNvSpPr txBox="1"/>
-          <p:nvPr/>
-        </p:nvSpPr>
-        <p:spPr>
-          <a:xfrm>
-            <a:off x="8202168" y="3529584"/>
-            <a:ext cx="3017520" cy="320040"/>
-          </a:xfrm>
-          <a:prstGeom prst="rect">
-            <a:avLst/>
-          </a:prstGeom>
-          <a:noFill/>
-        </p:spPr>
-        <p:txBody>
-          <a:bodyPr wrap="square" lIns="54864" tIns="54864" rIns="54864" bIns="54864">
-            <a:spAutoFit/>
-          </a:bodyPr>
-          <a:lstStyle/>
-          <a:p>
-            <a:r>
-              <a:rPr sz="1600" b="1">
-                <a:solidFill>
-                  <a:srgbClr val="12273A"/>
-                </a:solidFill>
-                <a:latin typeface="Aptos"/>
-              </a:rPr>
-              <a:t>FALSE + IFERROR</a:t>
-            </a:r>
-          </a:p>
-        </p:txBody>
-      </p:sp>
-      <p:sp>
-        <p:nvSpPr>
-          <p:cNvPr id="22" name="TextBox 21"/>
-          <p:cNvSpPr txBox="1"/>
-          <p:nvPr/>
-        </p:nvSpPr>
-        <p:spPr>
-          <a:xfrm>
-            <a:off x="8202168" y="3913632"/>
-            <a:ext cx="3017520" cy="795528"/>
-          </a:xfrm>
-          <a:prstGeom prst="rect">
-            <a:avLst/>
-          </a:prstGeom>
-          <a:noFill/>
-        </p:spPr>
-        <p:txBody>
-          <a:bodyPr wrap="square" lIns="54864" tIns="54864" rIns="54864" bIns="54864">
-            <a:spAutoFit/>
-          </a:bodyPr>
-          <a:lstStyle/>
-          <a:p>
-            <a:r>
-              <a:rPr sz="1200" b="0">
-                <a:solidFill>
-                  <a:srgbClr val="2F3E46"/>
-                </a:solidFill>
-                <a:latin typeface="Aptos"/>
-              </a:rPr>
-              <a:t>Tìm khớp chính xác; hiện thông báo dễ hiểu nếu không tìm thấy mã.</a:t>
-            </a:r>
-          </a:p>
-        </p:txBody>
-      </p:sp>
-      <p:sp>
-        <p:nvSpPr>
-          <p:cNvPr id="23" name="TextBox 22"/>
-          <p:cNvSpPr txBox="1"/>
-          <p:nvPr/>
-        </p:nvSpPr>
-        <p:spPr>
-          <a:xfrm>
-            <a:off x="822960" y="5212080"/>
-            <a:ext cx="10515600" cy="502920"/>
-          </a:xfrm>
-          <a:prstGeom prst="rect">
-            <a:avLst/>
-          </a:prstGeom>
-          <a:noFill/>
-        </p:spPr>
-        <p:txBody>
-          <a:bodyPr wrap="square" lIns="54864" tIns="54864" rIns="54864" bIns="54864">
-            <a:spAutoFit/>
-          </a:bodyPr>
-          <a:lstStyle/>
-          <a:p>
-            <a:r>
-              <a:rPr sz="1500" b="1">
-                <a:solidFill>
-                  <a:srgbClr val="12273A"/>
-                </a:solidFill>
-                <a:latin typeface="Aptos"/>
-              </a:rPr>
-              <a:t>Kết quả kỳ vọng: T001/T003 → SSD Samsung; T002/T005 → HDD Seagate; T004/T006 → SSD Kingston.</a:t>
-            </a:r>
-          </a:p>
-        </p:txBody>
-      </p:sp>
-      <p:sp>
-        <p:nvSpPr>
-          <p:cNvPr id="24" name="TextBox 23"/>
-          <p:cNvSpPr txBox="1"/>
-          <p:nvPr/>
-        </p:nvSpPr>
-        <p:spPr>
-          <a:xfrm>
-            <a:off x="822960" y="5806440"/>
-            <a:ext cx="10515600" cy="457200"/>
-          </a:xfrm>
-          <a:prstGeom prst="rect">
-            <a:avLst/>
-          </a:prstGeom>
-          <a:noFill/>
-        </p:spPr>
-        <p:txBody>
-          <a:bodyPr wrap="square" lIns="54864" tIns="54864" rIns="54864" bIns="54864">
-            <a:spAutoFit/>
-          </a:bodyPr>
-          <a:lstStyle/>
-          <a:p>
-            <a:r>
-              <a:rPr sz="1200" b="1">
-                <a:solidFill>
-                  <a:srgbClr val="C0392B"/>
-                </a:solidFill>
-                <a:latin typeface="Aptos"/>
-              </a:rPr>
-              <a:t>Kiểm tra trước khi nộp: kéo công thức đến E7, thử mã có khoảng trắng và mã không tồn tại; giữ hàng tiêu đề, không Merge Cell, không để hàng trống trong vùng dữ liệu.</a:t>
-            </a:r>
-          </a:p>
-        </p:txBody>
-      </p:sp>
-    </p:spTree>
-  </p:cSld>
-  <p:clrMapOvr>
-    <a:masterClrMapping/>
-  </p:clrMapOvr>
-  <mc:AlternateContent xmlns:mc="http://schemas.openxmlformats.org/markup-compatibility/2006">
-    <mc:Choice xmlns:p14="http://schemas.microsoft.com/office/powerpoint/2010/main" Requires="p14">
-      <p:transition spd="slow" p14:dur="4400">
-        <p14:honeycomb/>
-      </p:transition>
-    </mc:Choice>
-    <mc:Fallback>
+    <mc:Fallback xmlns="">
       <p:transition spd="slow">
         <p:fade/>
       </p:transition>
@@ -13860,13 +13972,13 @@
   <p:clrMapOvr>
     <a:masterClrMapping/>
   </p:clrMapOvr>
-  <mc:AlternateContent xmlns:mc="http://schemas.openxmlformats.org/markup-compatibility/2006">
-    <mc:Choice xmlns:p14="http://schemas.microsoft.com/office/powerpoint/2010/main" Requires="p14">
+  <mc:AlternateContent xmlns:mc="http://schemas.openxmlformats.org/markup-compatibility/2006" xmlns:p14="http://schemas.microsoft.com/office/powerpoint/2010/main">
+    <mc:Choice Requires="p14">
       <p:transition spd="slow" p14:dur="1600">
         <p14:gallery dir="l"/>
       </p:transition>
     </mc:Choice>
-    <mc:Fallback>
+    <mc:Fallback xmlns="">
       <p:transition spd="slow">
         <p:fade/>
       </p:transition>
@@ -13876,6 +13988,926 @@
 </file>
 
 <file path=ppt/slides/slide20.xml><?xml version="1.0" encoding="utf-8"?>
+<p:sld xmlns:a="http://schemas.openxmlformats.org/drawingml/2006/main" xmlns:r="http://schemas.openxmlformats.org/officeDocument/2006/relationships" xmlns:p="http://schemas.openxmlformats.org/presentationml/2006/main">
+  <p:cSld>
+    <p:bg>
+      <p:bgPr>
+        <a:solidFill>
+          <a:srgbClr val="F5F8FA"/>
+        </a:solidFill>
+        <a:effectLst/>
+      </p:bgPr>
+    </p:bg>
+    <p:spTree>
+      <p:nvGrpSpPr>
+        <p:cNvPr id="1" name=""/>
+        <p:cNvGrpSpPr/>
+        <p:nvPr/>
+      </p:nvGrpSpPr>
+      <p:grpSpPr>
+        <a:xfrm>
+          <a:off x="0" y="0"/>
+          <a:ext cx="0" cy="0"/>
+          <a:chOff x="0" y="0"/>
+          <a:chExt cx="0" cy="0"/>
+        </a:xfrm>
+      </p:grpSpPr>
+      <p:sp>
+        <p:nvSpPr>
+          <p:cNvPr id="2" name="TextBox 1"/>
+          <p:cNvSpPr txBox="1"/>
+          <p:nvPr/>
+        </p:nvSpPr>
+        <p:spPr>
+          <a:xfrm>
+            <a:off x="594360" y="347472"/>
+            <a:ext cx="10972800" cy="502920"/>
+          </a:xfrm>
+          <a:prstGeom prst="rect">
+            <a:avLst/>
+          </a:prstGeom>
+          <a:noFill/>
+        </p:spPr>
+        <p:txBody>
+          <a:bodyPr wrap="square" lIns="54864" tIns="54864" rIns="54864" bIns="54864">
+            <a:spAutoFit/>
+          </a:bodyPr>
+          <a:lstStyle/>
+          <a:p>
+            <a:r>
+              <a:rPr sz="2700" b="1">
+                <a:solidFill>
+                  <a:srgbClr val="12273A"/>
+                </a:solidFill>
+                <a:latin typeface="Aptos"/>
+              </a:rPr>
+              <a:t>Công thức VLOOKUP áp dụng cho workbook</a:t>
+            </a:r>
+          </a:p>
+        </p:txBody>
+      </p:sp>
+      <p:sp>
+        <p:nvSpPr>
+          <p:cNvPr id="3" name="Rectangle 2"/>
+          <p:cNvSpPr/>
+          <p:nvPr/>
+        </p:nvSpPr>
+        <p:spPr>
+          <a:xfrm>
+            <a:off x="612648" y="960120"/>
+            <a:ext cx="822960" cy="54864"/>
+          </a:xfrm>
+          <a:prstGeom prst="rect">
+            <a:avLst/>
+          </a:prstGeom>
+          <a:solidFill>
+            <a:srgbClr val="27AE60"/>
+          </a:solidFill>
+          <a:ln>
+            <a:noFill/>
+          </a:ln>
+        </p:spPr>
+        <p:style>
+          <a:lnRef idx="1">
+            <a:schemeClr val="accent1"/>
+          </a:lnRef>
+          <a:fillRef idx="3">
+            <a:schemeClr val="accent1"/>
+          </a:fillRef>
+          <a:effectRef idx="2">
+            <a:schemeClr val="accent1"/>
+          </a:effectRef>
+          <a:fontRef idx="minor">
+            <a:schemeClr val="lt1"/>
+          </a:fontRef>
+        </p:style>
+        <p:txBody>
+          <a:bodyPr rtlCol="0" anchor="ctr"/>
+          <a:lstStyle/>
+          <a:p>
+            <a:pPr algn="ctr"/>
+            <a:endParaRPr/>
+          </a:p>
+        </p:txBody>
+      </p:sp>
+      <p:sp>
+        <p:nvSpPr>
+          <p:cNvPr id="4" name="TextBox 3"/>
+          <p:cNvSpPr txBox="1"/>
+          <p:nvPr/>
+        </p:nvSpPr>
+        <p:spPr>
+          <a:xfrm>
+            <a:off x="9601200" y="411480"/>
+            <a:ext cx="1920240" cy="274320"/>
+          </a:xfrm>
+          <a:prstGeom prst="rect">
+            <a:avLst/>
+          </a:prstGeom>
+          <a:noFill/>
+        </p:spPr>
+        <p:txBody>
+          <a:bodyPr wrap="square" lIns="54864" tIns="54864" rIns="54864" bIns="54864">
+            <a:spAutoFit/>
+          </a:bodyPr>
+          <a:lstStyle/>
+          <a:p>
+            <a:pPr algn="r"/>
+            <a:r>
+              <a:rPr sz="1000" b="1">
+                <a:solidFill>
+                  <a:srgbClr val="27AE60"/>
+                </a:solidFill>
+                <a:latin typeface="Aptos"/>
+              </a:rPr>
+              <a:t>EXCEL THỰC TẾ</a:t>
+            </a:r>
+          </a:p>
+        </p:txBody>
+      </p:sp>
+      <p:sp>
+        <p:nvSpPr>
+          <p:cNvPr id="5" name="TextBox 4"/>
+          <p:cNvSpPr txBox="1"/>
+          <p:nvPr/>
+        </p:nvSpPr>
+        <p:spPr>
+          <a:xfrm>
+            <a:off x="594360" y="6510528"/>
+            <a:ext cx="8686800" cy="164592"/>
+          </a:xfrm>
+          <a:prstGeom prst="rect">
+            <a:avLst/>
+          </a:prstGeom>
+          <a:noFill/>
+        </p:spPr>
+        <p:txBody>
+          <a:bodyPr wrap="square" lIns="54864" tIns="54864" rIns="54864" bIns="54864">
+            <a:spAutoFit/>
+          </a:bodyPr>
+          <a:lstStyle/>
+          <a:p>
+            <a:r>
+              <a:rPr sz="800" b="0">
+                <a:solidFill>
+                  <a:srgbClr val="66757E"/>
+                </a:solidFill>
+                <a:latin typeface="Aptos"/>
+              </a:rPr>
+              <a:t>GREENTECH  |  MINI PROJECT HẠ TẦNG &amp; NHẬT KÝ KỸ THUẬT</a:t>
+            </a:r>
+          </a:p>
+        </p:txBody>
+      </p:sp>
+      <p:sp>
+        <p:nvSpPr>
+          <p:cNvPr id="6" name="TextBox 5"/>
+          <p:cNvSpPr txBox="1"/>
+          <p:nvPr/>
+        </p:nvSpPr>
+        <p:spPr>
+          <a:xfrm>
+            <a:off x="11155680" y="6473952"/>
+            <a:ext cx="411480" cy="228600"/>
+          </a:xfrm>
+          <a:prstGeom prst="rect">
+            <a:avLst/>
+          </a:prstGeom>
+          <a:noFill/>
+        </p:spPr>
+        <p:txBody>
+          <a:bodyPr wrap="square" lIns="54864" tIns="54864" rIns="54864" bIns="54864">
+            <a:spAutoFit/>
+          </a:bodyPr>
+          <a:lstStyle/>
+          <a:p>
+            <a:pPr algn="r"/>
+            <a:r>
+              <a:rPr sz="1000" b="1">
+                <a:solidFill>
+                  <a:srgbClr val="27AE60"/>
+                </a:solidFill>
+                <a:latin typeface="Aptos"/>
+              </a:rPr>
+              <a:t>13</a:t>
+            </a:r>
+          </a:p>
+        </p:txBody>
+      </p:sp>
+      <p:sp>
+        <p:nvSpPr>
+          <p:cNvPr id="7" name="TextBox 6"/>
+          <p:cNvSpPr txBox="1"/>
+          <p:nvPr/>
+        </p:nvSpPr>
+        <p:spPr>
+          <a:xfrm>
+            <a:off x="731520" y="1234440"/>
+            <a:ext cx="10607040" cy="411480"/>
+          </a:xfrm>
+          <a:prstGeom prst="rect">
+            <a:avLst/>
+          </a:prstGeom>
+          <a:noFill/>
+        </p:spPr>
+        <p:txBody>
+          <a:bodyPr wrap="square" lIns="54864" tIns="54864" rIns="54864" bIns="54864">
+            <a:spAutoFit/>
+          </a:bodyPr>
+          <a:lstStyle/>
+          <a:p>
+            <a:r>
+              <a:rPr sz="1700" b="1">
+                <a:solidFill>
+                  <a:srgbClr val="12273A"/>
+                </a:solidFill>
+                <a:latin typeface="Aptos"/>
+              </a:rPr>
+              <a:t>Trong sheet trang-thai-tram, cột E (ten_thiet_bi) tra cứu theo mã ở cột B.</a:t>
+            </a:r>
+          </a:p>
+        </p:txBody>
+      </p:sp>
+      <p:sp>
+        <p:nvSpPr>
+          <p:cNvPr id="8" name="TextBox 7"/>
+          <p:cNvSpPr txBox="1"/>
+          <p:nvPr/>
+        </p:nvSpPr>
+        <p:spPr>
+          <a:xfrm>
+            <a:off x="777240" y="1828800"/>
+            <a:ext cx="4572000" cy="274320"/>
+          </a:xfrm>
+          <a:prstGeom prst="rect">
+            <a:avLst/>
+          </a:prstGeom>
+          <a:noFill/>
+        </p:spPr>
+        <p:txBody>
+          <a:bodyPr wrap="square" lIns="54864" tIns="54864" rIns="54864" bIns="54864">
+            <a:spAutoFit/>
+          </a:bodyPr>
+          <a:lstStyle/>
+          <a:p>
+            <a:r>
+              <a:rPr sz="1500" b="1">
+                <a:solidFill>
+                  <a:srgbClr val="2F3E46"/>
+                </a:solidFill>
+                <a:latin typeface="Aptos"/>
+              </a:rPr>
+              <a:t>Công thức khuyến nghị tại ô E2:</a:t>
+            </a:r>
+          </a:p>
+        </p:txBody>
+      </p:sp>
+      <p:sp>
+        <p:nvSpPr>
+          <p:cNvPr id="9" name="Rounded Rectangle 8"/>
+          <p:cNvSpPr/>
+          <p:nvPr/>
+        </p:nvSpPr>
+        <p:spPr>
+          <a:xfrm>
+            <a:off x="777240" y="2194560"/>
+            <a:ext cx="10607040" cy="822960"/>
+          </a:xfrm>
+          <a:prstGeom prst="roundRect">
+            <a:avLst/>
+          </a:prstGeom>
+          <a:solidFill>
+            <a:srgbClr val="12273A"/>
+          </a:solidFill>
+          <a:ln>
+            <a:noFill/>
+          </a:ln>
+        </p:spPr>
+        <p:style>
+          <a:lnRef idx="1">
+            <a:schemeClr val="accent1"/>
+          </a:lnRef>
+          <a:fillRef idx="3">
+            <a:schemeClr val="accent1"/>
+          </a:fillRef>
+          <a:effectRef idx="2">
+            <a:schemeClr val="accent1"/>
+          </a:effectRef>
+          <a:fontRef idx="minor">
+            <a:schemeClr val="lt1"/>
+          </a:fontRef>
+        </p:style>
+        <p:txBody>
+          <a:bodyPr rtlCol="0" anchor="ctr"/>
+          <a:lstStyle/>
+          <a:p>
+            <a:pPr algn="ctr"/>
+            <a:endParaRPr/>
+          </a:p>
+        </p:txBody>
+      </p:sp>
+      <p:sp>
+        <p:nvSpPr>
+          <p:cNvPr id="10" name="TextBox 9"/>
+          <p:cNvSpPr txBox="1"/>
+          <p:nvPr/>
+        </p:nvSpPr>
+        <p:spPr>
+          <a:xfrm>
+            <a:off x="941832" y="2304288"/>
+            <a:ext cx="10277856" cy="603504"/>
+          </a:xfrm>
+          <a:prstGeom prst="rect">
+            <a:avLst/>
+          </a:prstGeom>
+          <a:noFill/>
+        </p:spPr>
+        <p:txBody>
+          <a:bodyPr wrap="square" lIns="0" tIns="0" rIns="0" bIns="0">
+            <a:spAutoFit/>
+          </a:bodyPr>
+          <a:lstStyle/>
+          <a:p>
+            <a:pPr>
+              <a:spcAft>
+                <a:spcPts val="300"/>
+              </a:spcAft>
+              <a:defRPr sz="1300">
+                <a:solidFill>
+                  <a:srgbClr val="BFEBD2"/>
+                </a:solidFill>
+                <a:latin typeface="Consolas"/>
+              </a:defRPr>
+            </a:pPr>
+            <a:r>
+              <a:t>=IFERROR(VLOOKUP(TRIM(B2),'danh-muc-linh-kien'!$A$2:$D$4,2,FALSE),"Không tìm thấy mã")</a:t>
+            </a:r>
+          </a:p>
+        </p:txBody>
+      </p:sp>
+      <p:sp>
+        <p:nvSpPr>
+          <p:cNvPr id="11" name="Rounded Rectangle 10"/>
+          <p:cNvSpPr/>
+          <p:nvPr/>
+        </p:nvSpPr>
+        <p:spPr>
+          <a:xfrm>
+            <a:off x="777240" y="3383280"/>
+            <a:ext cx="3383280" cy="1417320"/>
+          </a:xfrm>
+          <a:prstGeom prst="roundRect">
+            <a:avLst/>
+          </a:prstGeom>
+          <a:solidFill>
+            <a:srgbClr val="FFFFFF"/>
+          </a:solidFill>
+          <a:ln>
+            <a:solidFill>
+              <a:srgbClr val="E0E8EC"/>
+            </a:solidFill>
+          </a:ln>
+        </p:spPr>
+        <p:style>
+          <a:lnRef idx="1">
+            <a:schemeClr val="accent1"/>
+          </a:lnRef>
+          <a:fillRef idx="3">
+            <a:schemeClr val="accent1"/>
+          </a:fillRef>
+          <a:effectRef idx="2">
+            <a:schemeClr val="accent1"/>
+          </a:effectRef>
+          <a:fontRef idx="minor">
+            <a:schemeClr val="lt1"/>
+          </a:fontRef>
+        </p:style>
+        <p:txBody>
+          <a:bodyPr rtlCol="0" anchor="ctr"/>
+          <a:lstStyle/>
+          <a:p>
+            <a:pPr algn="ctr"/>
+            <a:endParaRPr/>
+          </a:p>
+        </p:txBody>
+      </p:sp>
+      <p:sp>
+        <p:nvSpPr>
+          <p:cNvPr id="12" name="Rectangle 11"/>
+          <p:cNvSpPr/>
+          <p:nvPr/>
+        </p:nvSpPr>
+        <p:spPr>
+          <a:xfrm>
+            <a:off x="777240" y="3383280"/>
+            <a:ext cx="73152" cy="1417320"/>
+          </a:xfrm>
+          <a:prstGeom prst="rect">
+            <a:avLst/>
+          </a:prstGeom>
+          <a:solidFill>
+            <a:srgbClr val="27AE60"/>
+          </a:solidFill>
+          <a:ln>
+            <a:noFill/>
+          </a:ln>
+        </p:spPr>
+        <p:style>
+          <a:lnRef idx="1">
+            <a:schemeClr val="accent1"/>
+          </a:lnRef>
+          <a:fillRef idx="3">
+            <a:schemeClr val="accent1"/>
+          </a:fillRef>
+          <a:effectRef idx="2">
+            <a:schemeClr val="accent1"/>
+          </a:effectRef>
+          <a:fontRef idx="minor">
+            <a:schemeClr val="lt1"/>
+          </a:fontRef>
+        </p:style>
+        <p:txBody>
+          <a:bodyPr rtlCol="0" anchor="ctr"/>
+          <a:lstStyle/>
+          <a:p>
+            <a:pPr algn="ctr"/>
+            <a:endParaRPr/>
+          </a:p>
+        </p:txBody>
+      </p:sp>
+      <p:sp>
+        <p:nvSpPr>
+          <p:cNvPr id="13" name="TextBox 12"/>
+          <p:cNvSpPr txBox="1"/>
+          <p:nvPr/>
+        </p:nvSpPr>
+        <p:spPr>
+          <a:xfrm>
+            <a:off x="978408" y="3529584"/>
+            <a:ext cx="3017520" cy="320040"/>
+          </a:xfrm>
+          <a:prstGeom prst="rect">
+            <a:avLst/>
+          </a:prstGeom>
+          <a:noFill/>
+        </p:spPr>
+        <p:txBody>
+          <a:bodyPr wrap="square" lIns="54864" tIns="54864" rIns="54864" bIns="54864">
+            <a:spAutoFit/>
+          </a:bodyPr>
+          <a:lstStyle/>
+          <a:p>
+            <a:r>
+              <a:rPr sz="1600" b="1">
+                <a:solidFill>
+                  <a:srgbClr val="12273A"/>
+                </a:solidFill>
+                <a:latin typeface="Aptos"/>
+              </a:rPr>
+              <a:t>TRIM(B2)</a:t>
+            </a:r>
+          </a:p>
+        </p:txBody>
+      </p:sp>
+      <p:sp>
+        <p:nvSpPr>
+          <p:cNvPr id="14" name="TextBox 13"/>
+          <p:cNvSpPr txBox="1"/>
+          <p:nvPr/>
+        </p:nvSpPr>
+        <p:spPr>
+          <a:xfrm>
+            <a:off x="978408" y="3913632"/>
+            <a:ext cx="3017520" cy="795528"/>
+          </a:xfrm>
+          <a:prstGeom prst="rect">
+            <a:avLst/>
+          </a:prstGeom>
+          <a:noFill/>
+        </p:spPr>
+        <p:txBody>
+          <a:bodyPr wrap="square" lIns="54864" tIns="54864" rIns="54864" bIns="54864">
+            <a:spAutoFit/>
+          </a:bodyPr>
+          <a:lstStyle/>
+          <a:p>
+            <a:r>
+              <a:rPr sz="1300" b="0">
+                <a:solidFill>
+                  <a:srgbClr val="2F3E46"/>
+                </a:solidFill>
+                <a:latin typeface="Aptos"/>
+              </a:rPr>
+              <a:t>Loại bỏ khoảng trắng thừa trong mã linh kiện.</a:t>
+            </a:r>
+          </a:p>
+        </p:txBody>
+      </p:sp>
+      <p:sp>
+        <p:nvSpPr>
+          <p:cNvPr id="15" name="Rounded Rectangle 14"/>
+          <p:cNvSpPr/>
+          <p:nvPr/>
+        </p:nvSpPr>
+        <p:spPr>
+          <a:xfrm>
+            <a:off x="4389120" y="3383280"/>
+            <a:ext cx="3383280" cy="1417320"/>
+          </a:xfrm>
+          <a:prstGeom prst="roundRect">
+            <a:avLst/>
+          </a:prstGeom>
+          <a:solidFill>
+            <a:srgbClr val="FFFFFF"/>
+          </a:solidFill>
+          <a:ln>
+            <a:solidFill>
+              <a:srgbClr val="E0E8EC"/>
+            </a:solidFill>
+          </a:ln>
+        </p:spPr>
+        <p:style>
+          <a:lnRef idx="1">
+            <a:schemeClr val="accent1"/>
+          </a:lnRef>
+          <a:fillRef idx="3">
+            <a:schemeClr val="accent1"/>
+          </a:fillRef>
+          <a:effectRef idx="2">
+            <a:schemeClr val="accent1"/>
+          </a:effectRef>
+          <a:fontRef idx="minor">
+            <a:schemeClr val="lt1"/>
+          </a:fontRef>
+        </p:style>
+        <p:txBody>
+          <a:bodyPr rtlCol="0" anchor="ctr"/>
+          <a:lstStyle/>
+          <a:p>
+            <a:pPr algn="ctr"/>
+            <a:endParaRPr/>
+          </a:p>
+        </p:txBody>
+      </p:sp>
+      <p:sp>
+        <p:nvSpPr>
+          <p:cNvPr id="16" name="Rectangle 15"/>
+          <p:cNvSpPr/>
+          <p:nvPr/>
+        </p:nvSpPr>
+        <p:spPr>
+          <a:xfrm>
+            <a:off x="4389120" y="3383280"/>
+            <a:ext cx="73152" cy="1417320"/>
+          </a:xfrm>
+          <a:prstGeom prst="rect">
+            <a:avLst/>
+          </a:prstGeom>
+          <a:solidFill>
+            <a:srgbClr val="3498DB"/>
+          </a:solidFill>
+          <a:ln>
+            <a:noFill/>
+          </a:ln>
+        </p:spPr>
+        <p:style>
+          <a:lnRef idx="1">
+            <a:schemeClr val="accent1"/>
+          </a:lnRef>
+          <a:fillRef idx="3">
+            <a:schemeClr val="accent1"/>
+          </a:fillRef>
+          <a:effectRef idx="2">
+            <a:schemeClr val="accent1"/>
+          </a:effectRef>
+          <a:fontRef idx="minor">
+            <a:schemeClr val="lt1"/>
+          </a:fontRef>
+        </p:style>
+        <p:txBody>
+          <a:bodyPr rtlCol="0" anchor="ctr"/>
+          <a:lstStyle/>
+          <a:p>
+            <a:pPr algn="ctr"/>
+            <a:endParaRPr/>
+          </a:p>
+        </p:txBody>
+      </p:sp>
+      <p:sp>
+        <p:nvSpPr>
+          <p:cNvPr id="17" name="TextBox 16"/>
+          <p:cNvSpPr txBox="1"/>
+          <p:nvPr/>
+        </p:nvSpPr>
+        <p:spPr>
+          <a:xfrm>
+            <a:off x="4590288" y="3529584"/>
+            <a:ext cx="3017520" cy="320040"/>
+          </a:xfrm>
+          <a:prstGeom prst="rect">
+            <a:avLst/>
+          </a:prstGeom>
+          <a:noFill/>
+        </p:spPr>
+        <p:txBody>
+          <a:bodyPr wrap="square" lIns="54864" tIns="54864" rIns="54864" bIns="54864">
+            <a:spAutoFit/>
+          </a:bodyPr>
+          <a:lstStyle/>
+          <a:p>
+            <a:r>
+              <a:rPr sz="1600" b="1">
+                <a:solidFill>
+                  <a:srgbClr val="12273A"/>
+                </a:solidFill>
+                <a:latin typeface="Aptos"/>
+              </a:rPr>
+              <a:t>$A$2:$D$4</a:t>
+            </a:r>
+          </a:p>
+        </p:txBody>
+      </p:sp>
+      <p:sp>
+        <p:nvSpPr>
+          <p:cNvPr id="18" name="TextBox 17"/>
+          <p:cNvSpPr txBox="1"/>
+          <p:nvPr/>
+        </p:nvSpPr>
+        <p:spPr>
+          <a:xfrm>
+            <a:off x="4590288" y="3913632"/>
+            <a:ext cx="3017520" cy="795528"/>
+          </a:xfrm>
+          <a:prstGeom prst="rect">
+            <a:avLst/>
+          </a:prstGeom>
+          <a:noFill/>
+        </p:spPr>
+        <p:txBody>
+          <a:bodyPr wrap="square" lIns="54864" tIns="54864" rIns="54864" bIns="54864">
+            <a:spAutoFit/>
+          </a:bodyPr>
+          <a:lstStyle/>
+          <a:p>
+            <a:r>
+              <a:rPr sz="1300" b="0">
+                <a:solidFill>
+                  <a:srgbClr val="2F3E46"/>
+                </a:solidFill>
+                <a:latin typeface="Aptos"/>
+              </a:rPr>
+              <a:t>Cố định vùng danh mục khi sao chép công thức xuống.</a:t>
+            </a:r>
+          </a:p>
+        </p:txBody>
+      </p:sp>
+      <p:sp>
+        <p:nvSpPr>
+          <p:cNvPr id="19" name="Rounded Rectangle 18"/>
+          <p:cNvSpPr/>
+          <p:nvPr/>
+        </p:nvSpPr>
+        <p:spPr>
+          <a:xfrm>
+            <a:off x="8001000" y="3383280"/>
+            <a:ext cx="3383280" cy="1417320"/>
+          </a:xfrm>
+          <a:prstGeom prst="roundRect">
+            <a:avLst/>
+          </a:prstGeom>
+          <a:solidFill>
+            <a:srgbClr val="FFFFFF"/>
+          </a:solidFill>
+          <a:ln>
+            <a:solidFill>
+              <a:srgbClr val="E0E8EC"/>
+            </a:solidFill>
+          </a:ln>
+        </p:spPr>
+        <p:style>
+          <a:lnRef idx="1">
+            <a:schemeClr val="accent1"/>
+          </a:lnRef>
+          <a:fillRef idx="3">
+            <a:schemeClr val="accent1"/>
+          </a:fillRef>
+          <a:effectRef idx="2">
+            <a:schemeClr val="accent1"/>
+          </a:effectRef>
+          <a:fontRef idx="minor">
+            <a:schemeClr val="lt1"/>
+          </a:fontRef>
+        </p:style>
+        <p:txBody>
+          <a:bodyPr rtlCol="0" anchor="ctr"/>
+          <a:lstStyle/>
+          <a:p>
+            <a:pPr algn="ctr"/>
+            <a:endParaRPr/>
+          </a:p>
+        </p:txBody>
+      </p:sp>
+      <p:sp>
+        <p:nvSpPr>
+          <p:cNvPr id="20" name="Rectangle 19"/>
+          <p:cNvSpPr/>
+          <p:nvPr/>
+        </p:nvSpPr>
+        <p:spPr>
+          <a:xfrm>
+            <a:off x="8001000" y="3383280"/>
+            <a:ext cx="73152" cy="1417320"/>
+          </a:xfrm>
+          <a:prstGeom prst="rect">
+            <a:avLst/>
+          </a:prstGeom>
+          <a:solidFill>
+            <a:srgbClr val="F39C12"/>
+          </a:solidFill>
+          <a:ln>
+            <a:noFill/>
+          </a:ln>
+        </p:spPr>
+        <p:style>
+          <a:lnRef idx="1">
+            <a:schemeClr val="accent1"/>
+          </a:lnRef>
+          <a:fillRef idx="3">
+            <a:schemeClr val="accent1"/>
+          </a:fillRef>
+          <a:effectRef idx="2">
+            <a:schemeClr val="accent1"/>
+          </a:effectRef>
+          <a:fontRef idx="minor">
+            <a:schemeClr val="lt1"/>
+          </a:fontRef>
+        </p:style>
+        <p:txBody>
+          <a:bodyPr rtlCol="0" anchor="ctr"/>
+          <a:lstStyle/>
+          <a:p>
+            <a:pPr algn="ctr"/>
+            <a:endParaRPr/>
+          </a:p>
+        </p:txBody>
+      </p:sp>
+      <p:sp>
+        <p:nvSpPr>
+          <p:cNvPr id="21" name="TextBox 20"/>
+          <p:cNvSpPr txBox="1"/>
+          <p:nvPr/>
+        </p:nvSpPr>
+        <p:spPr>
+          <a:xfrm>
+            <a:off x="8202168" y="3529584"/>
+            <a:ext cx="3017520" cy="320040"/>
+          </a:xfrm>
+          <a:prstGeom prst="rect">
+            <a:avLst/>
+          </a:prstGeom>
+          <a:noFill/>
+        </p:spPr>
+        <p:txBody>
+          <a:bodyPr wrap="square" lIns="54864" tIns="54864" rIns="54864" bIns="54864">
+            <a:spAutoFit/>
+          </a:bodyPr>
+          <a:lstStyle/>
+          <a:p>
+            <a:r>
+              <a:rPr sz="1600" b="1">
+                <a:solidFill>
+                  <a:srgbClr val="12273A"/>
+                </a:solidFill>
+                <a:latin typeface="Aptos"/>
+              </a:rPr>
+              <a:t>FALSE + IFERROR</a:t>
+            </a:r>
+          </a:p>
+        </p:txBody>
+      </p:sp>
+      <p:sp>
+        <p:nvSpPr>
+          <p:cNvPr id="22" name="TextBox 21"/>
+          <p:cNvSpPr txBox="1"/>
+          <p:nvPr/>
+        </p:nvSpPr>
+        <p:spPr>
+          <a:xfrm>
+            <a:off x="8202168" y="3913632"/>
+            <a:ext cx="3017520" cy="795528"/>
+          </a:xfrm>
+          <a:prstGeom prst="rect">
+            <a:avLst/>
+          </a:prstGeom>
+          <a:noFill/>
+        </p:spPr>
+        <p:txBody>
+          <a:bodyPr wrap="square" lIns="54864" tIns="54864" rIns="54864" bIns="54864">
+            <a:spAutoFit/>
+          </a:bodyPr>
+          <a:lstStyle/>
+          <a:p>
+            <a:r>
+              <a:rPr sz="1200" b="0">
+                <a:solidFill>
+                  <a:srgbClr val="2F3E46"/>
+                </a:solidFill>
+                <a:latin typeface="Aptos"/>
+              </a:rPr>
+              <a:t>Tìm khớp chính xác; hiện thông báo dễ hiểu nếu không tìm thấy mã.</a:t>
+            </a:r>
+          </a:p>
+        </p:txBody>
+      </p:sp>
+      <p:sp>
+        <p:nvSpPr>
+          <p:cNvPr id="23" name="TextBox 22"/>
+          <p:cNvSpPr txBox="1"/>
+          <p:nvPr/>
+        </p:nvSpPr>
+        <p:spPr>
+          <a:xfrm>
+            <a:off x="822960" y="5212080"/>
+            <a:ext cx="10515600" cy="502920"/>
+          </a:xfrm>
+          <a:prstGeom prst="rect">
+            <a:avLst/>
+          </a:prstGeom>
+          <a:noFill/>
+        </p:spPr>
+        <p:txBody>
+          <a:bodyPr wrap="square" lIns="54864" tIns="54864" rIns="54864" bIns="54864">
+            <a:spAutoFit/>
+          </a:bodyPr>
+          <a:lstStyle/>
+          <a:p>
+            <a:r>
+              <a:rPr sz="1500" b="1">
+                <a:solidFill>
+                  <a:srgbClr val="12273A"/>
+                </a:solidFill>
+                <a:latin typeface="Aptos"/>
+              </a:rPr>
+              <a:t>Kết quả kỳ vọng: T001/T003 → SSD Samsung; T002/T005 → HDD Seagate; T004/T006 → SSD Kingston.</a:t>
+            </a:r>
+          </a:p>
+        </p:txBody>
+      </p:sp>
+      <p:sp>
+        <p:nvSpPr>
+          <p:cNvPr id="24" name="TextBox 23"/>
+          <p:cNvSpPr txBox="1"/>
+          <p:nvPr/>
+        </p:nvSpPr>
+        <p:spPr>
+          <a:xfrm>
+            <a:off x="822960" y="5806440"/>
+            <a:ext cx="10515600" cy="457200"/>
+          </a:xfrm>
+          <a:prstGeom prst="rect">
+            <a:avLst/>
+          </a:prstGeom>
+          <a:noFill/>
+        </p:spPr>
+        <p:txBody>
+          <a:bodyPr wrap="square" lIns="54864" tIns="54864" rIns="54864" bIns="54864">
+            <a:spAutoFit/>
+          </a:bodyPr>
+          <a:lstStyle/>
+          <a:p>
+            <a:r>
+              <a:rPr sz="1200" b="1">
+                <a:solidFill>
+                  <a:srgbClr val="C0392B"/>
+                </a:solidFill>
+                <a:latin typeface="Aptos"/>
+              </a:rPr>
+              <a:t>Kiểm tra trước khi nộp: kéo công thức đến E7, thử mã có khoảng trắng và mã không tồn tại; giữ hàng tiêu đề, không Merge Cell, không để hàng trống trong vùng dữ liệu.</a:t>
+            </a:r>
+          </a:p>
+        </p:txBody>
+      </p:sp>
+    </p:spTree>
+  </p:cSld>
+  <p:clrMapOvr>
+    <a:masterClrMapping/>
+  </p:clrMapOvr>
+  <mc:AlternateContent xmlns:mc="http://schemas.openxmlformats.org/markup-compatibility/2006" xmlns:p14="http://schemas.microsoft.com/office/powerpoint/2010/main">
+    <mc:Choice Requires="p14">
+      <p:transition spd="slow" p14:dur="4400">
+        <p14:honeycomb/>
+      </p:transition>
+    </mc:Choice>
+    <mc:Fallback xmlns="">
+      <p:transition spd="slow">
+        <p:fade/>
+      </p:transition>
+    </mc:Fallback>
+  </mc:AlternateContent>
+</p:sld>
+</file>
+
+<file path=ppt/slides/slide21.xml><?xml version="1.0" encoding="utf-8"?>
 <p:sld xmlns:a="http://schemas.openxmlformats.org/drawingml/2006/main" xmlns:r="http://schemas.openxmlformats.org/officeDocument/2006/relationships" xmlns:p="http://schemas.openxmlformats.org/presentationml/2006/main">
   <p:cSld>
     <p:bg>
@@ -14121,13 +15153,13 @@
   <p:clrMapOvr>
     <a:masterClrMapping/>
   </p:clrMapOvr>
-  <mc:AlternateContent xmlns:mc="http://schemas.openxmlformats.org/markup-compatibility/2006">
-    <mc:Choice xmlns:p15="http://schemas.microsoft.com/office/powerpoint/2012/main" Requires="p15">
+  <mc:AlternateContent xmlns:mc="http://schemas.openxmlformats.org/markup-compatibility/2006" xmlns:p15="http://schemas.microsoft.com/office/powerpoint/2012/main">
+    <mc:Choice Requires="p15">
       <p:transition xmlns:p14="http://schemas.microsoft.com/office/powerpoint/2010/main" spd="slow" p14:dur="3250">
         <p15:prstTrans prst="origami"/>
       </p:transition>
     </mc:Choice>
-    <mc:Fallback>
+    <mc:Fallback xmlns="">
       <p:transition spd="slow">
         <p:fade/>
       </p:transition>
@@ -15535,13 +16567,13 @@
   <p:clrMapOvr>
     <a:masterClrMapping/>
   </p:clrMapOvr>
-  <mc:AlternateContent xmlns:mc="http://schemas.openxmlformats.org/markup-compatibility/2006">
-    <mc:Choice xmlns:p14="http://schemas.microsoft.com/office/powerpoint/2010/main" Requires="p14">
+  <mc:AlternateContent xmlns:mc="http://schemas.openxmlformats.org/markup-compatibility/2006" xmlns:p14="http://schemas.microsoft.com/office/powerpoint/2010/main">
+    <mc:Choice Requires="p14">
       <p:transition spd="slow" p14:dur="3900">
         <p14:glitter pattern="hexagon"/>
       </p:transition>
     </mc:Choice>
-    <mc:Fallback>
+    <mc:Fallback xmlns="">
       <p:transition spd="slow">
         <p:fade/>
       </p:transition>
@@ -16529,13 +17561,13 @@
   <p:clrMapOvr>
     <a:masterClrMapping/>
   </p:clrMapOvr>
-  <mc:AlternateContent xmlns:mc="http://schemas.openxmlformats.org/markup-compatibility/2006">
-    <mc:Choice xmlns:p14="http://schemas.microsoft.com/office/powerpoint/2010/main" Requires="p14">
+  <mc:AlternateContent xmlns:mc="http://schemas.openxmlformats.org/markup-compatibility/2006" xmlns:p14="http://schemas.microsoft.com/office/powerpoint/2010/main">
+    <mc:Choice Requires="p14">
       <p:transition spd="slow" p14:dur="1200">
         <p:dissolve/>
       </p:transition>
     </mc:Choice>
-    <mc:Fallback>
+    <mc:Fallback xmlns="">
       <p:transition spd="slow">
         <p:dissolve/>
       </p:transition>
@@ -18374,13 +19406,13 @@
   <p:clrMapOvr>
     <a:masterClrMapping/>
   </p:clrMapOvr>
-  <mc:AlternateContent xmlns:mc="http://schemas.openxmlformats.org/markup-compatibility/2006">
-    <mc:Choice xmlns:p14="http://schemas.microsoft.com/office/powerpoint/2010/main" Requires="p14">
+  <mc:AlternateContent xmlns:mc="http://schemas.openxmlformats.org/markup-compatibility/2006" xmlns:p14="http://schemas.microsoft.com/office/powerpoint/2010/main">
+    <mc:Choice Requires="p14">
       <p:transition spd="slow" p14:dur="800">
         <p:circle/>
       </p:transition>
     </mc:Choice>
-    <mc:Fallback>
+    <mc:Fallback xmlns="">
       <p:transition spd="slow">
         <p:circle/>
       </p:transition>
@@ -20156,7 +21188,7 @@
             <a:fld id="{F7021451-1387-4CA6-816F-3879F97B5CBC}" type="slidenum">
               <a:rPr lang="en-US" b="0"/>
               <a:pPr algn="r"/>
-              <a:t>2</a:t>
+              <a:t>7</a:t>
             </a:fld>
             <a:endParaRPr lang="en-US"/>
           </a:p>
@@ -20710,13 +21742,13 @@
   <p:clrMapOvr>
     <a:masterClrMapping/>
   </p:clrMapOvr>
-  <mc:AlternateContent xmlns:mc="http://schemas.openxmlformats.org/markup-compatibility/2006">
-    <mc:Choice xmlns:p14="http://schemas.microsoft.com/office/powerpoint/2010/main" Requires="p14">
+  <mc:AlternateContent xmlns:mc="http://schemas.openxmlformats.org/markup-compatibility/2006" xmlns:p14="http://schemas.microsoft.com/office/powerpoint/2010/main">
+    <mc:Choice Requires="p14">
       <p:transition spd="slow" p14:dur="900">
         <p14:warp dir="in"/>
       </p:transition>
     </mc:Choice>
-    <mc:Fallback>
+    <mc:Fallback xmlns="">
       <p:transition spd="slow">
         <p:fade/>
       </p:transition>
@@ -20744,6 +21776,1561 @@
       </p:grpSpPr>
       <p:sp>
         <p:nvSpPr>
+          <p:cNvPr id="2" name="Tiêu đề">
+            <a:extLst>
+              <a:ext uri="{FF2B5EF4-FFF2-40B4-BE49-F238E27FC236}">
+                <a16:creationId xmlns:a16="http://schemas.microsoft.com/office/drawing/2014/main" id="{8DA4B0C9-485D-9F29-409E-A9C100A40A30}"/>
+              </a:ext>
+            </a:extLst>
+          </p:cNvPr>
+          <p:cNvSpPr txBox="1"/>
+          <p:nvPr/>
+        </p:nvSpPr>
+        <p:spPr>
+          <a:xfrm>
+            <a:off x="737552" y="200025"/>
+            <a:ext cx="11064240" cy="822960"/>
+          </a:xfrm>
+          <a:prstGeom prst="rect">
+            <a:avLst/>
+          </a:prstGeom>
+          <a:noFill/>
+        </p:spPr>
+        <p:txBody>
+          <a:bodyPr wrap="square" lIns="0" tIns="0" rIns="0" bIns="0" rtlCol="0" anchor="ctr"/>
+          <a:lstStyle>
+            <a:lvl1pPr marL="0" algn="l" defTabSz="914400" rtl="0" eaLnBrk="1" latinLnBrk="0" hangingPunct="1">
+              <a:defRPr sz="1800" kern="1200">
+                <a:solidFill>
+                  <a:schemeClr val="tx1"/>
+                </a:solidFill>
+                <a:latin typeface="+mn-lt"/>
+                <a:ea typeface="+mn-ea"/>
+                <a:cs typeface="+mn-cs"/>
+              </a:defRPr>
+            </a:lvl1pPr>
+            <a:lvl2pPr marL="457200" algn="l" defTabSz="914400" rtl="0" eaLnBrk="1" latinLnBrk="0" hangingPunct="1">
+              <a:defRPr sz="1800" kern="1200">
+                <a:solidFill>
+                  <a:schemeClr val="tx1"/>
+                </a:solidFill>
+                <a:latin typeface="+mn-lt"/>
+                <a:ea typeface="+mn-ea"/>
+                <a:cs typeface="+mn-cs"/>
+              </a:defRPr>
+            </a:lvl2pPr>
+            <a:lvl3pPr marL="914400" algn="l" defTabSz="914400" rtl="0" eaLnBrk="1" latinLnBrk="0" hangingPunct="1">
+              <a:defRPr sz="1800" kern="1200">
+                <a:solidFill>
+                  <a:schemeClr val="tx1"/>
+                </a:solidFill>
+                <a:latin typeface="+mn-lt"/>
+                <a:ea typeface="+mn-ea"/>
+                <a:cs typeface="+mn-cs"/>
+              </a:defRPr>
+            </a:lvl3pPr>
+            <a:lvl4pPr marL="1371600" algn="l" defTabSz="914400" rtl="0" eaLnBrk="1" latinLnBrk="0" hangingPunct="1">
+              <a:defRPr sz="1800" kern="1200">
+                <a:solidFill>
+                  <a:schemeClr val="tx1"/>
+                </a:solidFill>
+                <a:latin typeface="+mn-lt"/>
+                <a:ea typeface="+mn-ea"/>
+                <a:cs typeface="+mn-cs"/>
+              </a:defRPr>
+            </a:lvl4pPr>
+            <a:lvl5pPr marL="1828800" algn="l" defTabSz="914400" rtl="0" eaLnBrk="1" latinLnBrk="0" hangingPunct="1">
+              <a:defRPr sz="1800" kern="1200">
+                <a:solidFill>
+                  <a:schemeClr val="tx1"/>
+                </a:solidFill>
+                <a:latin typeface="+mn-lt"/>
+                <a:ea typeface="+mn-ea"/>
+                <a:cs typeface="+mn-cs"/>
+              </a:defRPr>
+            </a:lvl5pPr>
+            <a:lvl6pPr marL="2286000" algn="l" defTabSz="914400" rtl="0" eaLnBrk="1" latinLnBrk="0" hangingPunct="1">
+              <a:defRPr sz="1800" kern="1200">
+                <a:solidFill>
+                  <a:schemeClr val="tx1"/>
+                </a:solidFill>
+                <a:latin typeface="+mn-lt"/>
+                <a:ea typeface="+mn-ea"/>
+                <a:cs typeface="+mn-cs"/>
+              </a:defRPr>
+            </a:lvl6pPr>
+            <a:lvl7pPr marL="2743200" algn="l" defTabSz="914400" rtl="0" eaLnBrk="1" latinLnBrk="0" hangingPunct="1">
+              <a:defRPr sz="1800" kern="1200">
+                <a:solidFill>
+                  <a:schemeClr val="tx1"/>
+                </a:solidFill>
+                <a:latin typeface="+mn-lt"/>
+                <a:ea typeface="+mn-ea"/>
+                <a:cs typeface="+mn-cs"/>
+              </a:defRPr>
+            </a:lvl7pPr>
+            <a:lvl8pPr marL="3200400" algn="l" defTabSz="914400" rtl="0" eaLnBrk="1" latinLnBrk="0" hangingPunct="1">
+              <a:defRPr sz="1800" kern="1200">
+                <a:solidFill>
+                  <a:schemeClr val="tx1"/>
+                </a:solidFill>
+                <a:latin typeface="+mn-lt"/>
+                <a:ea typeface="+mn-ea"/>
+                <a:cs typeface="+mn-cs"/>
+              </a:defRPr>
+            </a:lvl8pPr>
+            <a:lvl9pPr marL="3657600" algn="l" defTabSz="914400" rtl="0" eaLnBrk="1" latinLnBrk="0" hangingPunct="1">
+              <a:defRPr sz="1800" kern="1200">
+                <a:solidFill>
+                  <a:schemeClr val="tx1"/>
+                </a:solidFill>
+                <a:latin typeface="+mn-lt"/>
+                <a:ea typeface="+mn-ea"/>
+                <a:cs typeface="+mn-cs"/>
+              </a:defRPr>
+            </a:lvl9pPr>
+          </a:lstStyle>
+          <a:p>
+            <a:pPr marL="0" indent="0" algn="l">
+              <a:buNone/>
+            </a:pPr>
+            <a:r>
+              <a:rPr lang="vi-VN" altLang="en-US" sz="3800" b="1" dirty="0"/>
+              <a:t>Aldult (Thẩm định)</a:t>
+            </a:r>
+          </a:p>
+        </p:txBody>
+      </p:sp>
+      <p:sp>
+        <p:nvSpPr>
+          <p:cNvPr id="3" name="Dòng log 1 (khung)">
+            <a:extLst>
+              <a:ext uri="{FF2B5EF4-FFF2-40B4-BE49-F238E27FC236}">
+                <a16:creationId xmlns:a16="http://schemas.microsoft.com/office/drawing/2014/main" id="{B138C111-8CE1-90A9-2779-BEC2F9267632}"/>
+              </a:ext>
+            </a:extLst>
+          </p:cNvPr>
+          <p:cNvSpPr/>
+          <p:nvPr/>
+        </p:nvSpPr>
+        <p:spPr>
+          <a:xfrm>
+            <a:off x="387032" y="1251585"/>
+            <a:ext cx="6949440" cy="4211320"/>
+          </a:xfrm>
+          <a:prstGeom prst="roundRect">
+            <a:avLst>
+              <a:gd name="adj" fmla="val 12500"/>
+            </a:avLst>
+          </a:prstGeom>
+          <a:solidFill>
+            <a:schemeClr val="tx1"/>
+          </a:solidFill>
+        </p:spPr>
+        <p:txBody>
+          <a:bodyPr/>
+          <a:lstStyle/>
+          <a:p>
+            <a:endParaRPr lang="en-US"/>
+          </a:p>
+        </p:txBody>
+      </p:sp>
+      <p:sp>
+        <p:nvSpPr>
+          <p:cNvPr id="4" name="Thẻ ghi chú 1">
+            <a:extLst>
+              <a:ext uri="{FF2B5EF4-FFF2-40B4-BE49-F238E27FC236}">
+                <a16:creationId xmlns:a16="http://schemas.microsoft.com/office/drawing/2014/main" id="{19ECC9FF-AEE9-94D6-F5AE-0886D2D5EC39}"/>
+              </a:ext>
+            </a:extLst>
+          </p:cNvPr>
+          <p:cNvSpPr/>
+          <p:nvPr/>
+        </p:nvSpPr>
+        <p:spPr>
+          <a:xfrm>
+            <a:off x="8148637" y="1251585"/>
+            <a:ext cx="3653155" cy="823595"/>
+          </a:xfrm>
+          <a:prstGeom prst="roundRect">
+            <a:avLst>
+              <a:gd name="adj" fmla="val 4348"/>
+            </a:avLst>
+          </a:prstGeom>
+        </p:spPr>
+        <p:style>
+          <a:lnRef idx="2">
+            <a:schemeClr val="accent1"/>
+          </a:lnRef>
+          <a:fillRef idx="0">
+            <a:srgbClr val="FFFFFF"/>
+          </a:fillRef>
+          <a:effectRef idx="0">
+            <a:srgbClr val="FFFFFF"/>
+          </a:effectRef>
+          <a:fontRef idx="minor">
+            <a:schemeClr val="tx1"/>
+          </a:fontRef>
+        </p:style>
+        <p:txBody>
+          <a:bodyPr/>
+          <a:lstStyle/>
+          <a:p>
+            <a:endParaRPr lang="en-US"/>
+          </a:p>
+        </p:txBody>
+      </p:sp>
+      <p:sp>
+        <p:nvSpPr>
+          <p:cNvPr id="5" name="Ghi chú 1">
+            <a:extLst>
+              <a:ext uri="{FF2B5EF4-FFF2-40B4-BE49-F238E27FC236}">
+                <a16:creationId xmlns:a16="http://schemas.microsoft.com/office/drawing/2014/main" id="{48BD51FA-21E9-21C9-B45D-03EBD2A98EEB}"/>
+              </a:ext>
+            </a:extLst>
+          </p:cNvPr>
+          <p:cNvSpPr txBox="1"/>
+          <p:nvPr/>
+        </p:nvSpPr>
+        <p:spPr>
+          <a:xfrm>
+            <a:off x="8241347" y="1252220"/>
+            <a:ext cx="3469640" cy="822960"/>
+          </a:xfrm>
+          <a:prstGeom prst="rect">
+            <a:avLst/>
+          </a:prstGeom>
+          <a:noFill/>
+        </p:spPr>
+        <p:txBody>
+          <a:bodyPr wrap="square" lIns="0" tIns="0" rIns="0" bIns="0" rtlCol="0" anchor="ctr"/>
+          <a:lstStyle>
+            <a:lvl1pPr marL="0" algn="l" defTabSz="914400" rtl="0" eaLnBrk="1" latinLnBrk="0" hangingPunct="1">
+              <a:defRPr sz="1800" kern="1200">
+                <a:solidFill>
+                  <a:schemeClr val="tx1"/>
+                </a:solidFill>
+                <a:latin typeface="+mn-lt"/>
+                <a:ea typeface="+mn-ea"/>
+                <a:cs typeface="+mn-cs"/>
+              </a:defRPr>
+            </a:lvl1pPr>
+            <a:lvl2pPr marL="457200" algn="l" defTabSz="914400" rtl="0" eaLnBrk="1" latinLnBrk="0" hangingPunct="1">
+              <a:defRPr sz="1800" kern="1200">
+                <a:solidFill>
+                  <a:schemeClr val="tx1"/>
+                </a:solidFill>
+                <a:latin typeface="+mn-lt"/>
+                <a:ea typeface="+mn-ea"/>
+                <a:cs typeface="+mn-cs"/>
+              </a:defRPr>
+            </a:lvl2pPr>
+            <a:lvl3pPr marL="914400" algn="l" defTabSz="914400" rtl="0" eaLnBrk="1" latinLnBrk="0" hangingPunct="1">
+              <a:defRPr sz="1800" kern="1200">
+                <a:solidFill>
+                  <a:schemeClr val="tx1"/>
+                </a:solidFill>
+                <a:latin typeface="+mn-lt"/>
+                <a:ea typeface="+mn-ea"/>
+                <a:cs typeface="+mn-cs"/>
+              </a:defRPr>
+            </a:lvl3pPr>
+            <a:lvl4pPr marL="1371600" algn="l" defTabSz="914400" rtl="0" eaLnBrk="1" latinLnBrk="0" hangingPunct="1">
+              <a:defRPr sz="1800" kern="1200">
+                <a:solidFill>
+                  <a:schemeClr val="tx1"/>
+                </a:solidFill>
+                <a:latin typeface="+mn-lt"/>
+                <a:ea typeface="+mn-ea"/>
+                <a:cs typeface="+mn-cs"/>
+              </a:defRPr>
+            </a:lvl4pPr>
+            <a:lvl5pPr marL="1828800" algn="l" defTabSz="914400" rtl="0" eaLnBrk="1" latinLnBrk="0" hangingPunct="1">
+              <a:defRPr sz="1800" kern="1200">
+                <a:solidFill>
+                  <a:schemeClr val="tx1"/>
+                </a:solidFill>
+                <a:latin typeface="+mn-lt"/>
+                <a:ea typeface="+mn-ea"/>
+                <a:cs typeface="+mn-cs"/>
+              </a:defRPr>
+            </a:lvl5pPr>
+            <a:lvl6pPr marL="2286000" algn="l" defTabSz="914400" rtl="0" eaLnBrk="1" latinLnBrk="0" hangingPunct="1">
+              <a:defRPr sz="1800" kern="1200">
+                <a:solidFill>
+                  <a:schemeClr val="tx1"/>
+                </a:solidFill>
+                <a:latin typeface="+mn-lt"/>
+                <a:ea typeface="+mn-ea"/>
+                <a:cs typeface="+mn-cs"/>
+              </a:defRPr>
+            </a:lvl6pPr>
+            <a:lvl7pPr marL="2743200" algn="l" defTabSz="914400" rtl="0" eaLnBrk="1" latinLnBrk="0" hangingPunct="1">
+              <a:defRPr sz="1800" kern="1200">
+                <a:solidFill>
+                  <a:schemeClr val="tx1"/>
+                </a:solidFill>
+                <a:latin typeface="+mn-lt"/>
+                <a:ea typeface="+mn-ea"/>
+                <a:cs typeface="+mn-cs"/>
+              </a:defRPr>
+            </a:lvl7pPr>
+            <a:lvl8pPr marL="3200400" algn="l" defTabSz="914400" rtl="0" eaLnBrk="1" latinLnBrk="0" hangingPunct="1">
+              <a:defRPr sz="1800" kern="1200">
+                <a:solidFill>
+                  <a:schemeClr val="tx1"/>
+                </a:solidFill>
+                <a:latin typeface="+mn-lt"/>
+                <a:ea typeface="+mn-ea"/>
+                <a:cs typeface="+mn-cs"/>
+              </a:defRPr>
+            </a:lvl8pPr>
+            <a:lvl9pPr marL="3657600" algn="l" defTabSz="914400" rtl="0" eaLnBrk="1" latinLnBrk="0" hangingPunct="1">
+              <a:defRPr sz="1800" kern="1200">
+                <a:solidFill>
+                  <a:schemeClr val="tx1"/>
+                </a:solidFill>
+                <a:latin typeface="+mn-lt"/>
+                <a:ea typeface="+mn-ea"/>
+                <a:cs typeface="+mn-cs"/>
+              </a:defRPr>
+            </a:lvl9pPr>
+          </a:lstStyle>
+          <a:p>
+            <a:pPr marL="0" indent="0">
+              <a:buNone/>
+            </a:pPr>
+            <a:r>
+              <a:rPr lang="en-US" altLang="en-US" sz="1500" dirty="0">
+                <a:ln/>
+                <a:solidFill>
+                  <a:schemeClr val="accent1"/>
+                </a:solidFill>
+                <a:effectLst>
+                  <a:outerShdw blurRad="38100" dist="25400" dir="5400000" algn="ctr" rotWithShape="0">
+                    <a:srgbClr val="6E747A">
+                      <a:alpha val="43000"/>
+                      <a:alpha val="43000"/>
+                    </a:srgbClr>
+                  </a:outerShdw>
+                </a:effectLst>
+                <a:latin typeface="Arial Regular" panose="020B0704020202020204" charset="0"/>
+                <a:cs typeface="Arial Regular" panose="020B0704020202020204" charset="0"/>
+              </a:rPr>
+              <a:t>dir /b</a:t>
+            </a:r>
+            <a:r>
+              <a:rPr lang="en-US" altLang="en-US" sz="1500" dirty="0">
+                <a:latin typeface="Arial Regular" panose="020B0704020202020204" charset="0"/>
+                <a:cs typeface="Arial Regular" panose="020B0704020202020204" charset="0"/>
+              </a:rPr>
+              <a:t> buộc hệ thống phải hiển thị file sắp bị tác </a:t>
+            </a:r>
+            <a:r>
+              <a:rPr lang="" altLang="en-US" sz="1500" dirty="0">
+                <a:latin typeface="Arial Regular" panose="020B0704020202020204" charset="0"/>
+                <a:cs typeface="Arial Regular" panose="020B0704020202020204" charset="0"/>
+              </a:rPr>
+              <a:t>đ</a:t>
+            </a:r>
+            <a:r>
+              <a:rPr lang="en-US" altLang="en-US" sz="1500" dirty="0">
+                <a:latin typeface="Arial Regular" panose="020B0704020202020204" charset="0"/>
+                <a:cs typeface="Arial Regular" panose="020B0704020202020204" charset="0"/>
+              </a:rPr>
+              <a:t>ộng lên màn hình</a:t>
+            </a:r>
+            <a:r>
+              <a:rPr lang="vi-VN" altLang="en-US" sz="1500" dirty="0">
+                <a:latin typeface="Arial Regular" panose="020B0704020202020204" charset="0"/>
+                <a:cs typeface="Arial Regular" panose="020B0704020202020204" charset="0"/>
+              </a:rPr>
+              <a:t>.</a:t>
+            </a:r>
+          </a:p>
+        </p:txBody>
+      </p:sp>
+      <p:sp>
+        <p:nvSpPr>
+          <p:cNvPr id="6" name="Slide Number Placeholder 0">
+            <a:extLst>
+              <a:ext uri="{FF2B5EF4-FFF2-40B4-BE49-F238E27FC236}">
+                <a16:creationId xmlns:a16="http://schemas.microsoft.com/office/drawing/2014/main" id="{C11F92BE-DB5E-C46B-7A84-165D0E413AA7}"/>
+              </a:ext>
+            </a:extLst>
+          </p:cNvPr>
+          <p:cNvSpPr>
+            <a:spLocks noGrp="1"/>
+          </p:cNvSpPr>
+          <p:nvPr/>
+        </p:nvSpPr>
+        <p:spPr>
+          <a:xfrm>
+            <a:off x="11344592" y="6216777"/>
+            <a:ext cx="457200" cy="274320"/>
+          </a:xfrm>
+          <a:prstGeom prst="rect">
+            <a:avLst/>
+          </a:prstGeom>
+        </p:spPr>
+        <p:txBody>
+          <a:bodyPr lIns="0" tIns="0" rIns="0" bIns="0"/>
+          <a:lstStyle>
+            <a:lvl1pPr marL="0" algn="l" defTabSz="914400" rtl="0" eaLnBrk="1" latinLnBrk="0" hangingPunct="1">
+              <a:defRPr sz="1100" kern="1200">
+                <a:solidFill>
+                  <a:schemeClr val="accent6"/>
+                </a:solidFill>
+                <a:latin typeface="+mn-lt"/>
+                <a:ea typeface="+mn-ea"/>
+                <a:cs typeface="+mn-cs"/>
+              </a:defRPr>
+            </a:lvl1pPr>
+            <a:lvl2pPr marL="457200" algn="l" defTabSz="914400" rtl="0" eaLnBrk="1" latinLnBrk="0" hangingPunct="1">
+              <a:defRPr sz="1800" kern="1200">
+                <a:solidFill>
+                  <a:schemeClr val="tx1"/>
+                </a:solidFill>
+                <a:latin typeface="+mn-lt"/>
+                <a:ea typeface="+mn-ea"/>
+                <a:cs typeface="+mn-cs"/>
+              </a:defRPr>
+            </a:lvl2pPr>
+            <a:lvl3pPr marL="914400" algn="l" defTabSz="914400" rtl="0" eaLnBrk="1" latinLnBrk="0" hangingPunct="1">
+              <a:defRPr sz="1800" kern="1200">
+                <a:solidFill>
+                  <a:schemeClr val="tx1"/>
+                </a:solidFill>
+                <a:latin typeface="+mn-lt"/>
+                <a:ea typeface="+mn-ea"/>
+                <a:cs typeface="+mn-cs"/>
+              </a:defRPr>
+            </a:lvl3pPr>
+            <a:lvl4pPr marL="1371600" algn="l" defTabSz="914400" rtl="0" eaLnBrk="1" latinLnBrk="0" hangingPunct="1">
+              <a:defRPr sz="1800" kern="1200">
+                <a:solidFill>
+                  <a:schemeClr val="tx1"/>
+                </a:solidFill>
+                <a:latin typeface="+mn-lt"/>
+                <a:ea typeface="+mn-ea"/>
+                <a:cs typeface="+mn-cs"/>
+              </a:defRPr>
+            </a:lvl4pPr>
+            <a:lvl5pPr marL="1828800" algn="l" defTabSz="914400" rtl="0" eaLnBrk="1" latinLnBrk="0" hangingPunct="1">
+              <a:defRPr sz="1800" kern="1200">
+                <a:solidFill>
+                  <a:schemeClr val="tx1"/>
+                </a:solidFill>
+                <a:latin typeface="+mn-lt"/>
+                <a:ea typeface="+mn-ea"/>
+                <a:cs typeface="+mn-cs"/>
+              </a:defRPr>
+            </a:lvl5pPr>
+            <a:lvl6pPr marL="2286000" algn="l" defTabSz="914400" rtl="0" eaLnBrk="1" latinLnBrk="0" hangingPunct="1">
+              <a:defRPr sz="1800" kern="1200">
+                <a:solidFill>
+                  <a:schemeClr val="tx1"/>
+                </a:solidFill>
+                <a:latin typeface="+mn-lt"/>
+                <a:ea typeface="+mn-ea"/>
+                <a:cs typeface="+mn-cs"/>
+              </a:defRPr>
+            </a:lvl6pPr>
+            <a:lvl7pPr marL="2743200" algn="l" defTabSz="914400" rtl="0" eaLnBrk="1" latinLnBrk="0" hangingPunct="1">
+              <a:defRPr sz="1800" kern="1200">
+                <a:solidFill>
+                  <a:schemeClr val="tx1"/>
+                </a:solidFill>
+                <a:latin typeface="+mn-lt"/>
+                <a:ea typeface="+mn-ea"/>
+                <a:cs typeface="+mn-cs"/>
+              </a:defRPr>
+            </a:lvl7pPr>
+            <a:lvl8pPr marL="3200400" algn="l" defTabSz="914400" rtl="0" eaLnBrk="1" latinLnBrk="0" hangingPunct="1">
+              <a:defRPr sz="1800" kern="1200">
+                <a:solidFill>
+                  <a:schemeClr val="tx1"/>
+                </a:solidFill>
+                <a:latin typeface="+mn-lt"/>
+                <a:ea typeface="+mn-ea"/>
+                <a:cs typeface="+mn-cs"/>
+              </a:defRPr>
+            </a:lvl8pPr>
+            <a:lvl9pPr marL="3657600" algn="l" defTabSz="914400" rtl="0" eaLnBrk="1" latinLnBrk="0" hangingPunct="1">
+              <a:defRPr sz="1800" kern="1200">
+                <a:solidFill>
+                  <a:schemeClr val="tx1"/>
+                </a:solidFill>
+                <a:latin typeface="+mn-lt"/>
+                <a:ea typeface="+mn-ea"/>
+                <a:cs typeface="+mn-cs"/>
+              </a:defRPr>
+            </a:lvl9pPr>
+          </a:lstStyle>
+          <a:p>
+            <a:pPr algn="r"/>
+            <a:fld id="{F7021451-1387-4CA6-816F-3879F97B5CBC}" type="slidenum">
+              <a:rPr lang="en-US" b="0"/>
+              <a:pPr algn="r"/>
+              <a:t>3</a:t>
+            </a:fld>
+            <a:endParaRPr lang="en-US"/>
+          </a:p>
+        </p:txBody>
+      </p:sp>
+      <p:sp>
+        <p:nvSpPr>
+          <p:cNvPr id="7" name="Chip lệnh">
+            <a:extLst>
+              <a:ext uri="{FF2B5EF4-FFF2-40B4-BE49-F238E27FC236}">
+                <a16:creationId xmlns:a16="http://schemas.microsoft.com/office/drawing/2014/main" id="{636A29EA-0865-E9C4-8D57-2DCA096C0959}"/>
+              </a:ext>
+            </a:extLst>
+          </p:cNvPr>
+          <p:cNvSpPr/>
+          <p:nvPr/>
+        </p:nvSpPr>
+        <p:spPr>
+          <a:xfrm>
+            <a:off x="583882" y="6017895"/>
+            <a:ext cx="2571115" cy="640080"/>
+          </a:xfrm>
+          <a:prstGeom prst="roundRect">
+            <a:avLst>
+              <a:gd name="adj" fmla="val 14286"/>
+            </a:avLst>
+          </a:prstGeom>
+          <a:solidFill>
+            <a:schemeClr val="tx2"/>
+          </a:solidFill>
+        </p:spPr>
+        <p:txBody>
+          <a:bodyPr/>
+          <a:lstStyle>
+            <a:lvl1pPr marL="0" algn="l" defTabSz="914400" rtl="0" eaLnBrk="1" latinLnBrk="0" hangingPunct="1">
+              <a:defRPr sz="1800" kern="1200">
+                <a:solidFill>
+                  <a:schemeClr val="tx1"/>
+                </a:solidFill>
+                <a:latin typeface="+mn-lt"/>
+                <a:ea typeface="+mn-ea"/>
+                <a:cs typeface="+mn-cs"/>
+              </a:defRPr>
+            </a:lvl1pPr>
+            <a:lvl2pPr marL="457200" algn="l" defTabSz="914400" rtl="0" eaLnBrk="1" latinLnBrk="0" hangingPunct="1">
+              <a:defRPr sz="1800" kern="1200">
+                <a:solidFill>
+                  <a:schemeClr val="tx1"/>
+                </a:solidFill>
+                <a:latin typeface="+mn-lt"/>
+                <a:ea typeface="+mn-ea"/>
+                <a:cs typeface="+mn-cs"/>
+              </a:defRPr>
+            </a:lvl2pPr>
+            <a:lvl3pPr marL="914400" algn="l" defTabSz="914400" rtl="0" eaLnBrk="1" latinLnBrk="0" hangingPunct="1">
+              <a:defRPr sz="1800" kern="1200">
+                <a:solidFill>
+                  <a:schemeClr val="tx1"/>
+                </a:solidFill>
+                <a:latin typeface="+mn-lt"/>
+                <a:ea typeface="+mn-ea"/>
+                <a:cs typeface="+mn-cs"/>
+              </a:defRPr>
+            </a:lvl3pPr>
+            <a:lvl4pPr marL="1371600" algn="l" defTabSz="914400" rtl="0" eaLnBrk="1" latinLnBrk="0" hangingPunct="1">
+              <a:defRPr sz="1800" kern="1200">
+                <a:solidFill>
+                  <a:schemeClr val="tx1"/>
+                </a:solidFill>
+                <a:latin typeface="+mn-lt"/>
+                <a:ea typeface="+mn-ea"/>
+                <a:cs typeface="+mn-cs"/>
+              </a:defRPr>
+            </a:lvl4pPr>
+            <a:lvl5pPr marL="1828800" algn="l" defTabSz="914400" rtl="0" eaLnBrk="1" latinLnBrk="0" hangingPunct="1">
+              <a:defRPr sz="1800" kern="1200">
+                <a:solidFill>
+                  <a:schemeClr val="tx1"/>
+                </a:solidFill>
+                <a:latin typeface="+mn-lt"/>
+                <a:ea typeface="+mn-ea"/>
+                <a:cs typeface="+mn-cs"/>
+              </a:defRPr>
+            </a:lvl5pPr>
+            <a:lvl6pPr marL="2286000" algn="l" defTabSz="914400" rtl="0" eaLnBrk="1" latinLnBrk="0" hangingPunct="1">
+              <a:defRPr sz="1800" kern="1200">
+                <a:solidFill>
+                  <a:schemeClr val="tx1"/>
+                </a:solidFill>
+                <a:latin typeface="+mn-lt"/>
+                <a:ea typeface="+mn-ea"/>
+                <a:cs typeface="+mn-cs"/>
+              </a:defRPr>
+            </a:lvl6pPr>
+            <a:lvl7pPr marL="2743200" algn="l" defTabSz="914400" rtl="0" eaLnBrk="1" latinLnBrk="0" hangingPunct="1">
+              <a:defRPr sz="1800" kern="1200">
+                <a:solidFill>
+                  <a:schemeClr val="tx1"/>
+                </a:solidFill>
+                <a:latin typeface="+mn-lt"/>
+                <a:ea typeface="+mn-ea"/>
+                <a:cs typeface="+mn-cs"/>
+              </a:defRPr>
+            </a:lvl7pPr>
+            <a:lvl8pPr marL="3200400" algn="l" defTabSz="914400" rtl="0" eaLnBrk="1" latinLnBrk="0" hangingPunct="1">
+              <a:defRPr sz="1800" kern="1200">
+                <a:solidFill>
+                  <a:schemeClr val="tx1"/>
+                </a:solidFill>
+                <a:latin typeface="+mn-lt"/>
+                <a:ea typeface="+mn-ea"/>
+                <a:cs typeface="+mn-cs"/>
+              </a:defRPr>
+            </a:lvl8pPr>
+            <a:lvl9pPr marL="3657600" algn="l" defTabSz="914400" rtl="0" eaLnBrk="1" latinLnBrk="0" hangingPunct="1">
+              <a:defRPr sz="1800" kern="1200">
+                <a:solidFill>
+                  <a:schemeClr val="tx1"/>
+                </a:solidFill>
+                <a:latin typeface="+mn-lt"/>
+                <a:ea typeface="+mn-ea"/>
+                <a:cs typeface="+mn-cs"/>
+              </a:defRPr>
+            </a:lvl9pPr>
+          </a:lstStyle>
+          <a:p>
+            <a:endParaRPr lang="en-US"/>
+          </a:p>
+        </p:txBody>
+      </p:sp>
+      <p:sp>
+        <p:nvSpPr>
+          <p:cNvPr id="8" name="Text Box 39">
+            <a:extLst>
+              <a:ext uri="{FF2B5EF4-FFF2-40B4-BE49-F238E27FC236}">
+                <a16:creationId xmlns:a16="http://schemas.microsoft.com/office/drawing/2014/main" id="{909D9E0C-2780-195B-AE27-5921236DEBDB}"/>
+              </a:ext>
+            </a:extLst>
+          </p:cNvPr>
+          <p:cNvSpPr txBox="1"/>
+          <p:nvPr/>
+        </p:nvSpPr>
+        <p:spPr>
+          <a:xfrm>
+            <a:off x="898842" y="6092190"/>
+            <a:ext cx="2009775" cy="398780"/>
+          </a:xfrm>
+          <a:prstGeom prst="rect">
+            <a:avLst/>
+          </a:prstGeom>
+          <a:noFill/>
+        </p:spPr>
+        <p:txBody>
+          <a:bodyPr wrap="square" rtlCol="0" anchor="t">
+            <a:spAutoFit/>
+          </a:bodyPr>
+          <a:lstStyle>
+            <a:lvl1pPr marL="0" algn="l" defTabSz="914400" rtl="0" eaLnBrk="1" latinLnBrk="0" hangingPunct="1">
+              <a:defRPr sz="1800" kern="1200">
+                <a:solidFill>
+                  <a:schemeClr val="tx1"/>
+                </a:solidFill>
+                <a:latin typeface="+mn-lt"/>
+                <a:ea typeface="+mn-ea"/>
+                <a:cs typeface="+mn-cs"/>
+              </a:defRPr>
+            </a:lvl1pPr>
+            <a:lvl2pPr marL="457200" algn="l" defTabSz="914400" rtl="0" eaLnBrk="1" latinLnBrk="0" hangingPunct="1">
+              <a:defRPr sz="1800" kern="1200">
+                <a:solidFill>
+                  <a:schemeClr val="tx1"/>
+                </a:solidFill>
+                <a:latin typeface="+mn-lt"/>
+                <a:ea typeface="+mn-ea"/>
+                <a:cs typeface="+mn-cs"/>
+              </a:defRPr>
+            </a:lvl2pPr>
+            <a:lvl3pPr marL="914400" algn="l" defTabSz="914400" rtl="0" eaLnBrk="1" latinLnBrk="0" hangingPunct="1">
+              <a:defRPr sz="1800" kern="1200">
+                <a:solidFill>
+                  <a:schemeClr val="tx1"/>
+                </a:solidFill>
+                <a:latin typeface="+mn-lt"/>
+                <a:ea typeface="+mn-ea"/>
+                <a:cs typeface="+mn-cs"/>
+              </a:defRPr>
+            </a:lvl3pPr>
+            <a:lvl4pPr marL="1371600" algn="l" defTabSz="914400" rtl="0" eaLnBrk="1" latinLnBrk="0" hangingPunct="1">
+              <a:defRPr sz="1800" kern="1200">
+                <a:solidFill>
+                  <a:schemeClr val="tx1"/>
+                </a:solidFill>
+                <a:latin typeface="+mn-lt"/>
+                <a:ea typeface="+mn-ea"/>
+                <a:cs typeface="+mn-cs"/>
+              </a:defRPr>
+            </a:lvl4pPr>
+            <a:lvl5pPr marL="1828800" algn="l" defTabSz="914400" rtl="0" eaLnBrk="1" latinLnBrk="0" hangingPunct="1">
+              <a:defRPr sz="1800" kern="1200">
+                <a:solidFill>
+                  <a:schemeClr val="tx1"/>
+                </a:solidFill>
+                <a:latin typeface="+mn-lt"/>
+                <a:ea typeface="+mn-ea"/>
+                <a:cs typeface="+mn-cs"/>
+              </a:defRPr>
+            </a:lvl5pPr>
+            <a:lvl6pPr marL="2286000" algn="l" defTabSz="914400" rtl="0" eaLnBrk="1" latinLnBrk="0" hangingPunct="1">
+              <a:defRPr sz="1800" kern="1200">
+                <a:solidFill>
+                  <a:schemeClr val="tx1"/>
+                </a:solidFill>
+                <a:latin typeface="+mn-lt"/>
+                <a:ea typeface="+mn-ea"/>
+                <a:cs typeface="+mn-cs"/>
+              </a:defRPr>
+            </a:lvl6pPr>
+            <a:lvl7pPr marL="2743200" algn="l" defTabSz="914400" rtl="0" eaLnBrk="1" latinLnBrk="0" hangingPunct="1">
+              <a:defRPr sz="1800" kern="1200">
+                <a:solidFill>
+                  <a:schemeClr val="tx1"/>
+                </a:solidFill>
+                <a:latin typeface="+mn-lt"/>
+                <a:ea typeface="+mn-ea"/>
+                <a:cs typeface="+mn-cs"/>
+              </a:defRPr>
+            </a:lvl7pPr>
+            <a:lvl8pPr marL="3200400" algn="l" defTabSz="914400" rtl="0" eaLnBrk="1" latinLnBrk="0" hangingPunct="1">
+              <a:defRPr sz="1800" kern="1200">
+                <a:solidFill>
+                  <a:schemeClr val="tx1"/>
+                </a:solidFill>
+                <a:latin typeface="+mn-lt"/>
+                <a:ea typeface="+mn-ea"/>
+                <a:cs typeface="+mn-cs"/>
+              </a:defRPr>
+            </a:lvl8pPr>
+            <a:lvl9pPr marL="3657600" algn="l" defTabSz="914400" rtl="0" eaLnBrk="1" latinLnBrk="0" hangingPunct="1">
+              <a:defRPr sz="1800" kern="1200">
+                <a:solidFill>
+                  <a:schemeClr val="tx1"/>
+                </a:solidFill>
+                <a:latin typeface="+mn-lt"/>
+                <a:ea typeface="+mn-ea"/>
+                <a:cs typeface="+mn-cs"/>
+              </a:defRPr>
+            </a:lvl9pPr>
+          </a:lstStyle>
+          <a:p>
+            <a:r>
+              <a:rPr lang="en-US" sz="2000" b="1" dirty="0">
+                <a:solidFill>
+                  <a:schemeClr val="accent1"/>
+                </a:solidFill>
+                <a:effectLst>
+                  <a:outerShdw blurRad="38100" dist="25400" dir="5400000" algn="ctr" rotWithShape="0">
+                    <a:srgbClr val="6E747A">
+                      <a:alpha val="43000"/>
+                      <a:alpha val="43000"/>
+                    </a:srgbClr>
+                  </a:outerShdw>
+                </a:effectLst>
+                <a:latin typeface="+mj-lt"/>
+                <a:ea typeface="+mj-lt"/>
+                <a:cs typeface="+mj-lt"/>
+                <a:sym typeface="+mn-ea"/>
+              </a:rPr>
+              <a:t>auto_report.</a:t>
+            </a:r>
+            <a:r>
+              <a:rPr lang="vi-VN" altLang="en-US" sz="2000" b="1" dirty="0">
+                <a:solidFill>
+                  <a:schemeClr val="accent1"/>
+                </a:solidFill>
+                <a:effectLst>
+                  <a:outerShdw blurRad="38100" dist="25400" dir="5400000" algn="ctr" rotWithShape="0">
+                    <a:srgbClr val="6E747A">
+                      <a:alpha val="43000"/>
+                      <a:alpha val="43000"/>
+                    </a:srgbClr>
+                  </a:outerShdw>
+                </a:effectLst>
+                <a:latin typeface="+mj-lt"/>
+                <a:ea typeface="+mj-lt"/>
+                <a:cs typeface="+mj-lt"/>
+                <a:sym typeface="+mn-ea"/>
+              </a:rPr>
+              <a:t>sh</a:t>
+            </a:r>
+          </a:p>
+        </p:txBody>
+      </p:sp>
+      <p:sp>
+        <p:nvSpPr>
+          <p:cNvPr id="9" name="Text Box 40">
+            <a:extLst>
+              <a:ext uri="{FF2B5EF4-FFF2-40B4-BE49-F238E27FC236}">
+                <a16:creationId xmlns:a16="http://schemas.microsoft.com/office/drawing/2014/main" id="{D4D0203C-1FD3-61E7-4E2A-8B534826A064}"/>
+              </a:ext>
+            </a:extLst>
+          </p:cNvPr>
+          <p:cNvSpPr txBox="1"/>
+          <p:nvPr/>
+        </p:nvSpPr>
+        <p:spPr>
+          <a:xfrm>
+            <a:off x="502602" y="1536065"/>
+            <a:ext cx="6717665" cy="3969385"/>
+          </a:xfrm>
+          <a:prstGeom prst="rect">
+            <a:avLst/>
+          </a:prstGeom>
+        </p:spPr>
+        <p:txBody>
+          <a:bodyPr wrap="square">
+            <a:spAutoFit/>
+          </a:bodyPr>
+          <a:lstStyle>
+            <a:lvl1pPr marL="0" algn="l" defTabSz="914400" rtl="0" eaLnBrk="1" latinLnBrk="0" hangingPunct="1">
+              <a:defRPr sz="1800" kern="1200">
+                <a:solidFill>
+                  <a:schemeClr val="tx1"/>
+                </a:solidFill>
+                <a:latin typeface="+mn-lt"/>
+                <a:ea typeface="+mn-ea"/>
+                <a:cs typeface="+mn-cs"/>
+              </a:defRPr>
+            </a:lvl1pPr>
+            <a:lvl2pPr marL="457200" algn="l" defTabSz="914400" rtl="0" eaLnBrk="1" latinLnBrk="0" hangingPunct="1">
+              <a:defRPr sz="1800" kern="1200">
+                <a:solidFill>
+                  <a:schemeClr val="tx1"/>
+                </a:solidFill>
+                <a:latin typeface="+mn-lt"/>
+                <a:ea typeface="+mn-ea"/>
+                <a:cs typeface="+mn-cs"/>
+              </a:defRPr>
+            </a:lvl2pPr>
+            <a:lvl3pPr marL="914400" algn="l" defTabSz="914400" rtl="0" eaLnBrk="1" latinLnBrk="0" hangingPunct="1">
+              <a:defRPr sz="1800" kern="1200">
+                <a:solidFill>
+                  <a:schemeClr val="tx1"/>
+                </a:solidFill>
+                <a:latin typeface="+mn-lt"/>
+                <a:ea typeface="+mn-ea"/>
+                <a:cs typeface="+mn-cs"/>
+              </a:defRPr>
+            </a:lvl3pPr>
+            <a:lvl4pPr marL="1371600" algn="l" defTabSz="914400" rtl="0" eaLnBrk="1" latinLnBrk="0" hangingPunct="1">
+              <a:defRPr sz="1800" kern="1200">
+                <a:solidFill>
+                  <a:schemeClr val="tx1"/>
+                </a:solidFill>
+                <a:latin typeface="+mn-lt"/>
+                <a:ea typeface="+mn-ea"/>
+                <a:cs typeface="+mn-cs"/>
+              </a:defRPr>
+            </a:lvl4pPr>
+            <a:lvl5pPr marL="1828800" algn="l" defTabSz="914400" rtl="0" eaLnBrk="1" latinLnBrk="0" hangingPunct="1">
+              <a:defRPr sz="1800" kern="1200">
+                <a:solidFill>
+                  <a:schemeClr val="tx1"/>
+                </a:solidFill>
+                <a:latin typeface="+mn-lt"/>
+                <a:ea typeface="+mn-ea"/>
+                <a:cs typeface="+mn-cs"/>
+              </a:defRPr>
+            </a:lvl5pPr>
+            <a:lvl6pPr marL="2286000" algn="l" defTabSz="914400" rtl="0" eaLnBrk="1" latinLnBrk="0" hangingPunct="1">
+              <a:defRPr sz="1800" kern="1200">
+                <a:solidFill>
+                  <a:schemeClr val="tx1"/>
+                </a:solidFill>
+                <a:latin typeface="+mn-lt"/>
+                <a:ea typeface="+mn-ea"/>
+                <a:cs typeface="+mn-cs"/>
+              </a:defRPr>
+            </a:lvl6pPr>
+            <a:lvl7pPr marL="2743200" algn="l" defTabSz="914400" rtl="0" eaLnBrk="1" latinLnBrk="0" hangingPunct="1">
+              <a:defRPr sz="1800" kern="1200">
+                <a:solidFill>
+                  <a:schemeClr val="tx1"/>
+                </a:solidFill>
+                <a:latin typeface="+mn-lt"/>
+                <a:ea typeface="+mn-ea"/>
+                <a:cs typeface="+mn-cs"/>
+              </a:defRPr>
+            </a:lvl7pPr>
+            <a:lvl8pPr marL="3200400" algn="l" defTabSz="914400" rtl="0" eaLnBrk="1" latinLnBrk="0" hangingPunct="1">
+              <a:defRPr sz="1800" kern="1200">
+                <a:solidFill>
+                  <a:schemeClr val="tx1"/>
+                </a:solidFill>
+                <a:latin typeface="+mn-lt"/>
+                <a:ea typeface="+mn-ea"/>
+                <a:cs typeface="+mn-cs"/>
+              </a:defRPr>
+            </a:lvl8pPr>
+            <a:lvl9pPr marL="3657600" algn="l" defTabSz="914400" rtl="0" eaLnBrk="1" latinLnBrk="0" hangingPunct="1">
+              <a:defRPr sz="1800" kern="1200">
+                <a:solidFill>
+                  <a:schemeClr val="tx1"/>
+                </a:solidFill>
+                <a:latin typeface="+mn-lt"/>
+                <a:ea typeface="+mn-ea"/>
+                <a:cs typeface="+mn-cs"/>
+              </a:defRPr>
+            </a:lvl9pPr>
+          </a:lstStyle>
+          <a:p>
+            <a:pPr marL="0" indent="0"/>
+            <a:r>
+              <a:rPr lang="en-US" altLang="zh-CN" b="1" i="0">
+                <a:solidFill>
+                  <a:srgbClr val="FFFFFF"/>
+                </a:solidFill>
+                <a:latin typeface="Courier New Bold" panose="02070609020205020404" charset="0"/>
+                <a:ea typeface="-webkit-standard"/>
+                <a:cs typeface="Courier New Bold" panose="02070609020205020404" charset="0"/>
+              </a:rPr>
+              <a:t>echo [AUDIT] File chuan bi xoa: </a:t>
+            </a:r>
+          </a:p>
+          <a:p>
+            <a:pPr marL="0" indent="0"/>
+            <a:endParaRPr lang="en-US" altLang="zh-CN" b="1" i="0">
+              <a:solidFill>
+                <a:srgbClr val="FFFFFF"/>
+              </a:solidFill>
+              <a:latin typeface="Courier New Bold" panose="02070609020205020404" charset="0"/>
+              <a:ea typeface="-webkit-standard"/>
+              <a:cs typeface="Courier New Bold" panose="02070609020205020404" charset="0"/>
+            </a:endParaRPr>
+          </a:p>
+          <a:p>
+            <a:pPr marL="0" indent="0"/>
+            <a:r>
+              <a:rPr lang="en-US" altLang="zh-CN" b="1" i="0">
+                <a:solidFill>
+                  <a:srgbClr val="FFFFFF"/>
+                </a:solidFill>
+                <a:latin typeface="Courier New Bold" panose="02070609020205020404" charset="0"/>
+                <a:ea typeface="-webkit-standard"/>
+                <a:cs typeface="Courier New Bold" panose="02070609020205020404" charset="0"/>
+              </a:rPr>
+              <a:t>dir /b "data\log-he-thong.log" </a:t>
+            </a:r>
+          </a:p>
+          <a:p>
+            <a:pPr marL="0" indent="0"/>
+            <a:endParaRPr lang="en-US" altLang="zh-CN" b="1" i="0">
+              <a:solidFill>
+                <a:srgbClr val="FFFFFF"/>
+              </a:solidFill>
+              <a:latin typeface="Courier New Bold" panose="02070609020205020404" charset="0"/>
+              <a:ea typeface="-webkit-standard"/>
+              <a:cs typeface="Courier New Bold" panose="02070609020205020404" charset="0"/>
+            </a:endParaRPr>
+          </a:p>
+          <a:p>
+            <a:pPr marL="0" indent="0"/>
+            <a:r>
+              <a:rPr lang="en-US" altLang="zh-CN" b="1" i="0">
+                <a:solidFill>
+                  <a:srgbClr val="FFFFFF"/>
+                </a:solidFill>
+                <a:latin typeface="Courier New Bold" panose="02070609020205020404" charset="0"/>
+                <a:ea typeface="-webkit-standard"/>
+                <a:cs typeface="Courier New Bold" panose="02070609020205020404" charset="0"/>
+              </a:rPr>
+              <a:t>set /p "ans=</a:t>
+            </a:r>
+            <a:r>
+              <a:rPr lang="vi-VN" altLang="en-US" b="1" i="0">
+                <a:solidFill>
+                  <a:srgbClr val="FFFFFF"/>
+                </a:solidFill>
+                <a:latin typeface="Courier New Bold" panose="02070609020205020404" charset="0"/>
+                <a:ea typeface="-webkit-standard"/>
+                <a:cs typeface="Courier New Bold" panose="02070609020205020404" charset="0"/>
+              </a:rPr>
+              <a:t>Xac nhan xoa</a:t>
+            </a:r>
+            <a:r>
+              <a:rPr lang="en-US" altLang="zh-CN" b="1" i="0">
+                <a:solidFill>
+                  <a:srgbClr val="FFFFFF"/>
+                </a:solidFill>
+                <a:latin typeface="Courier New Bold" panose="02070609020205020404" charset="0"/>
+                <a:ea typeface="-webkit-standard"/>
+                <a:cs typeface="Courier New Bold" panose="02070609020205020404" charset="0"/>
+              </a:rPr>
+              <a:t>? (Y/N): " </a:t>
+            </a:r>
+          </a:p>
+          <a:p>
+            <a:pPr marL="0" indent="0"/>
+            <a:endParaRPr lang="en-US" altLang="zh-CN" b="1" i="0">
+              <a:solidFill>
+                <a:srgbClr val="FFFFFF"/>
+              </a:solidFill>
+              <a:latin typeface="Courier New Bold" panose="02070609020205020404" charset="0"/>
+              <a:ea typeface="-webkit-standard"/>
+              <a:cs typeface="Courier New Bold" panose="02070609020205020404" charset="0"/>
+            </a:endParaRPr>
+          </a:p>
+          <a:p>
+            <a:pPr marL="0" indent="0"/>
+            <a:r>
+              <a:rPr lang="en-US" altLang="zh-CN" b="1" i="0">
+                <a:solidFill>
+                  <a:srgbClr val="FFFFFF"/>
+                </a:solidFill>
+                <a:latin typeface="Courier New Bold" panose="02070609020205020404" charset="0"/>
+                <a:ea typeface="-webkit-standard"/>
+                <a:cs typeface="Courier New Bold" panose="02070609020205020404" charset="0"/>
+              </a:rPr>
+              <a:t>if /I "%ans%"=="Y" ( </a:t>
+            </a:r>
+          </a:p>
+          <a:p>
+            <a:pPr marL="0" indent="457200"/>
+            <a:r>
+              <a:rPr lang="en-US" altLang="zh-CN" b="1" i="0">
+                <a:solidFill>
+                  <a:srgbClr val="FFFFFF"/>
+                </a:solidFill>
+                <a:latin typeface="Courier New Bold" panose="02070609020205020404" charset="0"/>
+                <a:ea typeface="-webkit-standard"/>
+                <a:cs typeface="Courier New Bold" panose="02070609020205020404" charset="0"/>
+              </a:rPr>
+              <a:t>del "data\log-he-thong.log" </a:t>
+            </a:r>
+          </a:p>
+          <a:p>
+            <a:pPr marL="0" indent="457200"/>
+            <a:r>
+              <a:rPr lang="en-US" altLang="zh-CN" b="1" i="0">
+                <a:solidFill>
+                  <a:srgbClr val="FFFFFF"/>
+                </a:solidFill>
+                <a:latin typeface="Courier New Bold" panose="02070609020205020404" charset="0"/>
+                <a:ea typeface="-webkit-standard"/>
+                <a:cs typeface="Courier New Bold" panose="02070609020205020404" charset="0"/>
+              </a:rPr>
+              <a:t>echo [OK] Da xoa xong. </a:t>
+            </a:r>
+          </a:p>
+          <a:p>
+            <a:pPr marL="0" indent="457200"/>
+            <a:r>
+              <a:rPr lang="en-US" altLang="zh-CN" b="1" i="0">
+                <a:solidFill>
+                  <a:srgbClr val="FFFFFF"/>
+                </a:solidFill>
+                <a:latin typeface="Courier New Bold" panose="02070609020205020404" charset="0"/>
+                <a:ea typeface="-webkit-standard"/>
+                <a:cs typeface="Courier New Bold" panose="02070609020205020404" charset="0"/>
+              </a:rPr>
+              <a:t>)</a:t>
+            </a:r>
+            <a:r>
+              <a:rPr lang="vi-VN" altLang="en-US" b="1" i="0">
+                <a:solidFill>
+                  <a:srgbClr val="FFFFFF"/>
+                </a:solidFill>
+                <a:latin typeface="Courier New Bold" panose="02070609020205020404" charset="0"/>
+                <a:ea typeface="-webkit-standard"/>
+                <a:cs typeface="Courier New Bold" panose="02070609020205020404" charset="0"/>
+              </a:rPr>
+              <a:t> </a:t>
+            </a:r>
+            <a:r>
+              <a:rPr lang="en-US" altLang="zh-CN" b="1">
+                <a:solidFill>
+                  <a:srgbClr val="FFFFFF"/>
+                </a:solidFill>
+                <a:latin typeface="Courier New Bold" panose="02070609020205020404" charset="0"/>
+                <a:ea typeface="-webkit-standard"/>
+                <a:cs typeface="Courier New Bold" panose="02070609020205020404" charset="0"/>
+                <a:sym typeface="+mn-ea"/>
+              </a:rPr>
+              <a:t>else ( </a:t>
+            </a:r>
+          </a:p>
+          <a:p>
+            <a:pPr marL="457200" lvl="1" indent="457200"/>
+            <a:r>
+              <a:rPr lang="en-US" altLang="zh-CN" b="1">
+                <a:solidFill>
+                  <a:srgbClr val="FFFFFF"/>
+                </a:solidFill>
+                <a:latin typeface="Courier New Bold" panose="02070609020205020404" charset="0"/>
+                <a:ea typeface="-webkit-standard"/>
+                <a:cs typeface="Courier New Bold" panose="02070609020205020404" charset="0"/>
+                <a:sym typeface="+mn-ea"/>
+              </a:rPr>
+              <a:t>echo [HUY] Giu lai file.</a:t>
+            </a:r>
+          </a:p>
+          <a:p>
+            <a:pPr marL="457200" lvl="1" indent="457200"/>
+            <a:r>
+              <a:rPr lang="en-US" altLang="zh-CN" b="1">
+                <a:solidFill>
+                  <a:srgbClr val="FFFFFF"/>
+                </a:solidFill>
+                <a:latin typeface="Courier New Bold" panose="02070609020205020404" charset="0"/>
+                <a:ea typeface="-webkit-standard"/>
+                <a:cs typeface="Courier New Bold" panose="02070609020205020404" charset="0"/>
+                <a:sym typeface="+mn-ea"/>
+              </a:rPr>
+              <a:t>) </a:t>
+            </a:r>
+          </a:p>
+          <a:p>
+            <a:pPr marL="457200" lvl="1" indent="457200"/>
+            <a:r>
+              <a:rPr lang="en-US" altLang="zh-CN" b="1">
+                <a:solidFill>
+                  <a:srgbClr val="FFFFFF"/>
+                </a:solidFill>
+                <a:latin typeface="Courier New Bold" panose="02070609020205020404" charset="0"/>
+                <a:ea typeface="-webkit-standard"/>
+                <a:cs typeface="Courier New Bold" panose="02070609020205020404" charset="0"/>
+                <a:sym typeface="+mn-ea"/>
+              </a:rPr>
+              <a:t>pause</a:t>
+            </a:r>
+            <a:endParaRPr lang="en-US" altLang="zh-CN" b="1" i="0">
+              <a:solidFill>
+                <a:srgbClr val="FFFFFF"/>
+              </a:solidFill>
+              <a:latin typeface="Courier New Bold" panose="02070609020205020404" charset="0"/>
+              <a:ea typeface="-webkit-standard"/>
+              <a:cs typeface="Courier New Bold" panose="02070609020205020404" charset="0"/>
+            </a:endParaRPr>
+          </a:p>
+          <a:p>
+            <a:pPr marL="0" indent="457200"/>
+            <a:endParaRPr lang="vi-VN" altLang="en-US" b="1" i="0">
+              <a:solidFill>
+                <a:srgbClr val="FFFFFF"/>
+              </a:solidFill>
+              <a:latin typeface="Courier New Bold" panose="02070609020205020404" charset="0"/>
+              <a:ea typeface="-webkit-standard"/>
+              <a:cs typeface="Courier New Bold" panose="02070609020205020404" charset="0"/>
+            </a:endParaRPr>
+          </a:p>
+        </p:txBody>
+      </p:sp>
+      <p:sp>
+        <p:nvSpPr>
+          <p:cNvPr id="10" name="Thẻ ghi chú 1">
+            <a:extLst>
+              <a:ext uri="{FF2B5EF4-FFF2-40B4-BE49-F238E27FC236}">
+                <a16:creationId xmlns:a16="http://schemas.microsoft.com/office/drawing/2014/main" id="{DFF8D271-73B2-203A-8AF2-9A33FEF22CE8}"/>
+              </a:ext>
+            </a:extLst>
+          </p:cNvPr>
+          <p:cNvSpPr/>
+          <p:nvPr/>
+        </p:nvSpPr>
+        <p:spPr>
+          <a:xfrm>
+            <a:off x="8147367" y="2439670"/>
+            <a:ext cx="3657600" cy="398780"/>
+          </a:xfrm>
+          <a:prstGeom prst="roundRect">
+            <a:avLst>
+              <a:gd name="adj" fmla="val 4348"/>
+            </a:avLst>
+          </a:prstGeom>
+        </p:spPr>
+        <p:style>
+          <a:lnRef idx="2">
+            <a:schemeClr val="accent1"/>
+          </a:lnRef>
+          <a:fillRef idx="0">
+            <a:srgbClr val="FFFFFF"/>
+          </a:fillRef>
+          <a:effectRef idx="0">
+            <a:srgbClr val="FFFFFF"/>
+          </a:effectRef>
+          <a:fontRef idx="minor">
+            <a:schemeClr val="tx1"/>
+          </a:fontRef>
+        </p:style>
+        <p:txBody>
+          <a:bodyPr/>
+          <a:lstStyle>
+            <a:lvl1pPr marL="0" algn="l" defTabSz="914400" rtl="0" eaLnBrk="1" latinLnBrk="0" hangingPunct="1">
+              <a:defRPr sz="1800" kern="1200">
+                <a:solidFill>
+                  <a:schemeClr val="tx1"/>
+                </a:solidFill>
+                <a:latin typeface="+mn-lt"/>
+                <a:ea typeface="+mn-ea"/>
+                <a:cs typeface="+mn-cs"/>
+              </a:defRPr>
+            </a:lvl1pPr>
+            <a:lvl2pPr marL="457200" algn="l" defTabSz="914400" rtl="0" eaLnBrk="1" latinLnBrk="0" hangingPunct="1">
+              <a:defRPr sz="1800" kern="1200">
+                <a:solidFill>
+                  <a:schemeClr val="tx1"/>
+                </a:solidFill>
+                <a:latin typeface="+mn-lt"/>
+                <a:ea typeface="+mn-ea"/>
+                <a:cs typeface="+mn-cs"/>
+              </a:defRPr>
+            </a:lvl2pPr>
+            <a:lvl3pPr marL="914400" algn="l" defTabSz="914400" rtl="0" eaLnBrk="1" latinLnBrk="0" hangingPunct="1">
+              <a:defRPr sz="1800" kern="1200">
+                <a:solidFill>
+                  <a:schemeClr val="tx1"/>
+                </a:solidFill>
+                <a:latin typeface="+mn-lt"/>
+                <a:ea typeface="+mn-ea"/>
+                <a:cs typeface="+mn-cs"/>
+              </a:defRPr>
+            </a:lvl3pPr>
+            <a:lvl4pPr marL="1371600" algn="l" defTabSz="914400" rtl="0" eaLnBrk="1" latinLnBrk="0" hangingPunct="1">
+              <a:defRPr sz="1800" kern="1200">
+                <a:solidFill>
+                  <a:schemeClr val="tx1"/>
+                </a:solidFill>
+                <a:latin typeface="+mn-lt"/>
+                <a:ea typeface="+mn-ea"/>
+                <a:cs typeface="+mn-cs"/>
+              </a:defRPr>
+            </a:lvl4pPr>
+            <a:lvl5pPr marL="1828800" algn="l" defTabSz="914400" rtl="0" eaLnBrk="1" latinLnBrk="0" hangingPunct="1">
+              <a:defRPr sz="1800" kern="1200">
+                <a:solidFill>
+                  <a:schemeClr val="tx1"/>
+                </a:solidFill>
+                <a:latin typeface="+mn-lt"/>
+                <a:ea typeface="+mn-ea"/>
+                <a:cs typeface="+mn-cs"/>
+              </a:defRPr>
+            </a:lvl5pPr>
+            <a:lvl6pPr marL="2286000" algn="l" defTabSz="914400" rtl="0" eaLnBrk="1" latinLnBrk="0" hangingPunct="1">
+              <a:defRPr sz="1800" kern="1200">
+                <a:solidFill>
+                  <a:schemeClr val="tx1"/>
+                </a:solidFill>
+                <a:latin typeface="+mn-lt"/>
+                <a:ea typeface="+mn-ea"/>
+                <a:cs typeface="+mn-cs"/>
+              </a:defRPr>
+            </a:lvl6pPr>
+            <a:lvl7pPr marL="2743200" algn="l" defTabSz="914400" rtl="0" eaLnBrk="1" latinLnBrk="0" hangingPunct="1">
+              <a:defRPr sz="1800" kern="1200">
+                <a:solidFill>
+                  <a:schemeClr val="tx1"/>
+                </a:solidFill>
+                <a:latin typeface="+mn-lt"/>
+                <a:ea typeface="+mn-ea"/>
+                <a:cs typeface="+mn-cs"/>
+              </a:defRPr>
+            </a:lvl7pPr>
+            <a:lvl8pPr marL="3200400" algn="l" defTabSz="914400" rtl="0" eaLnBrk="1" latinLnBrk="0" hangingPunct="1">
+              <a:defRPr sz="1800" kern="1200">
+                <a:solidFill>
+                  <a:schemeClr val="tx1"/>
+                </a:solidFill>
+                <a:latin typeface="+mn-lt"/>
+                <a:ea typeface="+mn-ea"/>
+                <a:cs typeface="+mn-cs"/>
+              </a:defRPr>
+            </a:lvl8pPr>
+            <a:lvl9pPr marL="3657600" algn="l" defTabSz="914400" rtl="0" eaLnBrk="1" latinLnBrk="0" hangingPunct="1">
+              <a:defRPr sz="1800" kern="1200">
+                <a:solidFill>
+                  <a:schemeClr val="tx1"/>
+                </a:solidFill>
+                <a:latin typeface="+mn-lt"/>
+                <a:ea typeface="+mn-ea"/>
+                <a:cs typeface="+mn-cs"/>
+              </a:defRPr>
+            </a:lvl9pPr>
+          </a:lstStyle>
+          <a:p>
+            <a:pPr marL="0" indent="0">
+              <a:buNone/>
+            </a:pPr>
+            <a:r>
+              <a:rPr lang="vi-VN" altLang="en-US" sz="1500" dirty="0">
+                <a:solidFill>
+                  <a:schemeClr val="accent1"/>
+                </a:solidFill>
+                <a:effectLst>
+                  <a:outerShdw blurRad="38100" dist="25400" dir="5400000" algn="ctr" rotWithShape="0">
+                    <a:srgbClr val="6E747A">
+                      <a:alpha val="43000"/>
+                      <a:alpha val="43000"/>
+                    </a:srgbClr>
+                  </a:outerShdw>
+                </a:effectLst>
+                <a:latin typeface="+mn-ea"/>
+                <a:cs typeface="+mn-ea"/>
+                <a:sym typeface="+mn-ea"/>
+              </a:rPr>
+              <a:t>set</a:t>
+            </a:r>
+            <a:r>
+              <a:rPr lang="en-US" altLang="en-US" sz="1500" dirty="0">
+                <a:solidFill>
+                  <a:schemeClr val="accent1"/>
+                </a:solidFill>
+                <a:effectLst>
+                  <a:outerShdw blurRad="38100" dist="25400" dir="5400000" algn="ctr" rotWithShape="0">
+                    <a:srgbClr val="6E747A">
+                      <a:alpha val="43000"/>
+                      <a:alpha val="43000"/>
+                    </a:srgbClr>
+                  </a:outerShdw>
+                </a:effectLst>
+                <a:latin typeface="+mn-ea"/>
+                <a:cs typeface="+mn-ea"/>
+                <a:sym typeface="+mn-ea"/>
+              </a:rPr>
+              <a:t> /</a:t>
+            </a:r>
+            <a:r>
+              <a:rPr lang="vi-VN" altLang="en-US" sz="1500" dirty="0">
+                <a:solidFill>
+                  <a:schemeClr val="accent1"/>
+                </a:solidFill>
+                <a:effectLst>
+                  <a:outerShdw blurRad="38100" dist="25400" dir="5400000" algn="ctr" rotWithShape="0">
+                    <a:srgbClr val="6E747A">
+                      <a:alpha val="43000"/>
+                      <a:alpha val="43000"/>
+                    </a:srgbClr>
+                  </a:outerShdw>
+                </a:effectLst>
+                <a:latin typeface="+mn-ea"/>
+                <a:cs typeface="+mn-ea"/>
+                <a:sym typeface="+mn-ea"/>
+              </a:rPr>
+              <a:t>p </a:t>
+            </a:r>
+            <a:r>
+              <a:rPr lang="vi-VN" altLang="en-US" sz="1500">
+                <a:latin typeface="+mn-ea"/>
+                <a:cs typeface="+mn-ea"/>
+              </a:rPr>
+              <a:t>hỏi ý kiến (Y-có, N-không).</a:t>
+            </a:r>
+          </a:p>
+        </p:txBody>
+      </p:sp>
+      <p:pic>
+        <p:nvPicPr>
+          <p:cNvPr id="11" name="Picture 10" descr="Screenshot 2026-10-27 at 03.54.47">
+            <a:extLst>
+              <a:ext uri="{FF2B5EF4-FFF2-40B4-BE49-F238E27FC236}">
+                <a16:creationId xmlns:a16="http://schemas.microsoft.com/office/drawing/2014/main" id="{8D125C0B-F722-1CAF-EFFA-062C9A1CC5B4}"/>
+              </a:ext>
+            </a:extLst>
+          </p:cNvPr>
+          <p:cNvPicPr>
+            <a:picLocks noChangeAspect="1"/>
+          </p:cNvPicPr>
+          <p:nvPr/>
+        </p:nvPicPr>
+        <p:blipFill>
+          <a:blip r:embed="rId2"/>
+          <a:stretch>
+            <a:fillRect/>
+          </a:stretch>
+        </p:blipFill>
+        <p:spPr>
+          <a:xfrm>
+            <a:off x="8408987" y="4255135"/>
+            <a:ext cx="3302000" cy="1993900"/>
+          </a:xfrm>
+          <a:prstGeom prst="rect">
+            <a:avLst/>
+          </a:prstGeom>
+        </p:spPr>
+      </p:pic>
+      <p:sp>
+        <p:nvSpPr>
+          <p:cNvPr id="12" name="Text Box 51">
+            <a:extLst>
+              <a:ext uri="{FF2B5EF4-FFF2-40B4-BE49-F238E27FC236}">
+                <a16:creationId xmlns:a16="http://schemas.microsoft.com/office/drawing/2014/main" id="{905BB6F0-9BA0-C191-C139-A47C16EBF1A8}"/>
+              </a:ext>
+            </a:extLst>
+          </p:cNvPr>
+          <p:cNvSpPr txBox="1"/>
+          <p:nvPr/>
+        </p:nvSpPr>
+        <p:spPr>
+          <a:xfrm>
+            <a:off x="7929562" y="3559175"/>
+            <a:ext cx="1170305" cy="553085"/>
+          </a:xfrm>
+          <a:prstGeom prst="rect">
+            <a:avLst/>
+          </a:prstGeom>
+          <a:noFill/>
+        </p:spPr>
+        <p:txBody>
+          <a:bodyPr wrap="square" rtlCol="0" anchor="t">
+            <a:spAutoFit/>
+          </a:bodyPr>
+          <a:lstStyle>
+            <a:lvl1pPr marL="0" algn="l" defTabSz="914400" rtl="0" eaLnBrk="1" latinLnBrk="0" hangingPunct="1">
+              <a:defRPr sz="1800" kern="1200">
+                <a:solidFill>
+                  <a:schemeClr val="tx1"/>
+                </a:solidFill>
+                <a:latin typeface="+mn-lt"/>
+                <a:ea typeface="+mn-ea"/>
+                <a:cs typeface="+mn-cs"/>
+              </a:defRPr>
+            </a:lvl1pPr>
+            <a:lvl2pPr marL="457200" algn="l" defTabSz="914400" rtl="0" eaLnBrk="1" latinLnBrk="0" hangingPunct="1">
+              <a:defRPr sz="1800" kern="1200">
+                <a:solidFill>
+                  <a:schemeClr val="tx1"/>
+                </a:solidFill>
+                <a:latin typeface="+mn-lt"/>
+                <a:ea typeface="+mn-ea"/>
+                <a:cs typeface="+mn-cs"/>
+              </a:defRPr>
+            </a:lvl2pPr>
+            <a:lvl3pPr marL="914400" algn="l" defTabSz="914400" rtl="0" eaLnBrk="1" latinLnBrk="0" hangingPunct="1">
+              <a:defRPr sz="1800" kern="1200">
+                <a:solidFill>
+                  <a:schemeClr val="tx1"/>
+                </a:solidFill>
+                <a:latin typeface="+mn-lt"/>
+                <a:ea typeface="+mn-ea"/>
+                <a:cs typeface="+mn-cs"/>
+              </a:defRPr>
+            </a:lvl3pPr>
+            <a:lvl4pPr marL="1371600" algn="l" defTabSz="914400" rtl="0" eaLnBrk="1" latinLnBrk="0" hangingPunct="1">
+              <a:defRPr sz="1800" kern="1200">
+                <a:solidFill>
+                  <a:schemeClr val="tx1"/>
+                </a:solidFill>
+                <a:latin typeface="+mn-lt"/>
+                <a:ea typeface="+mn-ea"/>
+                <a:cs typeface="+mn-cs"/>
+              </a:defRPr>
+            </a:lvl4pPr>
+            <a:lvl5pPr marL="1828800" algn="l" defTabSz="914400" rtl="0" eaLnBrk="1" latinLnBrk="0" hangingPunct="1">
+              <a:defRPr sz="1800" kern="1200">
+                <a:solidFill>
+                  <a:schemeClr val="tx1"/>
+                </a:solidFill>
+                <a:latin typeface="+mn-lt"/>
+                <a:ea typeface="+mn-ea"/>
+                <a:cs typeface="+mn-cs"/>
+              </a:defRPr>
+            </a:lvl5pPr>
+            <a:lvl6pPr marL="2286000" algn="l" defTabSz="914400" rtl="0" eaLnBrk="1" latinLnBrk="0" hangingPunct="1">
+              <a:defRPr sz="1800" kern="1200">
+                <a:solidFill>
+                  <a:schemeClr val="tx1"/>
+                </a:solidFill>
+                <a:latin typeface="+mn-lt"/>
+                <a:ea typeface="+mn-ea"/>
+                <a:cs typeface="+mn-cs"/>
+              </a:defRPr>
+            </a:lvl6pPr>
+            <a:lvl7pPr marL="2743200" algn="l" defTabSz="914400" rtl="0" eaLnBrk="1" latinLnBrk="0" hangingPunct="1">
+              <a:defRPr sz="1800" kern="1200">
+                <a:solidFill>
+                  <a:schemeClr val="tx1"/>
+                </a:solidFill>
+                <a:latin typeface="+mn-lt"/>
+                <a:ea typeface="+mn-ea"/>
+                <a:cs typeface="+mn-cs"/>
+              </a:defRPr>
+            </a:lvl7pPr>
+            <a:lvl8pPr marL="3200400" algn="l" defTabSz="914400" rtl="0" eaLnBrk="1" latinLnBrk="0" hangingPunct="1">
+              <a:defRPr sz="1800" kern="1200">
+                <a:solidFill>
+                  <a:schemeClr val="tx1"/>
+                </a:solidFill>
+                <a:latin typeface="+mn-lt"/>
+                <a:ea typeface="+mn-ea"/>
+                <a:cs typeface="+mn-cs"/>
+              </a:defRPr>
+            </a:lvl8pPr>
+            <a:lvl9pPr marL="3657600" algn="l" defTabSz="914400" rtl="0" eaLnBrk="1" latinLnBrk="0" hangingPunct="1">
+              <a:defRPr sz="1800" kern="1200">
+                <a:solidFill>
+                  <a:schemeClr val="tx1"/>
+                </a:solidFill>
+                <a:latin typeface="+mn-lt"/>
+                <a:ea typeface="+mn-ea"/>
+                <a:cs typeface="+mn-cs"/>
+              </a:defRPr>
+            </a:lvl9pPr>
+          </a:lstStyle>
+          <a:p>
+            <a:pPr marL="0" indent="0" algn="l">
+              <a:buNone/>
+            </a:pPr>
+            <a:r>
+              <a:rPr lang="vi-VN" altLang="en-US" sz="3000" b="1" dirty="0">
+                <a:sym typeface="+mn-ea"/>
+              </a:rPr>
+              <a:t>CMD</a:t>
+            </a:r>
+          </a:p>
+        </p:txBody>
+      </p:sp>
+    </p:spTree>
+    <p:extLst>
+      <p:ext uri="{BB962C8B-B14F-4D97-AF65-F5344CB8AC3E}">
+        <p14:creationId xmlns:p14="http://schemas.microsoft.com/office/powerpoint/2010/main" val="2385464102"/>
+      </p:ext>
+    </p:extLst>
+  </p:cSld>
+  <p:clrMapOvr>
+    <a:masterClrMapping/>
+  </p:clrMapOvr>
+  <mc:AlternateContent xmlns:mc="http://schemas.openxmlformats.org/markup-compatibility/2006">
+    <mc:Choice xmlns:p14="http://schemas.microsoft.com/office/powerpoint/2010/main" Requires="p14">
+      <p:transition spd="med" p14:dur="700">
+        <p:fade/>
+      </p:transition>
+    </mc:Choice>
+    <mc:Fallback>
+      <p:transition spd="med">
+        <p:fade/>
+      </p:transition>
+    </mc:Fallback>
+  </mc:AlternateContent>
+</p:sld>
+</file>
+
+<file path=ppt/slides/slide9.xml><?xml version="1.0" encoding="utf-8"?>
+<p:sld xmlns:a="http://schemas.openxmlformats.org/drawingml/2006/main" xmlns:r="http://schemas.openxmlformats.org/officeDocument/2006/relationships" xmlns:p="http://schemas.openxmlformats.org/presentationml/2006/main">
+  <p:cSld>
+    <p:spTree>
+      <p:nvGrpSpPr>
+        <p:cNvPr id="1" name=""/>
+        <p:cNvGrpSpPr/>
+        <p:nvPr/>
+      </p:nvGrpSpPr>
+      <p:grpSpPr>
+        <a:xfrm>
+          <a:off x="0" y="0"/>
+          <a:ext cx="0" cy="0"/>
+          <a:chOff x="0" y="0"/>
+          <a:chExt cx="0" cy="0"/>
+        </a:xfrm>
+      </p:grpSpPr>
+      <p:sp>
+        <p:nvSpPr>
           <p:cNvPr id="3" name="Khung kết quả">
             <a:extLst>
               <a:ext uri="{FF2B5EF4-FFF2-40B4-BE49-F238E27FC236}">
@@ -21125,7 +23712,7 @@
             <a:fld id="{F7021451-1387-4CA6-816F-3879F97B5CBC}" type="slidenum">
               <a:rPr lang="en-US" b="0"/>
               <a:pPr algn="r"/>
-              <a:t>4</a:t>
+              <a:t>9</a:t>
             </a:fld>
             <a:endParaRPr lang="en-US"/>
           </a:p>
@@ -21429,1037 +24016,6 @@
   <p:transition spd="slow">
     <p:comb/>
   </p:transition>
-</p:sld>
-</file>
-
-<file path=ppt/slides/slide9.xml><?xml version="1.0" encoding="utf-8"?>
-<p:sld xmlns:a="http://schemas.openxmlformats.org/drawingml/2006/main" xmlns:r="http://schemas.openxmlformats.org/officeDocument/2006/relationships" xmlns:p="http://schemas.openxmlformats.org/presentationml/2006/main">
-  <p:cSld>
-    <p:bg>
-      <p:bgPr>
-        <a:solidFill>
-          <a:srgbClr val="F5F8FA"/>
-        </a:solidFill>
-        <a:effectLst/>
-      </p:bgPr>
-    </p:bg>
-    <p:spTree>
-      <p:nvGrpSpPr>
-        <p:cNvPr id="1" name=""/>
-        <p:cNvGrpSpPr/>
-        <p:nvPr/>
-      </p:nvGrpSpPr>
-      <p:grpSpPr>
-        <a:xfrm>
-          <a:off x="0" y="0"/>
-          <a:ext cx="0" cy="0"/>
-          <a:chOff x="0" y="0"/>
-          <a:chExt cx="0" cy="0"/>
-        </a:xfrm>
-      </p:grpSpPr>
-      <p:sp>
-        <p:nvSpPr>
-          <p:cNvPr id="2" name="TextBox 1"/>
-          <p:cNvSpPr txBox="1"/>
-          <p:nvPr/>
-        </p:nvSpPr>
-        <p:spPr>
-          <a:xfrm>
-            <a:off x="594360" y="347472"/>
-            <a:ext cx="10972800" cy="502920"/>
-          </a:xfrm>
-          <a:prstGeom prst="rect">
-            <a:avLst/>
-          </a:prstGeom>
-          <a:noFill/>
-        </p:spPr>
-        <p:txBody>
-          <a:bodyPr wrap="square" lIns="54864" tIns="54864" rIns="54864" bIns="54864" anchor="t">
-            <a:spAutoFit/>
-          </a:bodyPr>
-          <a:lstStyle/>
-          <a:p>
-            <a:r>
-              <a:rPr sz="2700" b="1">
-                <a:solidFill>
-                  <a:srgbClr val="12273A"/>
-                </a:solidFill>
-                <a:latin typeface="Aptos"/>
-              </a:rPr>
-              <a:t>6. Audit &amp; kiểm soát rủi ro</a:t>
-            </a:r>
-          </a:p>
-        </p:txBody>
-      </p:sp>
-      <p:sp>
-        <p:nvSpPr>
-          <p:cNvPr id="3" name="Rectangle 2"/>
-          <p:cNvSpPr/>
-          <p:nvPr/>
-        </p:nvSpPr>
-        <p:spPr>
-          <a:xfrm>
-            <a:off x="612648" y="960120"/>
-            <a:ext cx="822960" cy="54864"/>
-          </a:xfrm>
-          <a:prstGeom prst="rect">
-            <a:avLst/>
-          </a:prstGeom>
-          <a:solidFill>
-            <a:srgbClr val="27AE60"/>
-          </a:solidFill>
-          <a:ln>
-            <a:noFill/>
-          </a:ln>
-        </p:spPr>
-        <p:style>
-          <a:lnRef idx="1">
-            <a:schemeClr val="accent1"/>
-          </a:lnRef>
-          <a:fillRef idx="3">
-            <a:schemeClr val="accent1"/>
-          </a:fillRef>
-          <a:effectRef idx="2">
-            <a:schemeClr val="accent1"/>
-          </a:effectRef>
-          <a:fontRef idx="minor">
-            <a:schemeClr val="lt1"/>
-          </a:fontRef>
-        </p:style>
-        <p:txBody>
-          <a:bodyPr rtlCol="0" anchor="ctr"/>
-          <a:lstStyle/>
-          <a:p>
-            <a:pPr algn="ctr"/>
-            <a:endParaRPr/>
-          </a:p>
-        </p:txBody>
-      </p:sp>
-      <p:sp>
-        <p:nvSpPr>
-          <p:cNvPr id="4" name="TextBox 3"/>
-          <p:cNvSpPr txBox="1"/>
-          <p:nvPr/>
-        </p:nvSpPr>
-        <p:spPr>
-          <a:xfrm>
-            <a:off x="9601200" y="411480"/>
-            <a:ext cx="1920240" cy="274320"/>
-          </a:xfrm>
-          <a:prstGeom prst="rect">
-            <a:avLst/>
-          </a:prstGeom>
-          <a:noFill/>
-        </p:spPr>
-        <p:txBody>
-          <a:bodyPr wrap="square" lIns="54864" tIns="54864" rIns="54864" bIns="54864" anchor="t">
-            <a:spAutoFit/>
-          </a:bodyPr>
-          <a:lstStyle/>
-          <a:p>
-            <a:pPr algn="r"/>
-            <a:r>
-              <a:rPr sz="1000" b="1">
-                <a:solidFill>
-                  <a:srgbClr val="27AE60"/>
-                </a:solidFill>
-                <a:latin typeface="Aptos"/>
-              </a:rPr>
-              <a:t>AN TOÀN</a:t>
-            </a:r>
-          </a:p>
-        </p:txBody>
-      </p:sp>
-      <p:sp>
-        <p:nvSpPr>
-          <p:cNvPr id="5" name="TextBox 4"/>
-          <p:cNvSpPr txBox="1"/>
-          <p:nvPr/>
-        </p:nvSpPr>
-        <p:spPr>
-          <a:xfrm>
-            <a:off x="731520" y="1234440"/>
-            <a:ext cx="10515600" cy="411480"/>
-          </a:xfrm>
-          <a:prstGeom prst="rect">
-            <a:avLst/>
-          </a:prstGeom>
-          <a:noFill/>
-        </p:spPr>
-        <p:txBody>
-          <a:bodyPr wrap="square" lIns="54864" tIns="54864" rIns="54864" bIns="54864" anchor="t">
-            <a:spAutoFit/>
-          </a:bodyPr>
-          <a:lstStyle/>
-          <a:p>
-            <a:r>
-              <a:rPr sz="1700" b="0">
-                <a:solidFill>
-                  <a:srgbClr val="2F3E46"/>
-                </a:solidFill>
-                <a:latin typeface="Aptos"/>
-              </a:rPr>
-              <a:t>Trước khi chạy script, thực hiện checklist thẩm định (Audit):</a:t>
-            </a:r>
-          </a:p>
-        </p:txBody>
-      </p:sp>
-      <p:sp>
-        <p:nvSpPr>
-          <p:cNvPr id="6" name="Oval 5"/>
-          <p:cNvSpPr/>
-          <p:nvPr/>
-        </p:nvSpPr>
-        <p:spPr>
-          <a:xfrm>
-            <a:off x="822960" y="1828800"/>
-            <a:ext cx="438912" cy="438912"/>
-          </a:xfrm>
-          <a:prstGeom prst="ellipse">
-            <a:avLst/>
-          </a:prstGeom>
-          <a:solidFill>
-            <a:srgbClr val="27AE60"/>
-          </a:solidFill>
-          <a:ln>
-            <a:noFill/>
-          </a:ln>
-        </p:spPr>
-        <p:style>
-          <a:lnRef idx="1">
-            <a:schemeClr val="accent1"/>
-          </a:lnRef>
-          <a:fillRef idx="3">
-            <a:schemeClr val="accent1"/>
-          </a:fillRef>
-          <a:effectRef idx="2">
-            <a:schemeClr val="accent1"/>
-          </a:effectRef>
-          <a:fontRef idx="minor">
-            <a:schemeClr val="lt1"/>
-          </a:fontRef>
-        </p:style>
-        <p:txBody>
-          <a:bodyPr rtlCol="0" anchor="ctr"/>
-          <a:lstStyle/>
-          <a:p>
-            <a:pPr algn="ctr"/>
-            <a:endParaRPr/>
-          </a:p>
-        </p:txBody>
-      </p:sp>
-      <p:sp>
-        <p:nvSpPr>
-          <p:cNvPr id="7" name="TextBox 6"/>
-          <p:cNvSpPr txBox="1"/>
-          <p:nvPr/>
-        </p:nvSpPr>
-        <p:spPr>
-          <a:xfrm>
-            <a:off x="822960" y="1911095"/>
-            <a:ext cx="438912" cy="182880"/>
-          </a:xfrm>
-          <a:prstGeom prst="rect">
-            <a:avLst/>
-          </a:prstGeom>
-          <a:noFill/>
-        </p:spPr>
-        <p:txBody>
-          <a:bodyPr wrap="square" lIns="54864" tIns="54864" rIns="54864" bIns="54864" anchor="t">
-            <a:spAutoFit/>
-          </a:bodyPr>
-          <a:lstStyle/>
-          <a:p>
-            <a:pPr algn="ctr"/>
-            <a:r>
-              <a:rPr sz="1100" b="1">
-                <a:solidFill>
-                  <a:srgbClr val="FFFFFF"/>
-                </a:solidFill>
-                <a:latin typeface="Aptos"/>
-              </a:rPr>
-              <a:t>01</a:t>
-            </a:r>
-          </a:p>
-        </p:txBody>
-      </p:sp>
-      <p:sp>
-        <p:nvSpPr>
-          <p:cNvPr id="8" name="TextBox 7"/>
-          <p:cNvSpPr txBox="1"/>
-          <p:nvPr/>
-        </p:nvSpPr>
-        <p:spPr>
-          <a:xfrm>
-            <a:off x="1508760" y="1828800"/>
-            <a:ext cx="2194560" cy="292608"/>
-          </a:xfrm>
-          <a:prstGeom prst="rect">
-            <a:avLst/>
-          </a:prstGeom>
-          <a:noFill/>
-        </p:spPr>
-        <p:txBody>
-          <a:bodyPr wrap="square" lIns="54864" tIns="54864" rIns="54864" bIns="54864" anchor="t">
-            <a:spAutoFit/>
-          </a:bodyPr>
-          <a:lstStyle/>
-          <a:p>
-            <a:r>
-              <a:rPr sz="1500" b="1">
-                <a:solidFill>
-                  <a:srgbClr val="12273A"/>
-                </a:solidFill>
-                <a:latin typeface="Aptos"/>
-              </a:rPr>
-              <a:t>Đường dẫn</a:t>
-            </a:r>
-          </a:p>
-        </p:txBody>
-      </p:sp>
-      <p:sp>
-        <p:nvSpPr>
-          <p:cNvPr id="9" name="TextBox 8"/>
-          <p:cNvSpPr txBox="1"/>
-          <p:nvPr/>
-        </p:nvSpPr>
-        <p:spPr>
-          <a:xfrm>
-            <a:off x="3657600" y="1828800"/>
-            <a:ext cx="7315200" cy="384048"/>
-          </a:xfrm>
-          <a:prstGeom prst="rect">
-            <a:avLst/>
-          </a:prstGeom>
-          <a:noFill/>
-        </p:spPr>
-        <p:txBody>
-          <a:bodyPr wrap="square" lIns="54864" tIns="54864" rIns="54864" bIns="54864" anchor="t">
-            <a:spAutoFit/>
-          </a:bodyPr>
-          <a:lstStyle/>
-          <a:p>
-            <a:r>
-              <a:rPr sz="1400" b="0">
-                <a:solidFill>
-                  <a:srgbClr val="2F3E46"/>
-                </a:solidFill>
-                <a:latin typeface="Aptos"/>
-              </a:rPr>
-              <a:t>Xác nhận đúng thư mục dự án và file log nguồn.</a:t>
-            </a:r>
-          </a:p>
-        </p:txBody>
-      </p:sp>
-      <p:sp>
-        <p:nvSpPr>
-          <p:cNvPr id="10" name="Oval 9"/>
-          <p:cNvSpPr/>
-          <p:nvPr/>
-        </p:nvSpPr>
-        <p:spPr>
-          <a:xfrm>
-            <a:off x="822960" y="2578608"/>
-            <a:ext cx="438912" cy="438912"/>
-          </a:xfrm>
-          <a:prstGeom prst="ellipse">
-            <a:avLst/>
-          </a:prstGeom>
-          <a:solidFill>
-            <a:srgbClr val="27AE60"/>
-          </a:solidFill>
-          <a:ln>
-            <a:noFill/>
-          </a:ln>
-        </p:spPr>
-        <p:style>
-          <a:lnRef idx="1">
-            <a:schemeClr val="accent1"/>
-          </a:lnRef>
-          <a:fillRef idx="3">
-            <a:schemeClr val="accent1"/>
-          </a:fillRef>
-          <a:effectRef idx="2">
-            <a:schemeClr val="accent1"/>
-          </a:effectRef>
-          <a:fontRef idx="minor">
-            <a:schemeClr val="lt1"/>
-          </a:fontRef>
-        </p:style>
-        <p:txBody>
-          <a:bodyPr rtlCol="0" anchor="ctr"/>
-          <a:lstStyle/>
-          <a:p>
-            <a:pPr algn="ctr"/>
-            <a:endParaRPr/>
-          </a:p>
-        </p:txBody>
-      </p:sp>
-      <p:sp>
-        <p:nvSpPr>
-          <p:cNvPr id="11" name="TextBox 10"/>
-          <p:cNvSpPr txBox="1"/>
-          <p:nvPr/>
-        </p:nvSpPr>
-        <p:spPr>
-          <a:xfrm>
-            <a:off x="822960" y="2660903"/>
-            <a:ext cx="438912" cy="182880"/>
-          </a:xfrm>
-          <a:prstGeom prst="rect">
-            <a:avLst/>
-          </a:prstGeom>
-          <a:noFill/>
-        </p:spPr>
-        <p:txBody>
-          <a:bodyPr wrap="square" lIns="54864" tIns="54864" rIns="54864" bIns="54864" anchor="t">
-            <a:spAutoFit/>
-          </a:bodyPr>
-          <a:lstStyle/>
-          <a:p>
-            <a:pPr algn="ctr"/>
-            <a:r>
-              <a:rPr sz="1100" b="1">
-                <a:solidFill>
-                  <a:srgbClr val="FFFFFF"/>
-                </a:solidFill>
-                <a:latin typeface="Aptos"/>
-              </a:rPr>
-              <a:t>02</a:t>
-            </a:r>
-          </a:p>
-        </p:txBody>
-      </p:sp>
-      <p:sp>
-        <p:nvSpPr>
-          <p:cNvPr id="12" name="TextBox 11"/>
-          <p:cNvSpPr txBox="1"/>
-          <p:nvPr/>
-        </p:nvSpPr>
-        <p:spPr>
-          <a:xfrm>
-            <a:off x="1508760" y="2578608"/>
-            <a:ext cx="2194560" cy="292608"/>
-          </a:xfrm>
-          <a:prstGeom prst="rect">
-            <a:avLst/>
-          </a:prstGeom>
-          <a:noFill/>
-        </p:spPr>
-        <p:txBody>
-          <a:bodyPr wrap="square" lIns="54864" tIns="54864" rIns="54864" bIns="54864" anchor="t">
-            <a:spAutoFit/>
-          </a:bodyPr>
-          <a:lstStyle/>
-          <a:p>
-            <a:r>
-              <a:rPr sz="1500" b="1">
-                <a:solidFill>
-                  <a:srgbClr val="12273A"/>
-                </a:solidFill>
-                <a:latin typeface="Aptos"/>
-              </a:rPr>
-              <a:t>Kiểm tra đầu vào</a:t>
-            </a:r>
-          </a:p>
-        </p:txBody>
-      </p:sp>
-      <p:sp>
-        <p:nvSpPr>
-          <p:cNvPr id="13" name="TextBox 12"/>
-          <p:cNvSpPr txBox="1"/>
-          <p:nvPr/>
-        </p:nvSpPr>
-        <p:spPr>
-          <a:xfrm>
-            <a:off x="3657600" y="2578608"/>
-            <a:ext cx="7315200" cy="384048"/>
-          </a:xfrm>
-          <a:prstGeom prst="rect">
-            <a:avLst/>
-          </a:prstGeom>
-          <a:noFill/>
-        </p:spPr>
-        <p:txBody>
-          <a:bodyPr wrap="square" lIns="54864" tIns="54864" rIns="54864" bIns="54864" anchor="t">
-            <a:spAutoFit/>
-          </a:bodyPr>
-          <a:lstStyle/>
-          <a:p>
-            <a:r>
-              <a:rPr sz="1400" b="0">
-                <a:solidFill>
-                  <a:srgbClr val="2F3E46"/>
-                </a:solidFill>
-                <a:latin typeface="Aptos"/>
-              </a:rPr>
-              <a:t>Dùng if not exist để dừng nếu thiếu log.</a:t>
-            </a:r>
-          </a:p>
-        </p:txBody>
-      </p:sp>
-      <p:sp>
-        <p:nvSpPr>
-          <p:cNvPr id="14" name="Oval 13"/>
-          <p:cNvSpPr/>
-          <p:nvPr/>
-        </p:nvSpPr>
-        <p:spPr>
-          <a:xfrm>
-            <a:off x="822960" y="3328415"/>
-            <a:ext cx="438912" cy="438912"/>
-          </a:xfrm>
-          <a:prstGeom prst="ellipse">
-            <a:avLst/>
-          </a:prstGeom>
-          <a:solidFill>
-            <a:srgbClr val="27AE60"/>
-          </a:solidFill>
-          <a:ln>
-            <a:noFill/>
-          </a:ln>
-        </p:spPr>
-        <p:style>
-          <a:lnRef idx="1">
-            <a:schemeClr val="accent1"/>
-          </a:lnRef>
-          <a:fillRef idx="3">
-            <a:schemeClr val="accent1"/>
-          </a:fillRef>
-          <a:effectRef idx="2">
-            <a:schemeClr val="accent1"/>
-          </a:effectRef>
-          <a:fontRef idx="minor">
-            <a:schemeClr val="lt1"/>
-          </a:fontRef>
-        </p:style>
-        <p:txBody>
-          <a:bodyPr rtlCol="0" anchor="ctr"/>
-          <a:lstStyle/>
-          <a:p>
-            <a:pPr algn="ctr"/>
-            <a:endParaRPr/>
-          </a:p>
-        </p:txBody>
-      </p:sp>
-      <p:sp>
-        <p:nvSpPr>
-          <p:cNvPr id="15" name="TextBox 14"/>
-          <p:cNvSpPr txBox="1"/>
-          <p:nvPr/>
-        </p:nvSpPr>
-        <p:spPr>
-          <a:xfrm>
-            <a:off x="822960" y="3410711"/>
-            <a:ext cx="438912" cy="182880"/>
-          </a:xfrm>
-          <a:prstGeom prst="rect">
-            <a:avLst/>
-          </a:prstGeom>
-          <a:noFill/>
-        </p:spPr>
-        <p:txBody>
-          <a:bodyPr wrap="square" lIns="54864" tIns="54864" rIns="54864" bIns="54864" anchor="t">
-            <a:spAutoFit/>
-          </a:bodyPr>
-          <a:lstStyle/>
-          <a:p>
-            <a:pPr algn="ctr"/>
-            <a:r>
-              <a:rPr sz="1100" b="1">
-                <a:solidFill>
-                  <a:srgbClr val="FFFFFF"/>
-                </a:solidFill>
-                <a:latin typeface="Aptos"/>
-              </a:rPr>
-              <a:t>03</a:t>
-            </a:r>
-          </a:p>
-        </p:txBody>
-      </p:sp>
-      <p:sp>
-        <p:nvSpPr>
-          <p:cNvPr id="16" name="TextBox 15"/>
-          <p:cNvSpPr txBox="1"/>
-          <p:nvPr/>
-        </p:nvSpPr>
-        <p:spPr>
-          <a:xfrm>
-            <a:off x="1508760" y="3328415"/>
-            <a:ext cx="2194560" cy="292608"/>
-          </a:xfrm>
-          <a:prstGeom prst="rect">
-            <a:avLst/>
-          </a:prstGeom>
-          <a:noFill/>
-        </p:spPr>
-        <p:txBody>
-          <a:bodyPr wrap="square" lIns="54864" tIns="54864" rIns="54864" bIns="54864" anchor="t">
-            <a:spAutoFit/>
-          </a:bodyPr>
-          <a:lstStyle/>
-          <a:p>
-            <a:r>
-              <a:rPr sz="1500" b="1">
-                <a:solidFill>
-                  <a:srgbClr val="12273A"/>
-                </a:solidFill>
-                <a:latin typeface="Aptos"/>
-              </a:rPr>
-              <a:t>Phạm vi tác động</a:t>
-            </a:r>
-          </a:p>
-        </p:txBody>
-      </p:sp>
-      <p:sp>
-        <p:nvSpPr>
-          <p:cNvPr id="17" name="TextBox 16"/>
-          <p:cNvSpPr txBox="1"/>
-          <p:nvPr/>
-        </p:nvSpPr>
-        <p:spPr>
-          <a:xfrm>
-            <a:off x="3657600" y="3328415"/>
-            <a:ext cx="7315200" cy="384048"/>
-          </a:xfrm>
-          <a:prstGeom prst="rect">
-            <a:avLst/>
-          </a:prstGeom>
-          <a:noFill/>
-        </p:spPr>
-        <p:txBody>
-          <a:bodyPr wrap="square" lIns="54864" tIns="54864" rIns="54864" bIns="54864" anchor="t">
-            <a:spAutoFit/>
-          </a:bodyPr>
-          <a:lstStyle/>
-          <a:p>
-            <a:r>
-              <a:rPr sz="1400" b="0">
-                <a:solidFill>
-                  <a:srgbClr val="2F3E46"/>
-                </a:solidFill>
-                <a:latin typeface="Aptos"/>
-              </a:rPr>
-              <a:t>Chỉ ghi vào backup/; không xóa dữ liệu nguồn.</a:t>
-            </a:r>
-          </a:p>
-        </p:txBody>
-      </p:sp>
-      <p:sp>
-        <p:nvSpPr>
-          <p:cNvPr id="18" name="Oval 17"/>
-          <p:cNvSpPr/>
-          <p:nvPr/>
-        </p:nvSpPr>
-        <p:spPr>
-          <a:xfrm>
-            <a:off x="822960" y="4078224"/>
-            <a:ext cx="438912" cy="438912"/>
-          </a:xfrm>
-          <a:prstGeom prst="ellipse">
-            <a:avLst/>
-          </a:prstGeom>
-          <a:solidFill>
-            <a:srgbClr val="27AE60"/>
-          </a:solidFill>
-          <a:ln>
-            <a:noFill/>
-          </a:ln>
-        </p:spPr>
-        <p:style>
-          <a:lnRef idx="1">
-            <a:schemeClr val="accent1"/>
-          </a:lnRef>
-          <a:fillRef idx="3">
-            <a:schemeClr val="accent1"/>
-          </a:fillRef>
-          <a:effectRef idx="2">
-            <a:schemeClr val="accent1"/>
-          </a:effectRef>
-          <a:fontRef idx="minor">
-            <a:schemeClr val="lt1"/>
-          </a:fontRef>
-        </p:style>
-        <p:txBody>
-          <a:bodyPr rtlCol="0" anchor="ctr"/>
-          <a:lstStyle/>
-          <a:p>
-            <a:pPr algn="ctr"/>
-            <a:endParaRPr/>
-          </a:p>
-        </p:txBody>
-      </p:sp>
-      <p:sp>
-        <p:nvSpPr>
-          <p:cNvPr id="19" name="TextBox 18"/>
-          <p:cNvSpPr txBox="1"/>
-          <p:nvPr/>
-        </p:nvSpPr>
-        <p:spPr>
-          <a:xfrm>
-            <a:off x="822960" y="4160520"/>
-            <a:ext cx="438912" cy="182880"/>
-          </a:xfrm>
-          <a:prstGeom prst="rect">
-            <a:avLst/>
-          </a:prstGeom>
-          <a:noFill/>
-        </p:spPr>
-        <p:txBody>
-          <a:bodyPr wrap="square" lIns="54864" tIns="54864" rIns="54864" bIns="54864" anchor="t">
-            <a:spAutoFit/>
-          </a:bodyPr>
-          <a:lstStyle/>
-          <a:p>
-            <a:pPr algn="ctr"/>
-            <a:r>
-              <a:rPr sz="1100" b="1">
-                <a:solidFill>
-                  <a:srgbClr val="FFFFFF"/>
-                </a:solidFill>
-                <a:latin typeface="Aptos"/>
-              </a:rPr>
-              <a:t>04</a:t>
-            </a:r>
-          </a:p>
-        </p:txBody>
-      </p:sp>
-      <p:sp>
-        <p:nvSpPr>
-          <p:cNvPr id="20" name="TextBox 19"/>
-          <p:cNvSpPr txBox="1"/>
-          <p:nvPr/>
-        </p:nvSpPr>
-        <p:spPr>
-          <a:xfrm>
-            <a:off x="1508760" y="4078224"/>
-            <a:ext cx="2194560" cy="292608"/>
-          </a:xfrm>
-          <a:prstGeom prst="rect">
-            <a:avLst/>
-          </a:prstGeom>
-          <a:noFill/>
-        </p:spPr>
-        <p:txBody>
-          <a:bodyPr wrap="square" lIns="54864" tIns="54864" rIns="54864" bIns="54864" anchor="t">
-            <a:spAutoFit/>
-          </a:bodyPr>
-          <a:lstStyle/>
-          <a:p>
-            <a:r>
-              <a:rPr sz="1500" b="1">
-                <a:solidFill>
-                  <a:srgbClr val="12273A"/>
-                </a:solidFill>
-                <a:latin typeface="Aptos"/>
-              </a:rPr>
-              <a:t>Bảo vệ bí mật</a:t>
-            </a:r>
-          </a:p>
-        </p:txBody>
-      </p:sp>
-      <p:sp>
-        <p:nvSpPr>
-          <p:cNvPr id="21" name="TextBox 20"/>
-          <p:cNvSpPr txBox="1"/>
-          <p:nvPr/>
-        </p:nvSpPr>
-        <p:spPr>
-          <a:xfrm>
-            <a:off x="3657600" y="4078224"/>
-            <a:ext cx="7315200" cy="384048"/>
-          </a:xfrm>
-          <a:prstGeom prst="rect">
-            <a:avLst/>
-          </a:prstGeom>
-          <a:noFill/>
-        </p:spPr>
-        <p:txBody>
-          <a:bodyPr wrap="square" lIns="54864" tIns="54864" rIns="54864" bIns="54864" anchor="t">
-            <a:spAutoFit/>
-          </a:bodyPr>
-          <a:lstStyle/>
-          <a:p>
-            <a:r>
-              <a:rPr sz="1400" b="0">
-                <a:solidFill>
-                  <a:srgbClr val="2F3E46"/>
-                </a:solidFill>
-                <a:latin typeface="Aptos"/>
-              </a:rPr>
-              <a:t>Không commit .env hoặc thông tin xác thực.</a:t>
-            </a:r>
-          </a:p>
-        </p:txBody>
-      </p:sp>
-      <p:sp>
-        <p:nvSpPr>
-          <p:cNvPr id="22" name="Oval 21"/>
-          <p:cNvSpPr/>
-          <p:nvPr/>
-        </p:nvSpPr>
-        <p:spPr>
-          <a:xfrm>
-            <a:off x="822960" y="4828031"/>
-            <a:ext cx="438912" cy="438912"/>
-          </a:xfrm>
-          <a:prstGeom prst="ellipse">
-            <a:avLst/>
-          </a:prstGeom>
-          <a:solidFill>
-            <a:srgbClr val="27AE60"/>
-          </a:solidFill>
-          <a:ln>
-            <a:noFill/>
-          </a:ln>
-        </p:spPr>
-        <p:style>
-          <a:lnRef idx="1">
-            <a:schemeClr val="accent1"/>
-          </a:lnRef>
-          <a:fillRef idx="3">
-            <a:schemeClr val="accent1"/>
-          </a:fillRef>
-          <a:effectRef idx="2">
-            <a:schemeClr val="accent1"/>
-          </a:effectRef>
-          <a:fontRef idx="minor">
-            <a:schemeClr val="lt1"/>
-          </a:fontRef>
-        </p:style>
-        <p:txBody>
-          <a:bodyPr rtlCol="0" anchor="ctr"/>
-          <a:lstStyle/>
-          <a:p>
-            <a:pPr algn="ctr"/>
-            <a:endParaRPr/>
-          </a:p>
-        </p:txBody>
-      </p:sp>
-      <p:sp>
-        <p:nvSpPr>
-          <p:cNvPr id="23" name="TextBox 22"/>
-          <p:cNvSpPr txBox="1"/>
-          <p:nvPr/>
-        </p:nvSpPr>
-        <p:spPr>
-          <a:xfrm>
-            <a:off x="822960" y="4910327"/>
-            <a:ext cx="438912" cy="182880"/>
-          </a:xfrm>
-          <a:prstGeom prst="rect">
-            <a:avLst/>
-          </a:prstGeom>
-          <a:noFill/>
-        </p:spPr>
-        <p:txBody>
-          <a:bodyPr wrap="square" lIns="54864" tIns="54864" rIns="54864" bIns="54864" anchor="t">
-            <a:spAutoFit/>
-          </a:bodyPr>
-          <a:lstStyle/>
-          <a:p>
-            <a:pPr algn="ctr"/>
-            <a:r>
-              <a:rPr sz="1100" b="1">
-                <a:solidFill>
-                  <a:srgbClr val="FFFFFF"/>
-                </a:solidFill>
-                <a:latin typeface="Aptos"/>
-              </a:rPr>
-              <a:t>05</a:t>
-            </a:r>
-          </a:p>
-        </p:txBody>
-      </p:sp>
-      <p:sp>
-        <p:nvSpPr>
-          <p:cNvPr id="24" name="TextBox 23"/>
-          <p:cNvSpPr txBox="1"/>
-          <p:nvPr/>
-        </p:nvSpPr>
-        <p:spPr>
-          <a:xfrm>
-            <a:off x="1508760" y="4828031"/>
-            <a:ext cx="2194560" cy="292608"/>
-          </a:xfrm>
-          <a:prstGeom prst="rect">
-            <a:avLst/>
-          </a:prstGeom>
-          <a:noFill/>
-        </p:spPr>
-        <p:txBody>
-          <a:bodyPr wrap="square" lIns="54864" tIns="54864" rIns="54864" bIns="54864" anchor="t">
-            <a:spAutoFit/>
-          </a:bodyPr>
-          <a:lstStyle/>
-          <a:p>
-            <a:r>
-              <a:rPr sz="1500" b="1">
-                <a:solidFill>
-                  <a:srgbClr val="12273A"/>
-                </a:solidFill>
-                <a:latin typeface="Aptos"/>
-              </a:rPr>
-              <a:t>Kiểm thử</a:t>
-            </a:r>
-          </a:p>
-        </p:txBody>
-      </p:sp>
-      <p:sp>
-        <p:nvSpPr>
-          <p:cNvPr id="25" name="TextBox 24"/>
-          <p:cNvSpPr txBox="1"/>
-          <p:nvPr/>
-        </p:nvSpPr>
-        <p:spPr>
-          <a:xfrm>
-            <a:off x="3657600" y="4828031"/>
-            <a:ext cx="7315200" cy="384048"/>
-          </a:xfrm>
-          <a:prstGeom prst="rect">
-            <a:avLst/>
-          </a:prstGeom>
-          <a:noFill/>
-        </p:spPr>
-        <p:txBody>
-          <a:bodyPr wrap="square" lIns="54864" tIns="54864" rIns="54864" bIns="54864" anchor="t">
-            <a:spAutoFit/>
-          </a:bodyPr>
-          <a:lstStyle/>
-          <a:p>
-            <a:r>
-              <a:rPr sz="1400" b="0">
-                <a:solidFill>
-                  <a:srgbClr val="2F3E46"/>
-                </a:solidFill>
-                <a:latin typeface="Aptos"/>
-              </a:rPr>
-              <a:t>Chạy thử với log mẫu trước khi dùng log 500 MB.</a:t>
-            </a:r>
-          </a:p>
-        </p:txBody>
-      </p:sp>
-      <p:sp>
-        <p:nvSpPr>
-          <p:cNvPr id="26" name="TextBox 25"/>
-          <p:cNvSpPr txBox="1"/>
-          <p:nvPr/>
-        </p:nvSpPr>
-        <p:spPr>
-          <a:xfrm>
-            <a:off x="914400" y="5897880"/>
-            <a:ext cx="10241280" cy="411480"/>
-          </a:xfrm>
-          <a:prstGeom prst="rect">
-            <a:avLst/>
-          </a:prstGeom>
-          <a:noFill/>
-        </p:spPr>
-        <p:txBody>
-          <a:bodyPr wrap="square" lIns="54864" tIns="54864" rIns="54864" bIns="54864" anchor="t">
-            <a:spAutoFit/>
-          </a:bodyPr>
-          <a:lstStyle/>
-          <a:p>
-            <a:pPr algn="ctr"/>
-            <a:r>
-              <a:rPr sz="1500" b="1">
-                <a:solidFill>
-                  <a:srgbClr val="C0392B"/>
-                </a:solidFill>
-                <a:latin typeface="Aptos"/>
-              </a:rPr>
-              <a:t>Không chạy del /f /s /q nếu chưa xác minh chính xác đường dẫn và phạm vi xóa.</a:t>
-            </a:r>
-          </a:p>
-        </p:txBody>
-      </p:sp>
-      <p:sp>
-        <p:nvSpPr>
-          <p:cNvPr id="27" name="TextBox 26"/>
-          <p:cNvSpPr txBox="1"/>
-          <p:nvPr/>
-        </p:nvSpPr>
-        <p:spPr>
-          <a:xfrm>
-            <a:off x="594360" y="6510528"/>
-            <a:ext cx="8686800" cy="164592"/>
-          </a:xfrm>
-          <a:prstGeom prst="rect">
-            <a:avLst/>
-          </a:prstGeom>
-          <a:noFill/>
-        </p:spPr>
-        <p:txBody>
-          <a:bodyPr wrap="square" lIns="54864" tIns="54864" rIns="54864" bIns="54864" anchor="t">
-            <a:spAutoFit/>
-          </a:bodyPr>
-          <a:lstStyle/>
-          <a:p>
-            <a:r>
-              <a:rPr sz="800" b="0">
-                <a:solidFill>
-                  <a:srgbClr val="66757E"/>
-                </a:solidFill>
-                <a:latin typeface="Aptos"/>
-              </a:rPr>
-              <a:t>GREENTECH  |  MINI PROJECT HẠ TẦNG &amp; NHẬT KÝ KỸ THUẬT</a:t>
-            </a:r>
-          </a:p>
-        </p:txBody>
-      </p:sp>
-      <p:sp>
-        <p:nvSpPr>
-          <p:cNvPr id="28" name="TextBox 27"/>
-          <p:cNvSpPr txBox="1"/>
-          <p:nvPr/>
-        </p:nvSpPr>
-        <p:spPr>
-          <a:xfrm>
-            <a:off x="11155680" y="6473952"/>
-            <a:ext cx="411480" cy="228600"/>
-          </a:xfrm>
-          <a:prstGeom prst="rect">
-            <a:avLst/>
-          </a:prstGeom>
-          <a:noFill/>
-        </p:spPr>
-        <p:txBody>
-          <a:bodyPr wrap="square" lIns="54864" tIns="54864" rIns="54864" bIns="54864" anchor="t">
-            <a:spAutoFit/>
-          </a:bodyPr>
-          <a:lstStyle/>
-          <a:p>
-            <a:pPr algn="r"/>
-            <a:r>
-              <a:rPr sz="1000" b="1">
-                <a:solidFill>
-                  <a:srgbClr val="27AE60"/>
-                </a:solidFill>
-                <a:latin typeface="Aptos"/>
-              </a:rPr>
-              <a:t>07</a:t>
-            </a:r>
-          </a:p>
-        </p:txBody>
-      </p:sp>
-    </p:spTree>
-  </p:cSld>
-  <p:clrMapOvr>
-    <a:masterClrMapping/>
-  </p:clrMapOvr>
-  <mc:AlternateContent xmlns:mc="http://schemas.openxmlformats.org/markup-compatibility/2006">
-    <mc:Choice xmlns:p14="http://schemas.microsoft.com/office/powerpoint/2010/main" Requires="p14">
-      <p:transition spd="slow" p14:dur="1600">
-        <p14:prism isInverted="1"/>
-      </p:transition>
-    </mc:Choice>
-    <mc:Fallback>
-      <p:transition spd="slow">
-        <p:fade/>
-      </p:transition>
-    </mc:Fallback>
-  </mc:AlternateContent>
 </p:sld>
 </file>
 
